--- a/docs/judge-walkthrough.pptx
+++ b/docs/judge-walkthrough.pptx
@@ -3961,7 +3961,7 @@
               </a:defRPr>
             </a:pPr>
             <a:r>
-              <a:t>Use the private QA build and credentials provided with the submission. No setup or reseeding is needed.</a:t>
+              <a:t>Use the private QA build and reviewer credentials provided with the submission.</a:t>
             </a:r>
           </a:p>
         </p:txBody>

--- a/docs/judge-walkthrough.pptx
+++ b/docs/judge-walkthrough.pptx
@@ -12,6 +12,11 @@
     <p:sldId id="260" r:id="rId11"/>
     <p:sldId id="261" r:id="rId12"/>
     <p:sldId id="262" r:id="rId13"/>
+    <p:sldId id="263" r:id="rId14"/>
+    <p:sldId id="264" r:id="rId15"/>
+    <p:sldId id="265" r:id="rId16"/>
+    <p:sldId id="266" r:id="rId17"/>
+    <p:sldId id="267" r:id="rId18"/>
   </p:sldIdLst>
   <p:sldSz cx="12191695" cy="6858000" type="screen4x3"/>
   <p:notesSz cx="6858000" cy="9144000"/>
@@ -3319,7 +3324,7 @@
               </a:defRPr>
             </a:pPr>
             <a:r>
-              <a:t>Use Petak: a 6-minute judge walkthrough</a:t>
+              <a:t>Petak: judge user manual</a:t>
             </a:r>
           </a:p>
         </p:txBody>
@@ -3355,7 +3360,7 @@
               </a:defRPr>
             </a:pPr>
             <a:r>
-              <a:t>A practical path through the prepared reviewer account and one new capture.</a:t>
+              <a:t>A guided tour of the prepared account, specialist dashboards, tasks and new captures.</a:t>
             </a:r>
           </a:p>
         </p:txBody>
@@ -3962,6 +3967,3762 @@
             </a:pPr>
             <a:r>
               <a:t>Use the private QA build and reviewer credentials provided with the submission.</a:t>
+            </a:r>
+          </a:p>
+        </p:txBody>
+      </p:sp>
+    </p:spTree>
+  </p:cSld>
+  <p:clrMapOvr>
+    <a:masterClrMapping/>
+  </p:clrMapOvr>
+</p:sld>
+</file>
+
+<file path=ppt/slides/slide10.xml><?xml version="1.0" encoding="utf-8"?>
+<p:sld xmlns:a="http://schemas.openxmlformats.org/drawingml/2006/main" xmlns:p="http://schemas.openxmlformats.org/presentationml/2006/main" xmlns:r="http://schemas.openxmlformats.org/officeDocument/2006/relationships">
+  <p:cSld>
+    <p:spTree>
+      <p:nvGrpSpPr>
+        <p:cNvPr id="1" name=""/>
+        <p:cNvGrpSpPr/>
+        <p:nvPr/>
+      </p:nvGrpSpPr>
+      <p:grpSpPr/>
+      <p:sp>
+        <p:nvSpPr>
+          <p:cNvPr id="2" name="Rectangle 1"/>
+          <p:cNvSpPr/>
+          <p:nvPr/>
+        </p:nvSpPr>
+        <p:spPr>
+          <a:xfrm>
+            <a:off x="0" y="0"/>
+            <a:ext cx="12191695" cy="6858000"/>
+          </a:xfrm>
+          <a:prstGeom prst="rect">
+            <a:avLst/>
+          </a:prstGeom>
+          <a:solidFill>
+            <a:srgbClr val="F8F5EC"/>
+          </a:solidFill>
+          <a:ln>
+            <a:noFill/>
+          </a:ln>
+        </p:spPr>
+        <p:style>
+          <a:lnRef idx="1">
+            <a:schemeClr val="accent1"/>
+          </a:lnRef>
+          <a:fillRef idx="3">
+            <a:schemeClr val="accent1"/>
+          </a:fillRef>
+          <a:effectRef idx="2">
+            <a:schemeClr val="accent1"/>
+          </a:effectRef>
+          <a:fontRef idx="minor">
+            <a:schemeClr val="lt1"/>
+          </a:fontRef>
+        </p:style>
+        <p:txBody>
+          <a:bodyPr rtlCol="0" anchor="ctr"/>
+          <a:lstStyle/>
+          <a:p>
+            <a:pPr algn="ctr"/>
+          </a:p>
+        </p:txBody>
+      </p:sp>
+      <p:sp>
+        <p:nvSpPr>
+          <p:cNvPr id="3" name="Rectangle 2"/>
+          <p:cNvSpPr/>
+          <p:nvPr/>
+        </p:nvSpPr>
+        <p:spPr>
+          <a:xfrm>
+            <a:off x="0" y="0"/>
+            <a:ext cx="12191695" cy="585216"/>
+          </a:xfrm>
+          <a:prstGeom prst="rect">
+            <a:avLst/>
+          </a:prstGeom>
+          <a:solidFill>
+            <a:srgbClr val="08090C"/>
+          </a:solidFill>
+          <a:ln>
+            <a:noFill/>
+          </a:ln>
+        </p:spPr>
+        <p:style>
+          <a:lnRef idx="1">
+            <a:schemeClr val="accent1"/>
+          </a:lnRef>
+          <a:fillRef idx="3">
+            <a:schemeClr val="accent1"/>
+          </a:fillRef>
+          <a:effectRef idx="2">
+            <a:schemeClr val="accent1"/>
+          </a:effectRef>
+          <a:fontRef idx="minor">
+            <a:schemeClr val="lt1"/>
+          </a:fontRef>
+        </p:style>
+        <p:txBody>
+          <a:bodyPr rtlCol="0" anchor="ctr"/>
+          <a:lstStyle/>
+          <a:p>
+            <a:pPr algn="ctr"/>
+          </a:p>
+        </p:txBody>
+      </p:sp>
+      <p:sp>
+        <p:nvSpPr>
+          <p:cNvPr id="4" name="TextBox 3"/>
+          <p:cNvSpPr txBox="1"/>
+          <p:nvPr/>
+        </p:nvSpPr>
+        <p:spPr>
+          <a:xfrm>
+            <a:off x="512064" y="128016"/>
+            <a:ext cx="2011680" cy="283464"/>
+          </a:xfrm>
+          <a:prstGeom prst="rect">
+            <a:avLst/>
+          </a:prstGeom>
+          <a:noFill/>
+        </p:spPr>
+        <p:txBody>
+          <a:bodyPr wrap="square" lIns="18288" rIns="18288" tIns="18288" bIns="18288" anchor="t">
+            <a:spAutoFit/>
+          </a:bodyPr>
+          <a:lstStyle/>
+          <a:p>
+            <a:pPr algn="l">
+              <a:defRPr sz="1700" b="1">
+                <a:solidFill>
+                  <a:srgbClr val="FFFFFF"/>
+                </a:solidFill>
+                <a:latin typeface="Avenir Next"/>
+              </a:defRPr>
+            </a:pPr>
+            <a:r>
+              <a:t>PETAK</a:t>
+            </a:r>
+          </a:p>
+        </p:txBody>
+      </p:sp>
+      <p:sp>
+        <p:nvSpPr>
+          <p:cNvPr id="5" name="TextBox 4"/>
+          <p:cNvSpPr txBox="1"/>
+          <p:nvPr/>
+        </p:nvSpPr>
+        <p:spPr>
+          <a:xfrm>
+            <a:off x="3794760" y="155448"/>
+            <a:ext cx="4617720" cy="237744"/>
+          </a:xfrm>
+          <a:prstGeom prst="rect">
+            <a:avLst/>
+          </a:prstGeom>
+          <a:noFill/>
+        </p:spPr>
+        <p:txBody>
+          <a:bodyPr wrap="square" lIns="18288" rIns="18288" tIns="18288" bIns="18288" anchor="t">
+            <a:spAutoFit/>
+          </a:bodyPr>
+          <a:lstStyle/>
+          <a:p>
+            <a:pPr algn="ctr">
+              <a:defRPr sz="1300" b="1">
+                <a:solidFill>
+                  <a:srgbClr val="FFFFFF"/>
+                </a:solidFill>
+                <a:latin typeface="Avenir Next"/>
+              </a:defRPr>
+            </a:pPr>
+            <a:r>
+              <a:t>FEATURE REFERENCE</a:t>
+            </a:r>
+          </a:p>
+        </p:txBody>
+      </p:sp>
+      <p:sp>
+        <p:nvSpPr>
+          <p:cNvPr id="6" name="TextBox 5"/>
+          <p:cNvSpPr txBox="1"/>
+          <p:nvPr/>
+        </p:nvSpPr>
+        <p:spPr>
+          <a:xfrm>
+            <a:off x="9418320" y="164592"/>
+            <a:ext cx="2221992" cy="228600"/>
+          </a:xfrm>
+          <a:prstGeom prst="rect">
+            <a:avLst/>
+          </a:prstGeom>
+          <a:noFill/>
+        </p:spPr>
+        <p:txBody>
+          <a:bodyPr wrap="square" lIns="18288" rIns="18288" tIns="18288" bIns="18288" anchor="t">
+            <a:spAutoFit/>
+          </a:bodyPr>
+          <a:lstStyle/>
+          <a:p>
+            <a:pPr algn="r">
+              <a:defRPr sz="1100" b="1">
+                <a:solidFill>
+                  <a:srgbClr val="FFFFFF"/>
+                </a:solidFill>
+                <a:latin typeface="Avenir Next"/>
+              </a:defRPr>
+            </a:pPr>
+            <a:r>
+              <a:t>AI BUILDER CUP 2026</a:t>
+            </a:r>
+          </a:p>
+        </p:txBody>
+      </p:sp>
+      <p:sp>
+        <p:nvSpPr>
+          <p:cNvPr id="7" name="TextBox 6"/>
+          <p:cNvSpPr txBox="1"/>
+          <p:nvPr/>
+        </p:nvSpPr>
+        <p:spPr>
+          <a:xfrm>
+            <a:off x="512064" y="859536"/>
+            <a:ext cx="11064240" cy="594360"/>
+          </a:xfrm>
+          <a:prstGeom prst="rect">
+            <a:avLst/>
+          </a:prstGeom>
+          <a:noFill/>
+        </p:spPr>
+        <p:txBody>
+          <a:bodyPr wrap="square" lIns="18288" rIns="18288" tIns="18288" bIns="18288" anchor="t">
+            <a:spAutoFit/>
+          </a:bodyPr>
+          <a:lstStyle/>
+          <a:p>
+            <a:pPr algn="l">
+              <a:defRPr sz="3100" b="1">
+                <a:solidFill>
+                  <a:srgbClr val="21232B"/>
+                </a:solidFill>
+                <a:latin typeface="Avenir Next"/>
+              </a:defRPr>
+            </a:pPr>
+            <a:r>
+              <a:t>Milo: meals and nutrition</a:t>
+            </a:r>
+          </a:p>
+        </p:txBody>
+      </p:sp>
+      <p:sp>
+        <p:nvSpPr>
+          <p:cNvPr id="8" name="TextBox 7"/>
+          <p:cNvSpPr txBox="1"/>
+          <p:nvPr/>
+        </p:nvSpPr>
+        <p:spPr>
+          <a:xfrm>
+            <a:off x="530352" y="1517904"/>
+            <a:ext cx="10881360" cy="512064"/>
+          </a:xfrm>
+          <a:prstGeom prst="rect">
+            <a:avLst/>
+          </a:prstGeom>
+          <a:noFill/>
+        </p:spPr>
+        <p:txBody>
+          <a:bodyPr wrap="square" lIns="18288" rIns="18288" tIns="18288" bIns="18288" anchor="t">
+            <a:spAutoFit/>
+          </a:bodyPr>
+          <a:lstStyle/>
+          <a:p>
+            <a:pPr algn="l">
+              <a:defRPr sz="1600" b="0">
+                <a:solidFill>
+                  <a:srgbClr val="5B5E67"/>
+                </a:solidFill>
+                <a:latin typeface="Avenir Next"/>
+              </a:defRPr>
+            </a:pPr>
+            <a:r>
+              <a:t>The food log shows what Milo saved from text and photos.</a:t>
+            </a:r>
+          </a:p>
+        </p:txBody>
+      </p:sp>
+      <p:sp>
+        <p:nvSpPr>
+          <p:cNvPr id="9" name="Rectangle 8"/>
+          <p:cNvSpPr/>
+          <p:nvPr/>
+        </p:nvSpPr>
+        <p:spPr>
+          <a:xfrm>
+            <a:off x="502920" y="6519672"/>
+            <a:ext cx="11155680" cy="13716"/>
+          </a:xfrm>
+          <a:prstGeom prst="rect">
+            <a:avLst/>
+          </a:prstGeom>
+          <a:solidFill>
+            <a:srgbClr val="DCD7CD"/>
+          </a:solidFill>
+          <a:ln>
+            <a:noFill/>
+          </a:ln>
+        </p:spPr>
+        <p:style>
+          <a:lnRef idx="1">
+            <a:schemeClr val="accent1"/>
+          </a:lnRef>
+          <a:fillRef idx="3">
+            <a:schemeClr val="accent1"/>
+          </a:fillRef>
+          <a:effectRef idx="2">
+            <a:schemeClr val="accent1"/>
+          </a:effectRef>
+          <a:fontRef idx="minor">
+            <a:schemeClr val="lt1"/>
+          </a:fontRef>
+        </p:style>
+        <p:txBody>
+          <a:bodyPr rtlCol="0" anchor="ctr"/>
+          <a:lstStyle/>
+          <a:p>
+            <a:pPr algn="ctr"/>
+          </a:p>
+        </p:txBody>
+      </p:sp>
+      <p:sp>
+        <p:nvSpPr>
+          <p:cNvPr id="10" name="TextBox 9"/>
+          <p:cNvSpPr txBox="1"/>
+          <p:nvPr/>
+        </p:nvSpPr>
+        <p:spPr>
+          <a:xfrm>
+            <a:off x="530352" y="6574536"/>
+            <a:ext cx="8412480" cy="182880"/>
+          </a:xfrm>
+          <a:prstGeom prst="rect">
+            <a:avLst/>
+          </a:prstGeom>
+          <a:noFill/>
+        </p:spPr>
+        <p:txBody>
+          <a:bodyPr wrap="square" lIns="18288" rIns="18288" tIns="18288" bIns="18288" anchor="t">
+            <a:spAutoFit/>
+          </a:bodyPr>
+          <a:lstStyle/>
+          <a:p>
+            <a:pPr algn="l">
+              <a:defRPr sz="1000" b="0">
+                <a:solidFill>
+                  <a:srgbClr val="5B5E67"/>
+                </a:solidFill>
+                <a:latin typeface="Avenir Next"/>
+              </a:defRPr>
+            </a:pPr>
+            <a:r>
+              <a:t>Petak QA · use the reviewer access supplied separately</a:t>
+            </a:r>
+          </a:p>
+        </p:txBody>
+      </p:sp>
+      <p:sp>
+        <p:nvSpPr>
+          <p:cNvPr id="11" name="TextBox 10"/>
+          <p:cNvSpPr txBox="1"/>
+          <p:nvPr/>
+        </p:nvSpPr>
+        <p:spPr>
+          <a:xfrm>
+            <a:off x="11128248" y="6556248"/>
+            <a:ext cx="502920" cy="219456"/>
+          </a:xfrm>
+          <a:prstGeom prst="rect">
+            <a:avLst/>
+          </a:prstGeom>
+          <a:noFill/>
+        </p:spPr>
+        <p:txBody>
+          <a:bodyPr wrap="square" lIns="18288" rIns="18288" tIns="18288" bIns="18288" anchor="t">
+            <a:spAutoFit/>
+          </a:bodyPr>
+          <a:lstStyle/>
+          <a:p>
+            <a:pPr algn="r">
+              <a:defRPr sz="1100" b="1">
+                <a:solidFill>
+                  <a:srgbClr val="5B5E67"/>
+                </a:solidFill>
+                <a:latin typeface="Avenir Next"/>
+              </a:defRPr>
+            </a:pPr>
+            <a:r>
+              <a:t>10</a:t>
+            </a:r>
+          </a:p>
+        </p:txBody>
+      </p:sp>
+      <p:sp>
+        <p:nvSpPr>
+          <p:cNvPr id="12" name="Rounded Rectangle 11"/>
+          <p:cNvSpPr/>
+          <p:nvPr/>
+        </p:nvSpPr>
+        <p:spPr>
+          <a:xfrm>
+            <a:off x="530352" y="2148840"/>
+            <a:ext cx="3547872" cy="3264408"/>
+          </a:xfrm>
+          <a:prstGeom prst="roundRect">
+            <a:avLst>
+              <a:gd name="adj" fmla="val 8000"/>
+            </a:avLst>
+          </a:prstGeom>
+          <a:solidFill>
+            <a:srgbClr val="FFFFFF"/>
+          </a:solidFill>
+          <a:ln>
+            <a:solidFill>
+              <a:srgbClr val="DCD7CD"/>
+            </a:solidFill>
+          </a:ln>
+        </p:spPr>
+        <p:style>
+          <a:lnRef idx="1">
+            <a:schemeClr val="accent1"/>
+          </a:lnRef>
+          <a:fillRef idx="3">
+            <a:schemeClr val="accent1"/>
+          </a:fillRef>
+          <a:effectRef idx="2">
+            <a:schemeClr val="accent1"/>
+          </a:effectRef>
+          <a:fontRef idx="minor">
+            <a:schemeClr val="lt1"/>
+          </a:fontRef>
+        </p:style>
+        <p:txBody>
+          <a:bodyPr rtlCol="0" anchor="ctr"/>
+          <a:lstStyle/>
+          <a:p>
+            <a:pPr algn="ctr"/>
+          </a:p>
+        </p:txBody>
+      </p:sp>
+      <p:sp>
+        <p:nvSpPr>
+          <p:cNvPr id="13" name="Rectangle 12"/>
+          <p:cNvSpPr/>
+          <p:nvPr/>
+        </p:nvSpPr>
+        <p:spPr>
+          <a:xfrm>
+            <a:off x="530352" y="2148840"/>
+            <a:ext cx="3547872" cy="68580"/>
+          </a:xfrm>
+          <a:prstGeom prst="rect">
+            <a:avLst/>
+          </a:prstGeom>
+          <a:solidFill>
+            <a:srgbClr val="E86F56"/>
+          </a:solidFill>
+          <a:ln>
+            <a:noFill/>
+          </a:ln>
+        </p:spPr>
+        <p:style>
+          <a:lnRef idx="1">
+            <a:schemeClr val="accent1"/>
+          </a:lnRef>
+          <a:fillRef idx="3">
+            <a:schemeClr val="accent1"/>
+          </a:fillRef>
+          <a:effectRef idx="2">
+            <a:schemeClr val="accent1"/>
+          </a:effectRef>
+          <a:fontRef idx="minor">
+            <a:schemeClr val="lt1"/>
+          </a:fontRef>
+        </p:style>
+        <p:txBody>
+          <a:bodyPr rtlCol="0" anchor="ctr"/>
+          <a:lstStyle/>
+          <a:p>
+            <a:pPr algn="ctr"/>
+          </a:p>
+        </p:txBody>
+      </p:sp>
+      <p:sp>
+        <p:nvSpPr>
+          <p:cNvPr id="14" name="Rounded Rectangle 13"/>
+          <p:cNvSpPr/>
+          <p:nvPr/>
+        </p:nvSpPr>
+        <p:spPr>
+          <a:xfrm>
+            <a:off x="758952" y="2395728"/>
+            <a:ext cx="457200" cy="457200"/>
+          </a:xfrm>
+          <a:prstGeom prst="roundRect">
+            <a:avLst>
+              <a:gd name="adj" fmla="val 8000"/>
+            </a:avLst>
+          </a:prstGeom>
+          <a:solidFill>
+            <a:srgbClr val="E86F56"/>
+          </a:solidFill>
+          <a:ln>
+            <a:noFill/>
+          </a:ln>
+        </p:spPr>
+        <p:style>
+          <a:lnRef idx="1">
+            <a:schemeClr val="accent1"/>
+          </a:lnRef>
+          <a:fillRef idx="3">
+            <a:schemeClr val="accent1"/>
+          </a:fillRef>
+          <a:effectRef idx="2">
+            <a:schemeClr val="accent1"/>
+          </a:effectRef>
+          <a:fontRef idx="minor">
+            <a:schemeClr val="lt1"/>
+          </a:fontRef>
+        </p:style>
+        <p:txBody>
+          <a:bodyPr rtlCol="0" anchor="ctr"/>
+          <a:lstStyle/>
+          <a:p>
+            <a:pPr algn="ctr"/>
+          </a:p>
+        </p:txBody>
+      </p:sp>
+      <p:sp>
+        <p:nvSpPr>
+          <p:cNvPr id="15" name="TextBox 14"/>
+          <p:cNvSpPr txBox="1"/>
+          <p:nvPr/>
+        </p:nvSpPr>
+        <p:spPr>
+          <a:xfrm>
+            <a:off x="758952" y="2459736"/>
+            <a:ext cx="457200" cy="201168"/>
+          </a:xfrm>
+          <a:prstGeom prst="rect">
+            <a:avLst/>
+          </a:prstGeom>
+          <a:noFill/>
+        </p:spPr>
+        <p:txBody>
+          <a:bodyPr wrap="square" lIns="18288" rIns="18288" tIns="18288" bIns="18288" anchor="t">
+            <a:spAutoFit/>
+          </a:bodyPr>
+          <a:lstStyle/>
+          <a:p>
+            <a:pPr algn="ctr">
+              <a:defRPr sz="1600" b="1">
+                <a:solidFill>
+                  <a:srgbClr val="FFFFFF"/>
+                </a:solidFill>
+                <a:latin typeface="Avenir Next"/>
+              </a:defRPr>
+            </a:pPr>
+            <a:r>
+              <a:t>1</a:t>
+            </a:r>
+          </a:p>
+        </p:txBody>
+      </p:sp>
+      <p:sp>
+        <p:nvSpPr>
+          <p:cNvPr id="16" name="TextBox 15"/>
+          <p:cNvSpPr txBox="1"/>
+          <p:nvPr/>
+        </p:nvSpPr>
+        <p:spPr>
+          <a:xfrm>
+            <a:off x="1353312" y="2395728"/>
+            <a:ext cx="2487168" cy="512064"/>
+          </a:xfrm>
+          <a:prstGeom prst="rect">
+            <a:avLst/>
+          </a:prstGeom>
+          <a:noFill/>
+        </p:spPr>
+        <p:txBody>
+          <a:bodyPr wrap="square" lIns="18288" rIns="18288" tIns="18288" bIns="18288" anchor="t">
+            <a:spAutoFit/>
+          </a:bodyPr>
+          <a:lstStyle/>
+          <a:p>
+            <a:pPr algn="l">
+              <a:defRPr sz="2100" b="1">
+                <a:solidFill>
+                  <a:srgbClr val="21232B"/>
+                </a:solidFill>
+                <a:latin typeface="Avenir Next"/>
+              </a:defRPr>
+            </a:pPr>
+            <a:r>
+              <a:t>Choose a range</a:t>
+            </a:r>
+          </a:p>
+        </p:txBody>
+      </p:sp>
+      <p:sp>
+        <p:nvSpPr>
+          <p:cNvPr id="17" name="TextBox 16"/>
+          <p:cNvSpPr txBox="1"/>
+          <p:nvPr/>
+        </p:nvSpPr>
+        <p:spPr>
+          <a:xfrm>
+            <a:off x="786384" y="3081528"/>
+            <a:ext cx="3035808" cy="2148839"/>
+          </a:xfrm>
+          <a:prstGeom prst="rect">
+            <a:avLst/>
+          </a:prstGeom>
+          <a:noFill/>
+        </p:spPr>
+        <p:txBody>
+          <a:bodyPr wrap="square" lIns="18288" rIns="18288" tIns="18288" bIns="18288" anchor="t">
+            <a:spAutoFit/>
+          </a:bodyPr>
+          <a:lstStyle/>
+          <a:p>
+            <a:pPr algn="l">
+              <a:defRPr sz="1700" b="0">
+                <a:solidFill>
+                  <a:srgbClr val="21232B"/>
+                </a:solidFill>
+                <a:latin typeface="Avenir Next"/>
+              </a:defRPr>
+            </a:pPr>
+            <a:r>
+              <a:t>Open Milo from the menu. Use the date controls to move between recent and historical meals.</a:t>
+            </a:r>
+          </a:p>
+        </p:txBody>
+      </p:sp>
+      <p:sp>
+        <p:nvSpPr>
+          <p:cNvPr id="18" name="Rounded Rectangle 17"/>
+          <p:cNvSpPr/>
+          <p:nvPr/>
+        </p:nvSpPr>
+        <p:spPr>
+          <a:xfrm>
+            <a:off x="4315968" y="2148840"/>
+            <a:ext cx="3547872" cy="3264408"/>
+          </a:xfrm>
+          <a:prstGeom prst="roundRect">
+            <a:avLst>
+              <a:gd name="adj" fmla="val 8000"/>
+            </a:avLst>
+          </a:prstGeom>
+          <a:solidFill>
+            <a:srgbClr val="FFFFFF"/>
+          </a:solidFill>
+          <a:ln>
+            <a:solidFill>
+              <a:srgbClr val="DCD7CD"/>
+            </a:solidFill>
+          </a:ln>
+        </p:spPr>
+        <p:style>
+          <a:lnRef idx="1">
+            <a:schemeClr val="accent1"/>
+          </a:lnRef>
+          <a:fillRef idx="3">
+            <a:schemeClr val="accent1"/>
+          </a:fillRef>
+          <a:effectRef idx="2">
+            <a:schemeClr val="accent1"/>
+          </a:effectRef>
+          <a:fontRef idx="minor">
+            <a:schemeClr val="lt1"/>
+          </a:fontRef>
+        </p:style>
+        <p:txBody>
+          <a:bodyPr rtlCol="0" anchor="ctr"/>
+          <a:lstStyle/>
+          <a:p>
+            <a:pPr algn="ctr"/>
+          </a:p>
+        </p:txBody>
+      </p:sp>
+      <p:sp>
+        <p:nvSpPr>
+          <p:cNvPr id="19" name="Rectangle 18"/>
+          <p:cNvSpPr/>
+          <p:nvPr/>
+        </p:nvSpPr>
+        <p:spPr>
+          <a:xfrm>
+            <a:off x="4315968" y="2148840"/>
+            <a:ext cx="3547872" cy="68580"/>
+          </a:xfrm>
+          <a:prstGeom prst="rect">
+            <a:avLst/>
+          </a:prstGeom>
+          <a:solidFill>
+            <a:srgbClr val="21A391"/>
+          </a:solidFill>
+          <a:ln>
+            <a:noFill/>
+          </a:ln>
+        </p:spPr>
+        <p:style>
+          <a:lnRef idx="1">
+            <a:schemeClr val="accent1"/>
+          </a:lnRef>
+          <a:fillRef idx="3">
+            <a:schemeClr val="accent1"/>
+          </a:fillRef>
+          <a:effectRef idx="2">
+            <a:schemeClr val="accent1"/>
+          </a:effectRef>
+          <a:fontRef idx="minor">
+            <a:schemeClr val="lt1"/>
+          </a:fontRef>
+        </p:style>
+        <p:txBody>
+          <a:bodyPr rtlCol="0" anchor="ctr"/>
+          <a:lstStyle/>
+          <a:p>
+            <a:pPr algn="ctr"/>
+          </a:p>
+        </p:txBody>
+      </p:sp>
+      <p:sp>
+        <p:nvSpPr>
+          <p:cNvPr id="20" name="Rounded Rectangle 19"/>
+          <p:cNvSpPr/>
+          <p:nvPr/>
+        </p:nvSpPr>
+        <p:spPr>
+          <a:xfrm>
+            <a:off x="4544568" y="2395728"/>
+            <a:ext cx="457200" cy="457200"/>
+          </a:xfrm>
+          <a:prstGeom prst="roundRect">
+            <a:avLst>
+              <a:gd name="adj" fmla="val 8000"/>
+            </a:avLst>
+          </a:prstGeom>
+          <a:solidFill>
+            <a:srgbClr val="21A391"/>
+          </a:solidFill>
+          <a:ln>
+            <a:noFill/>
+          </a:ln>
+        </p:spPr>
+        <p:style>
+          <a:lnRef idx="1">
+            <a:schemeClr val="accent1"/>
+          </a:lnRef>
+          <a:fillRef idx="3">
+            <a:schemeClr val="accent1"/>
+          </a:fillRef>
+          <a:effectRef idx="2">
+            <a:schemeClr val="accent1"/>
+          </a:effectRef>
+          <a:fontRef idx="minor">
+            <a:schemeClr val="lt1"/>
+          </a:fontRef>
+        </p:style>
+        <p:txBody>
+          <a:bodyPr rtlCol="0" anchor="ctr"/>
+          <a:lstStyle/>
+          <a:p>
+            <a:pPr algn="ctr"/>
+          </a:p>
+        </p:txBody>
+      </p:sp>
+      <p:sp>
+        <p:nvSpPr>
+          <p:cNvPr id="21" name="TextBox 20"/>
+          <p:cNvSpPr txBox="1"/>
+          <p:nvPr/>
+        </p:nvSpPr>
+        <p:spPr>
+          <a:xfrm>
+            <a:off x="4544568" y="2459736"/>
+            <a:ext cx="457200" cy="201168"/>
+          </a:xfrm>
+          <a:prstGeom prst="rect">
+            <a:avLst/>
+          </a:prstGeom>
+          <a:noFill/>
+        </p:spPr>
+        <p:txBody>
+          <a:bodyPr wrap="square" lIns="18288" rIns="18288" tIns="18288" bIns="18288" anchor="t">
+            <a:spAutoFit/>
+          </a:bodyPr>
+          <a:lstStyle/>
+          <a:p>
+            <a:pPr algn="ctr">
+              <a:defRPr sz="1600" b="1">
+                <a:solidFill>
+                  <a:srgbClr val="FFFFFF"/>
+                </a:solidFill>
+                <a:latin typeface="Avenir Next"/>
+              </a:defRPr>
+            </a:pPr>
+            <a:r>
+              <a:t>2</a:t>
+            </a:r>
+          </a:p>
+        </p:txBody>
+      </p:sp>
+      <p:sp>
+        <p:nvSpPr>
+          <p:cNvPr id="22" name="TextBox 21"/>
+          <p:cNvSpPr txBox="1"/>
+          <p:nvPr/>
+        </p:nvSpPr>
+        <p:spPr>
+          <a:xfrm>
+            <a:off x="5138928" y="2395728"/>
+            <a:ext cx="2487168" cy="512064"/>
+          </a:xfrm>
+          <a:prstGeom prst="rect">
+            <a:avLst/>
+          </a:prstGeom>
+          <a:noFill/>
+        </p:spPr>
+        <p:txBody>
+          <a:bodyPr wrap="square" lIns="18288" rIns="18288" tIns="18288" bIns="18288" anchor="t">
+            <a:spAutoFit/>
+          </a:bodyPr>
+          <a:lstStyle/>
+          <a:p>
+            <a:pPr algn="l">
+              <a:defRPr sz="2100" b="1">
+                <a:solidFill>
+                  <a:srgbClr val="21232B"/>
+                </a:solidFill>
+                <a:latin typeface="Avenir Next"/>
+              </a:defRPr>
+            </a:pPr>
+            <a:r>
+              <a:t>Inspect meals</a:t>
+            </a:r>
+          </a:p>
+        </p:txBody>
+      </p:sp>
+      <p:sp>
+        <p:nvSpPr>
+          <p:cNvPr id="23" name="TextBox 22"/>
+          <p:cNvSpPr txBox="1"/>
+          <p:nvPr/>
+        </p:nvSpPr>
+        <p:spPr>
+          <a:xfrm>
+            <a:off x="4572000" y="3081528"/>
+            <a:ext cx="3035808" cy="2148839"/>
+          </a:xfrm>
+          <a:prstGeom prst="rect">
+            <a:avLst/>
+          </a:prstGeom>
+          <a:noFill/>
+        </p:spPr>
+        <p:txBody>
+          <a:bodyPr wrap="square" lIns="18288" rIns="18288" tIns="18288" bIns="18288" anchor="t">
+            <a:spAutoFit/>
+          </a:bodyPr>
+          <a:lstStyle/>
+          <a:p>
+            <a:pPr algn="l">
+              <a:defRPr sz="1700" b="0">
+                <a:solidFill>
+                  <a:srgbClr val="21232B"/>
+                </a:solidFill>
+                <a:latin typeface="Avenir Next"/>
+              </a:defRPr>
+            </a:pPr>
+            <a:r>
+              <a:t>Review food entries and the energy summary. Open the log to see the meal details and available photo evidence.</a:t>
+            </a:r>
+          </a:p>
+        </p:txBody>
+      </p:sp>
+      <p:sp>
+        <p:nvSpPr>
+          <p:cNvPr id="24" name="Rounded Rectangle 23"/>
+          <p:cNvSpPr/>
+          <p:nvPr/>
+        </p:nvSpPr>
+        <p:spPr>
+          <a:xfrm>
+            <a:off x="8101583" y="2148840"/>
+            <a:ext cx="3547872" cy="3264408"/>
+          </a:xfrm>
+          <a:prstGeom prst="roundRect">
+            <a:avLst>
+              <a:gd name="adj" fmla="val 8000"/>
+            </a:avLst>
+          </a:prstGeom>
+          <a:solidFill>
+            <a:srgbClr val="FFFFFF"/>
+          </a:solidFill>
+          <a:ln>
+            <a:solidFill>
+              <a:srgbClr val="DCD7CD"/>
+            </a:solidFill>
+          </a:ln>
+        </p:spPr>
+        <p:style>
+          <a:lnRef idx="1">
+            <a:schemeClr val="accent1"/>
+          </a:lnRef>
+          <a:fillRef idx="3">
+            <a:schemeClr val="accent1"/>
+          </a:fillRef>
+          <a:effectRef idx="2">
+            <a:schemeClr val="accent1"/>
+          </a:effectRef>
+          <a:fontRef idx="minor">
+            <a:schemeClr val="lt1"/>
+          </a:fontRef>
+        </p:style>
+        <p:txBody>
+          <a:bodyPr rtlCol="0" anchor="ctr"/>
+          <a:lstStyle/>
+          <a:p>
+            <a:pPr algn="ctr"/>
+          </a:p>
+        </p:txBody>
+      </p:sp>
+      <p:sp>
+        <p:nvSpPr>
+          <p:cNvPr id="25" name="Rectangle 24"/>
+          <p:cNvSpPr/>
+          <p:nvPr/>
+        </p:nvSpPr>
+        <p:spPr>
+          <a:xfrm>
+            <a:off x="8101583" y="2148840"/>
+            <a:ext cx="3547872" cy="68580"/>
+          </a:xfrm>
+          <a:prstGeom prst="rect">
+            <a:avLst/>
+          </a:prstGeom>
+          <a:solidFill>
+            <a:srgbClr val="DFA538"/>
+          </a:solidFill>
+          <a:ln>
+            <a:noFill/>
+          </a:ln>
+        </p:spPr>
+        <p:style>
+          <a:lnRef idx="1">
+            <a:schemeClr val="accent1"/>
+          </a:lnRef>
+          <a:fillRef idx="3">
+            <a:schemeClr val="accent1"/>
+          </a:fillRef>
+          <a:effectRef idx="2">
+            <a:schemeClr val="accent1"/>
+          </a:effectRef>
+          <a:fontRef idx="minor">
+            <a:schemeClr val="lt1"/>
+          </a:fontRef>
+        </p:style>
+        <p:txBody>
+          <a:bodyPr rtlCol="0" anchor="ctr"/>
+          <a:lstStyle/>
+          <a:p>
+            <a:pPr algn="ctr"/>
+          </a:p>
+        </p:txBody>
+      </p:sp>
+      <p:sp>
+        <p:nvSpPr>
+          <p:cNvPr id="26" name="Rounded Rectangle 25"/>
+          <p:cNvSpPr/>
+          <p:nvPr/>
+        </p:nvSpPr>
+        <p:spPr>
+          <a:xfrm>
+            <a:off x="8330183" y="2395728"/>
+            <a:ext cx="457200" cy="457200"/>
+          </a:xfrm>
+          <a:prstGeom prst="roundRect">
+            <a:avLst>
+              <a:gd name="adj" fmla="val 8000"/>
+            </a:avLst>
+          </a:prstGeom>
+          <a:solidFill>
+            <a:srgbClr val="DFA538"/>
+          </a:solidFill>
+          <a:ln>
+            <a:noFill/>
+          </a:ln>
+        </p:spPr>
+        <p:style>
+          <a:lnRef idx="1">
+            <a:schemeClr val="accent1"/>
+          </a:lnRef>
+          <a:fillRef idx="3">
+            <a:schemeClr val="accent1"/>
+          </a:fillRef>
+          <a:effectRef idx="2">
+            <a:schemeClr val="accent1"/>
+          </a:effectRef>
+          <a:fontRef idx="minor">
+            <a:schemeClr val="lt1"/>
+          </a:fontRef>
+        </p:style>
+        <p:txBody>
+          <a:bodyPr rtlCol="0" anchor="ctr"/>
+          <a:lstStyle/>
+          <a:p>
+            <a:pPr algn="ctr"/>
+          </a:p>
+        </p:txBody>
+      </p:sp>
+      <p:sp>
+        <p:nvSpPr>
+          <p:cNvPr id="27" name="TextBox 26"/>
+          <p:cNvSpPr txBox="1"/>
+          <p:nvPr/>
+        </p:nvSpPr>
+        <p:spPr>
+          <a:xfrm>
+            <a:off x="8330183" y="2459736"/>
+            <a:ext cx="457200" cy="201168"/>
+          </a:xfrm>
+          <a:prstGeom prst="rect">
+            <a:avLst/>
+          </a:prstGeom>
+          <a:noFill/>
+        </p:spPr>
+        <p:txBody>
+          <a:bodyPr wrap="square" lIns="18288" rIns="18288" tIns="18288" bIns="18288" anchor="t">
+            <a:spAutoFit/>
+          </a:bodyPr>
+          <a:lstStyle/>
+          <a:p>
+            <a:pPr algn="ctr">
+              <a:defRPr sz="1600" b="1">
+                <a:solidFill>
+                  <a:srgbClr val="FFFFFF"/>
+                </a:solidFill>
+                <a:latin typeface="Avenir Next"/>
+              </a:defRPr>
+            </a:pPr>
+            <a:r>
+              <a:t>3</a:t>
+            </a:r>
+          </a:p>
+        </p:txBody>
+      </p:sp>
+      <p:sp>
+        <p:nvSpPr>
+          <p:cNvPr id="28" name="TextBox 27"/>
+          <p:cNvSpPr txBox="1"/>
+          <p:nvPr/>
+        </p:nvSpPr>
+        <p:spPr>
+          <a:xfrm>
+            <a:off x="8924544" y="2395728"/>
+            <a:ext cx="2487168" cy="512064"/>
+          </a:xfrm>
+          <a:prstGeom prst="rect">
+            <a:avLst/>
+          </a:prstGeom>
+          <a:noFill/>
+        </p:spPr>
+        <p:txBody>
+          <a:bodyPr wrap="square" lIns="18288" rIns="18288" tIns="18288" bIns="18288" anchor="t">
+            <a:spAutoFit/>
+          </a:bodyPr>
+          <a:lstStyle/>
+          <a:p>
+            <a:pPr algn="l">
+              <a:defRPr sz="2100" b="1">
+                <a:solidFill>
+                  <a:srgbClr val="21232B"/>
+                </a:solidFill>
+                <a:latin typeface="Avenir Next"/>
+              </a:defRPr>
+            </a:pPr>
+            <a:r>
+              <a:t>Compare context</a:t>
+            </a:r>
+          </a:p>
+        </p:txBody>
+      </p:sp>
+      <p:sp>
+        <p:nvSpPr>
+          <p:cNvPr id="29" name="TextBox 28"/>
+          <p:cNvSpPr txBox="1"/>
+          <p:nvPr/>
+        </p:nvSpPr>
+        <p:spPr>
+          <a:xfrm>
+            <a:off x="8357615" y="3081528"/>
+            <a:ext cx="3035808" cy="2148839"/>
+          </a:xfrm>
+          <a:prstGeom prst="rect">
+            <a:avLst/>
+          </a:prstGeom>
+          <a:noFill/>
+        </p:spPr>
+        <p:txBody>
+          <a:bodyPr wrap="square" lIns="18288" rIns="18288" tIns="18288" bIns="18288" anchor="t">
+            <a:spAutoFit/>
+          </a:bodyPr>
+          <a:lstStyle/>
+          <a:p>
+            <a:pPr algn="l">
+              <a:defRPr sz="1700" b="0">
+                <a:solidFill>
+                  <a:srgbClr val="21232B"/>
+                </a:solidFill>
+                <a:latin typeface="Avenir Next"/>
+              </a:defRPr>
+            </a:pPr>
+            <a:r>
+              <a:t>Check the 4 October sandwich and coffee against Penny, then inspect the separate porridge-and-egg photo example.</a:t>
+            </a:r>
+          </a:p>
+        </p:txBody>
+      </p:sp>
+      <p:sp>
+        <p:nvSpPr>
+          <p:cNvPr id="30" name="Rounded Rectangle 29"/>
+          <p:cNvSpPr/>
+          <p:nvPr/>
+        </p:nvSpPr>
+        <p:spPr>
+          <a:xfrm>
+            <a:off x="521207" y="5833872"/>
+            <a:ext cx="11128248" cy="438912"/>
+          </a:xfrm>
+          <a:prstGeom prst="roundRect">
+            <a:avLst>
+              <a:gd name="adj" fmla="val 8000"/>
+            </a:avLst>
+          </a:prstGeom>
+          <a:solidFill>
+            <a:srgbClr val="EEEADF"/>
+          </a:solidFill>
+          <a:ln>
+            <a:noFill/>
+          </a:ln>
+        </p:spPr>
+        <p:style>
+          <a:lnRef idx="1">
+            <a:schemeClr val="accent1"/>
+          </a:lnRef>
+          <a:fillRef idx="3">
+            <a:schemeClr val="accent1"/>
+          </a:fillRef>
+          <a:effectRef idx="2">
+            <a:schemeClr val="accent1"/>
+          </a:effectRef>
+          <a:fontRef idx="minor">
+            <a:schemeClr val="lt1"/>
+          </a:fontRef>
+        </p:style>
+        <p:txBody>
+          <a:bodyPr rtlCol="0" anchor="ctr"/>
+          <a:lstStyle/>
+          <a:p>
+            <a:pPr algn="ctr"/>
+          </a:p>
+        </p:txBody>
+      </p:sp>
+      <p:sp>
+        <p:nvSpPr>
+          <p:cNvPr id="31" name="Rectangle 30"/>
+          <p:cNvSpPr/>
+          <p:nvPr/>
+        </p:nvSpPr>
+        <p:spPr>
+          <a:xfrm>
+            <a:off x="521207" y="5833872"/>
+            <a:ext cx="73152" cy="438912"/>
+          </a:xfrm>
+          <a:prstGeom prst="rect">
+            <a:avLst/>
+          </a:prstGeom>
+          <a:solidFill>
+            <a:srgbClr val="E86F56"/>
+          </a:solidFill>
+          <a:ln>
+            <a:noFill/>
+          </a:ln>
+        </p:spPr>
+        <p:style>
+          <a:lnRef idx="1">
+            <a:schemeClr val="accent1"/>
+          </a:lnRef>
+          <a:fillRef idx="3">
+            <a:schemeClr val="accent1"/>
+          </a:fillRef>
+          <a:effectRef idx="2">
+            <a:schemeClr val="accent1"/>
+          </a:effectRef>
+          <a:fontRef idx="minor">
+            <a:schemeClr val="lt1"/>
+          </a:fontRef>
+        </p:style>
+        <p:txBody>
+          <a:bodyPr rtlCol="0" anchor="ctr"/>
+          <a:lstStyle/>
+          <a:p>
+            <a:pPr algn="ctr"/>
+          </a:p>
+        </p:txBody>
+      </p:sp>
+      <p:sp>
+        <p:nvSpPr>
+          <p:cNvPr id="32" name="TextBox 31"/>
+          <p:cNvSpPr txBox="1"/>
+          <p:nvPr/>
+        </p:nvSpPr>
+        <p:spPr>
+          <a:xfrm>
+            <a:off x="713232" y="5925312"/>
+            <a:ext cx="10698480" cy="265176"/>
+          </a:xfrm>
+          <a:prstGeom prst="rect">
+            <a:avLst/>
+          </a:prstGeom>
+          <a:noFill/>
+        </p:spPr>
+        <p:txBody>
+          <a:bodyPr wrap="square" lIns="18288" rIns="18288" tIns="18288" bIns="18288" anchor="t">
+            <a:spAutoFit/>
+          </a:bodyPr>
+          <a:lstStyle/>
+          <a:p>
+            <a:pPr algn="l">
+              <a:defRPr sz="1400" b="0">
+                <a:solidFill>
+                  <a:srgbClr val="21232B"/>
+                </a:solidFill>
+                <a:latin typeface="Avenir Next"/>
+              </a:defRPr>
+            </a:pPr>
+            <a:r>
+              <a:t>A meal photo and a receipt are different inputs; do not assume they describe the same purchase.</a:t>
+            </a:r>
+          </a:p>
+        </p:txBody>
+      </p:sp>
+    </p:spTree>
+  </p:cSld>
+  <p:clrMapOvr>
+    <a:masterClrMapping/>
+  </p:clrMapOvr>
+</p:sld>
+</file>
+
+<file path=ppt/slides/slide11.xml><?xml version="1.0" encoding="utf-8"?>
+<p:sld xmlns:a="http://schemas.openxmlformats.org/drawingml/2006/main" xmlns:p="http://schemas.openxmlformats.org/presentationml/2006/main" xmlns:r="http://schemas.openxmlformats.org/officeDocument/2006/relationships">
+  <p:cSld>
+    <p:spTree>
+      <p:nvGrpSpPr>
+        <p:cNvPr id="1" name=""/>
+        <p:cNvGrpSpPr/>
+        <p:nvPr/>
+      </p:nvGrpSpPr>
+      <p:grpSpPr/>
+      <p:sp>
+        <p:nvSpPr>
+          <p:cNvPr id="2" name="Rectangle 1"/>
+          <p:cNvSpPr/>
+          <p:nvPr/>
+        </p:nvSpPr>
+        <p:spPr>
+          <a:xfrm>
+            <a:off x="0" y="0"/>
+            <a:ext cx="12191695" cy="6858000"/>
+          </a:xfrm>
+          <a:prstGeom prst="rect">
+            <a:avLst/>
+          </a:prstGeom>
+          <a:solidFill>
+            <a:srgbClr val="F8F5EC"/>
+          </a:solidFill>
+          <a:ln>
+            <a:noFill/>
+          </a:ln>
+        </p:spPr>
+        <p:style>
+          <a:lnRef idx="1">
+            <a:schemeClr val="accent1"/>
+          </a:lnRef>
+          <a:fillRef idx="3">
+            <a:schemeClr val="accent1"/>
+          </a:fillRef>
+          <a:effectRef idx="2">
+            <a:schemeClr val="accent1"/>
+          </a:effectRef>
+          <a:fontRef idx="minor">
+            <a:schemeClr val="lt1"/>
+          </a:fontRef>
+        </p:style>
+        <p:txBody>
+          <a:bodyPr rtlCol="0" anchor="ctr"/>
+          <a:lstStyle/>
+          <a:p>
+            <a:pPr algn="ctr"/>
+          </a:p>
+        </p:txBody>
+      </p:sp>
+      <p:sp>
+        <p:nvSpPr>
+          <p:cNvPr id="3" name="Rectangle 2"/>
+          <p:cNvSpPr/>
+          <p:nvPr/>
+        </p:nvSpPr>
+        <p:spPr>
+          <a:xfrm>
+            <a:off x="0" y="0"/>
+            <a:ext cx="12191695" cy="585216"/>
+          </a:xfrm>
+          <a:prstGeom prst="rect">
+            <a:avLst/>
+          </a:prstGeom>
+          <a:solidFill>
+            <a:srgbClr val="08090C"/>
+          </a:solidFill>
+          <a:ln>
+            <a:noFill/>
+          </a:ln>
+        </p:spPr>
+        <p:style>
+          <a:lnRef idx="1">
+            <a:schemeClr val="accent1"/>
+          </a:lnRef>
+          <a:fillRef idx="3">
+            <a:schemeClr val="accent1"/>
+          </a:fillRef>
+          <a:effectRef idx="2">
+            <a:schemeClr val="accent1"/>
+          </a:effectRef>
+          <a:fontRef idx="minor">
+            <a:schemeClr val="lt1"/>
+          </a:fontRef>
+        </p:style>
+        <p:txBody>
+          <a:bodyPr rtlCol="0" anchor="ctr"/>
+          <a:lstStyle/>
+          <a:p>
+            <a:pPr algn="ctr"/>
+          </a:p>
+        </p:txBody>
+      </p:sp>
+      <p:sp>
+        <p:nvSpPr>
+          <p:cNvPr id="4" name="TextBox 3"/>
+          <p:cNvSpPr txBox="1"/>
+          <p:nvPr/>
+        </p:nvSpPr>
+        <p:spPr>
+          <a:xfrm>
+            <a:off x="512064" y="128016"/>
+            <a:ext cx="2011680" cy="283464"/>
+          </a:xfrm>
+          <a:prstGeom prst="rect">
+            <a:avLst/>
+          </a:prstGeom>
+          <a:noFill/>
+        </p:spPr>
+        <p:txBody>
+          <a:bodyPr wrap="square" lIns="18288" rIns="18288" tIns="18288" bIns="18288" anchor="t">
+            <a:spAutoFit/>
+          </a:bodyPr>
+          <a:lstStyle/>
+          <a:p>
+            <a:pPr algn="l">
+              <a:defRPr sz="1700" b="1">
+                <a:solidFill>
+                  <a:srgbClr val="FFFFFF"/>
+                </a:solidFill>
+                <a:latin typeface="Avenir Next"/>
+              </a:defRPr>
+            </a:pPr>
+            <a:r>
+              <a:t>PETAK</a:t>
+            </a:r>
+          </a:p>
+        </p:txBody>
+      </p:sp>
+      <p:sp>
+        <p:nvSpPr>
+          <p:cNvPr id="5" name="TextBox 4"/>
+          <p:cNvSpPr txBox="1"/>
+          <p:nvPr/>
+        </p:nvSpPr>
+        <p:spPr>
+          <a:xfrm>
+            <a:off x="3794760" y="155448"/>
+            <a:ext cx="4617720" cy="237744"/>
+          </a:xfrm>
+          <a:prstGeom prst="rect">
+            <a:avLst/>
+          </a:prstGeom>
+          <a:noFill/>
+        </p:spPr>
+        <p:txBody>
+          <a:bodyPr wrap="square" lIns="18288" rIns="18288" tIns="18288" bIns="18288" anchor="t">
+            <a:spAutoFit/>
+          </a:bodyPr>
+          <a:lstStyle/>
+          <a:p>
+            <a:pPr algn="ctr">
+              <a:defRPr sz="1300" b="1">
+                <a:solidFill>
+                  <a:srgbClr val="FFFFFF"/>
+                </a:solidFill>
+                <a:latin typeface="Avenir Next"/>
+              </a:defRPr>
+            </a:pPr>
+            <a:r>
+              <a:t>FEATURE REFERENCE</a:t>
+            </a:r>
+          </a:p>
+        </p:txBody>
+      </p:sp>
+      <p:sp>
+        <p:nvSpPr>
+          <p:cNvPr id="6" name="TextBox 5"/>
+          <p:cNvSpPr txBox="1"/>
+          <p:nvPr/>
+        </p:nvSpPr>
+        <p:spPr>
+          <a:xfrm>
+            <a:off x="9418320" y="164592"/>
+            <a:ext cx="2221992" cy="228600"/>
+          </a:xfrm>
+          <a:prstGeom prst="rect">
+            <a:avLst/>
+          </a:prstGeom>
+          <a:noFill/>
+        </p:spPr>
+        <p:txBody>
+          <a:bodyPr wrap="square" lIns="18288" rIns="18288" tIns="18288" bIns="18288" anchor="t">
+            <a:spAutoFit/>
+          </a:bodyPr>
+          <a:lstStyle/>
+          <a:p>
+            <a:pPr algn="r">
+              <a:defRPr sz="1100" b="1">
+                <a:solidFill>
+                  <a:srgbClr val="FFFFFF"/>
+                </a:solidFill>
+                <a:latin typeface="Avenir Next"/>
+              </a:defRPr>
+            </a:pPr>
+            <a:r>
+              <a:t>AI BUILDER CUP 2026</a:t>
+            </a:r>
+          </a:p>
+        </p:txBody>
+      </p:sp>
+      <p:sp>
+        <p:nvSpPr>
+          <p:cNvPr id="7" name="TextBox 6"/>
+          <p:cNvSpPr txBox="1"/>
+          <p:nvPr/>
+        </p:nvSpPr>
+        <p:spPr>
+          <a:xfrm>
+            <a:off x="512064" y="859536"/>
+            <a:ext cx="11064240" cy="594360"/>
+          </a:xfrm>
+          <a:prstGeom prst="rect">
+            <a:avLst/>
+          </a:prstGeom>
+          <a:noFill/>
+        </p:spPr>
+        <p:txBody>
+          <a:bodyPr wrap="square" lIns="18288" rIns="18288" tIns="18288" bIns="18288" anchor="t">
+            <a:spAutoFit/>
+          </a:bodyPr>
+          <a:lstStyle/>
+          <a:p>
+            <a:pPr algn="l">
+              <a:defRPr sz="3100" b="1">
+                <a:solidFill>
+                  <a:srgbClr val="21232B"/>
+                </a:solidFill>
+                <a:latin typeface="Avenir Next"/>
+              </a:defRPr>
+            </a:pPr>
+            <a:r>
+              <a:t>Mira: journal and memories</a:t>
+            </a:r>
+          </a:p>
+        </p:txBody>
+      </p:sp>
+      <p:sp>
+        <p:nvSpPr>
+          <p:cNvPr id="8" name="TextBox 7"/>
+          <p:cNvSpPr txBox="1"/>
+          <p:nvPr/>
+        </p:nvSpPr>
+        <p:spPr>
+          <a:xfrm>
+            <a:off x="530352" y="1517904"/>
+            <a:ext cx="10881360" cy="512064"/>
+          </a:xfrm>
+          <a:prstGeom prst="rect">
+            <a:avLst/>
+          </a:prstGeom>
+          <a:noFill/>
+        </p:spPr>
+        <p:txBody>
+          <a:bodyPr wrap="square" lIns="18288" rIns="18288" tIns="18288" bIns="18288" anchor="t">
+            <a:spAutoFit/>
+          </a:bodyPr>
+          <a:lstStyle/>
+          <a:p>
+            <a:pPr algn="l">
+              <a:defRPr sz="1600" b="0">
+                <a:solidFill>
+                  <a:srgbClr val="5B5E67"/>
+                </a:solidFill>
+                <a:latin typeface="Avenir Next"/>
+              </a:defRPr>
+            </a:pPr>
+            <a:r>
+              <a:t>Mira keeps personal moments that can be revisited by date and feeling.</a:t>
+            </a:r>
+          </a:p>
+        </p:txBody>
+      </p:sp>
+      <p:sp>
+        <p:nvSpPr>
+          <p:cNvPr id="9" name="Rectangle 8"/>
+          <p:cNvSpPr/>
+          <p:nvPr/>
+        </p:nvSpPr>
+        <p:spPr>
+          <a:xfrm>
+            <a:off x="502920" y="6519672"/>
+            <a:ext cx="11155680" cy="13716"/>
+          </a:xfrm>
+          <a:prstGeom prst="rect">
+            <a:avLst/>
+          </a:prstGeom>
+          <a:solidFill>
+            <a:srgbClr val="DCD7CD"/>
+          </a:solidFill>
+          <a:ln>
+            <a:noFill/>
+          </a:ln>
+        </p:spPr>
+        <p:style>
+          <a:lnRef idx="1">
+            <a:schemeClr val="accent1"/>
+          </a:lnRef>
+          <a:fillRef idx="3">
+            <a:schemeClr val="accent1"/>
+          </a:fillRef>
+          <a:effectRef idx="2">
+            <a:schemeClr val="accent1"/>
+          </a:effectRef>
+          <a:fontRef idx="minor">
+            <a:schemeClr val="lt1"/>
+          </a:fontRef>
+        </p:style>
+        <p:txBody>
+          <a:bodyPr rtlCol="0" anchor="ctr"/>
+          <a:lstStyle/>
+          <a:p>
+            <a:pPr algn="ctr"/>
+          </a:p>
+        </p:txBody>
+      </p:sp>
+      <p:sp>
+        <p:nvSpPr>
+          <p:cNvPr id="10" name="TextBox 9"/>
+          <p:cNvSpPr txBox="1"/>
+          <p:nvPr/>
+        </p:nvSpPr>
+        <p:spPr>
+          <a:xfrm>
+            <a:off x="530352" y="6574536"/>
+            <a:ext cx="8412480" cy="182880"/>
+          </a:xfrm>
+          <a:prstGeom prst="rect">
+            <a:avLst/>
+          </a:prstGeom>
+          <a:noFill/>
+        </p:spPr>
+        <p:txBody>
+          <a:bodyPr wrap="square" lIns="18288" rIns="18288" tIns="18288" bIns="18288" anchor="t">
+            <a:spAutoFit/>
+          </a:bodyPr>
+          <a:lstStyle/>
+          <a:p>
+            <a:pPr algn="l">
+              <a:defRPr sz="1000" b="0">
+                <a:solidFill>
+                  <a:srgbClr val="5B5E67"/>
+                </a:solidFill>
+                <a:latin typeface="Avenir Next"/>
+              </a:defRPr>
+            </a:pPr>
+            <a:r>
+              <a:t>Petak QA · use the reviewer access supplied separately</a:t>
+            </a:r>
+          </a:p>
+        </p:txBody>
+      </p:sp>
+      <p:sp>
+        <p:nvSpPr>
+          <p:cNvPr id="11" name="TextBox 10"/>
+          <p:cNvSpPr txBox="1"/>
+          <p:nvPr/>
+        </p:nvSpPr>
+        <p:spPr>
+          <a:xfrm>
+            <a:off x="11128248" y="6556248"/>
+            <a:ext cx="502920" cy="219456"/>
+          </a:xfrm>
+          <a:prstGeom prst="rect">
+            <a:avLst/>
+          </a:prstGeom>
+          <a:noFill/>
+        </p:spPr>
+        <p:txBody>
+          <a:bodyPr wrap="square" lIns="18288" rIns="18288" tIns="18288" bIns="18288" anchor="t">
+            <a:spAutoFit/>
+          </a:bodyPr>
+          <a:lstStyle/>
+          <a:p>
+            <a:pPr algn="r">
+              <a:defRPr sz="1100" b="1">
+                <a:solidFill>
+                  <a:srgbClr val="5B5E67"/>
+                </a:solidFill>
+                <a:latin typeface="Avenir Next"/>
+              </a:defRPr>
+            </a:pPr>
+            <a:r>
+              <a:t>11</a:t>
+            </a:r>
+          </a:p>
+        </p:txBody>
+      </p:sp>
+      <p:sp>
+        <p:nvSpPr>
+          <p:cNvPr id="12" name="Rounded Rectangle 11"/>
+          <p:cNvSpPr/>
+          <p:nvPr/>
+        </p:nvSpPr>
+        <p:spPr>
+          <a:xfrm>
+            <a:off x="530352" y="2148840"/>
+            <a:ext cx="3547872" cy="3264408"/>
+          </a:xfrm>
+          <a:prstGeom prst="roundRect">
+            <a:avLst>
+              <a:gd name="adj" fmla="val 8000"/>
+            </a:avLst>
+          </a:prstGeom>
+          <a:solidFill>
+            <a:srgbClr val="FFFFFF"/>
+          </a:solidFill>
+          <a:ln>
+            <a:solidFill>
+              <a:srgbClr val="DCD7CD"/>
+            </a:solidFill>
+          </a:ln>
+        </p:spPr>
+        <p:style>
+          <a:lnRef idx="1">
+            <a:schemeClr val="accent1"/>
+          </a:lnRef>
+          <a:fillRef idx="3">
+            <a:schemeClr val="accent1"/>
+          </a:fillRef>
+          <a:effectRef idx="2">
+            <a:schemeClr val="accent1"/>
+          </a:effectRef>
+          <a:fontRef idx="minor">
+            <a:schemeClr val="lt1"/>
+          </a:fontRef>
+        </p:style>
+        <p:txBody>
+          <a:bodyPr rtlCol="0" anchor="ctr"/>
+          <a:lstStyle/>
+          <a:p>
+            <a:pPr algn="ctr"/>
+          </a:p>
+        </p:txBody>
+      </p:sp>
+      <p:sp>
+        <p:nvSpPr>
+          <p:cNvPr id="13" name="Rectangle 12"/>
+          <p:cNvSpPr/>
+          <p:nvPr/>
+        </p:nvSpPr>
+        <p:spPr>
+          <a:xfrm>
+            <a:off x="530352" y="2148840"/>
+            <a:ext cx="3547872" cy="68580"/>
+          </a:xfrm>
+          <a:prstGeom prst="rect">
+            <a:avLst/>
+          </a:prstGeom>
+          <a:solidFill>
+            <a:srgbClr val="8E64B9"/>
+          </a:solidFill>
+          <a:ln>
+            <a:noFill/>
+          </a:ln>
+        </p:spPr>
+        <p:style>
+          <a:lnRef idx="1">
+            <a:schemeClr val="accent1"/>
+          </a:lnRef>
+          <a:fillRef idx="3">
+            <a:schemeClr val="accent1"/>
+          </a:fillRef>
+          <a:effectRef idx="2">
+            <a:schemeClr val="accent1"/>
+          </a:effectRef>
+          <a:fontRef idx="minor">
+            <a:schemeClr val="lt1"/>
+          </a:fontRef>
+        </p:style>
+        <p:txBody>
+          <a:bodyPr rtlCol="0" anchor="ctr"/>
+          <a:lstStyle/>
+          <a:p>
+            <a:pPr algn="ctr"/>
+          </a:p>
+        </p:txBody>
+      </p:sp>
+      <p:sp>
+        <p:nvSpPr>
+          <p:cNvPr id="14" name="Rounded Rectangle 13"/>
+          <p:cNvSpPr/>
+          <p:nvPr/>
+        </p:nvSpPr>
+        <p:spPr>
+          <a:xfrm>
+            <a:off x="758952" y="2395728"/>
+            <a:ext cx="457200" cy="457200"/>
+          </a:xfrm>
+          <a:prstGeom prst="roundRect">
+            <a:avLst>
+              <a:gd name="adj" fmla="val 8000"/>
+            </a:avLst>
+          </a:prstGeom>
+          <a:solidFill>
+            <a:srgbClr val="8E64B9"/>
+          </a:solidFill>
+          <a:ln>
+            <a:noFill/>
+          </a:ln>
+        </p:spPr>
+        <p:style>
+          <a:lnRef idx="1">
+            <a:schemeClr val="accent1"/>
+          </a:lnRef>
+          <a:fillRef idx="3">
+            <a:schemeClr val="accent1"/>
+          </a:fillRef>
+          <a:effectRef idx="2">
+            <a:schemeClr val="accent1"/>
+          </a:effectRef>
+          <a:fontRef idx="minor">
+            <a:schemeClr val="lt1"/>
+          </a:fontRef>
+        </p:style>
+        <p:txBody>
+          <a:bodyPr rtlCol="0" anchor="ctr"/>
+          <a:lstStyle/>
+          <a:p>
+            <a:pPr algn="ctr"/>
+          </a:p>
+        </p:txBody>
+      </p:sp>
+      <p:sp>
+        <p:nvSpPr>
+          <p:cNvPr id="15" name="TextBox 14"/>
+          <p:cNvSpPr txBox="1"/>
+          <p:nvPr/>
+        </p:nvSpPr>
+        <p:spPr>
+          <a:xfrm>
+            <a:off x="758952" y="2459736"/>
+            <a:ext cx="457200" cy="201168"/>
+          </a:xfrm>
+          <a:prstGeom prst="rect">
+            <a:avLst/>
+          </a:prstGeom>
+          <a:noFill/>
+        </p:spPr>
+        <p:txBody>
+          <a:bodyPr wrap="square" lIns="18288" rIns="18288" tIns="18288" bIns="18288" anchor="t">
+            <a:spAutoFit/>
+          </a:bodyPr>
+          <a:lstStyle/>
+          <a:p>
+            <a:pPr algn="ctr">
+              <a:defRPr sz="1600" b="1">
+                <a:solidFill>
+                  <a:srgbClr val="FFFFFF"/>
+                </a:solidFill>
+                <a:latin typeface="Avenir Next"/>
+              </a:defRPr>
+            </a:pPr>
+            <a:r>
+              <a:t>1</a:t>
+            </a:r>
+          </a:p>
+        </p:txBody>
+      </p:sp>
+      <p:sp>
+        <p:nvSpPr>
+          <p:cNvPr id="16" name="TextBox 15"/>
+          <p:cNvSpPr txBox="1"/>
+          <p:nvPr/>
+        </p:nvSpPr>
+        <p:spPr>
+          <a:xfrm>
+            <a:off x="1353312" y="2395728"/>
+            <a:ext cx="2487168" cy="512064"/>
+          </a:xfrm>
+          <a:prstGeom prst="rect">
+            <a:avLst/>
+          </a:prstGeom>
+          <a:noFill/>
+        </p:spPr>
+        <p:txBody>
+          <a:bodyPr wrap="square" lIns="18288" rIns="18288" tIns="18288" bIns="18288" anchor="t">
+            <a:spAutoFit/>
+          </a:bodyPr>
+          <a:lstStyle/>
+          <a:p>
+            <a:pPr algn="l">
+              <a:defRPr sz="2100" b="1">
+                <a:solidFill>
+                  <a:srgbClr val="21232B"/>
+                </a:solidFill>
+                <a:latin typeface="Avenir Next"/>
+              </a:defRPr>
+            </a:pPr>
+            <a:r>
+              <a:t>Open the journal</a:t>
+            </a:r>
+          </a:p>
+        </p:txBody>
+      </p:sp>
+      <p:sp>
+        <p:nvSpPr>
+          <p:cNvPr id="17" name="TextBox 16"/>
+          <p:cNvSpPr txBox="1"/>
+          <p:nvPr/>
+        </p:nvSpPr>
+        <p:spPr>
+          <a:xfrm>
+            <a:off x="786384" y="3081528"/>
+            <a:ext cx="3035808" cy="2148839"/>
+          </a:xfrm>
+          <a:prstGeom prst="rect">
+            <a:avLst/>
+          </a:prstGeom>
+          <a:noFill/>
+        </p:spPr>
+        <p:txBody>
+          <a:bodyPr wrap="square" lIns="18288" rIns="18288" tIns="18288" bIns="18288" anchor="t">
+            <a:spAutoFit/>
+          </a:bodyPr>
+          <a:lstStyle/>
+          <a:p>
+            <a:pPr algn="l">
+              <a:defRPr sz="1700" b="0">
+                <a:solidFill>
+                  <a:srgbClr val="21232B"/>
+                </a:solidFill>
+                <a:latin typeface="Avenir Next"/>
+              </a:defRPr>
+            </a:pPr>
+            <a:r>
+              <a:t>Open Mira from the menu. The prepared account already contains journal entries.</a:t>
+            </a:r>
+          </a:p>
+        </p:txBody>
+      </p:sp>
+      <p:sp>
+        <p:nvSpPr>
+          <p:cNvPr id="18" name="Rounded Rectangle 17"/>
+          <p:cNvSpPr/>
+          <p:nvPr/>
+        </p:nvSpPr>
+        <p:spPr>
+          <a:xfrm>
+            <a:off x="4315968" y="2148840"/>
+            <a:ext cx="3547872" cy="3264408"/>
+          </a:xfrm>
+          <a:prstGeom prst="roundRect">
+            <a:avLst>
+              <a:gd name="adj" fmla="val 8000"/>
+            </a:avLst>
+          </a:prstGeom>
+          <a:solidFill>
+            <a:srgbClr val="FFFFFF"/>
+          </a:solidFill>
+          <a:ln>
+            <a:solidFill>
+              <a:srgbClr val="DCD7CD"/>
+            </a:solidFill>
+          </a:ln>
+        </p:spPr>
+        <p:style>
+          <a:lnRef idx="1">
+            <a:schemeClr val="accent1"/>
+          </a:lnRef>
+          <a:fillRef idx="3">
+            <a:schemeClr val="accent1"/>
+          </a:fillRef>
+          <a:effectRef idx="2">
+            <a:schemeClr val="accent1"/>
+          </a:effectRef>
+          <a:fontRef idx="minor">
+            <a:schemeClr val="lt1"/>
+          </a:fontRef>
+        </p:style>
+        <p:txBody>
+          <a:bodyPr rtlCol="0" anchor="ctr"/>
+          <a:lstStyle/>
+          <a:p>
+            <a:pPr algn="ctr"/>
+          </a:p>
+        </p:txBody>
+      </p:sp>
+      <p:sp>
+        <p:nvSpPr>
+          <p:cNvPr id="19" name="Rectangle 18"/>
+          <p:cNvSpPr/>
+          <p:nvPr/>
+        </p:nvSpPr>
+        <p:spPr>
+          <a:xfrm>
+            <a:off x="4315968" y="2148840"/>
+            <a:ext cx="3547872" cy="68580"/>
+          </a:xfrm>
+          <a:prstGeom prst="rect">
+            <a:avLst/>
+          </a:prstGeom>
+          <a:solidFill>
+            <a:srgbClr val="21A391"/>
+          </a:solidFill>
+          <a:ln>
+            <a:noFill/>
+          </a:ln>
+        </p:spPr>
+        <p:style>
+          <a:lnRef idx="1">
+            <a:schemeClr val="accent1"/>
+          </a:lnRef>
+          <a:fillRef idx="3">
+            <a:schemeClr val="accent1"/>
+          </a:fillRef>
+          <a:effectRef idx="2">
+            <a:schemeClr val="accent1"/>
+          </a:effectRef>
+          <a:fontRef idx="minor">
+            <a:schemeClr val="lt1"/>
+          </a:fontRef>
+        </p:style>
+        <p:txBody>
+          <a:bodyPr rtlCol="0" anchor="ctr"/>
+          <a:lstStyle/>
+          <a:p>
+            <a:pPr algn="ctr"/>
+          </a:p>
+        </p:txBody>
+      </p:sp>
+      <p:sp>
+        <p:nvSpPr>
+          <p:cNvPr id="20" name="Rounded Rectangle 19"/>
+          <p:cNvSpPr/>
+          <p:nvPr/>
+        </p:nvSpPr>
+        <p:spPr>
+          <a:xfrm>
+            <a:off x="4544568" y="2395728"/>
+            <a:ext cx="457200" cy="457200"/>
+          </a:xfrm>
+          <a:prstGeom prst="roundRect">
+            <a:avLst>
+              <a:gd name="adj" fmla="val 8000"/>
+            </a:avLst>
+          </a:prstGeom>
+          <a:solidFill>
+            <a:srgbClr val="21A391"/>
+          </a:solidFill>
+          <a:ln>
+            <a:noFill/>
+          </a:ln>
+        </p:spPr>
+        <p:style>
+          <a:lnRef idx="1">
+            <a:schemeClr val="accent1"/>
+          </a:lnRef>
+          <a:fillRef idx="3">
+            <a:schemeClr val="accent1"/>
+          </a:fillRef>
+          <a:effectRef idx="2">
+            <a:schemeClr val="accent1"/>
+          </a:effectRef>
+          <a:fontRef idx="minor">
+            <a:schemeClr val="lt1"/>
+          </a:fontRef>
+        </p:style>
+        <p:txBody>
+          <a:bodyPr rtlCol="0" anchor="ctr"/>
+          <a:lstStyle/>
+          <a:p>
+            <a:pPr algn="ctr"/>
+          </a:p>
+        </p:txBody>
+      </p:sp>
+      <p:sp>
+        <p:nvSpPr>
+          <p:cNvPr id="21" name="TextBox 20"/>
+          <p:cNvSpPr txBox="1"/>
+          <p:nvPr/>
+        </p:nvSpPr>
+        <p:spPr>
+          <a:xfrm>
+            <a:off x="4544568" y="2459736"/>
+            <a:ext cx="457200" cy="201168"/>
+          </a:xfrm>
+          <a:prstGeom prst="rect">
+            <a:avLst/>
+          </a:prstGeom>
+          <a:noFill/>
+        </p:spPr>
+        <p:txBody>
+          <a:bodyPr wrap="square" lIns="18288" rIns="18288" tIns="18288" bIns="18288" anchor="t">
+            <a:spAutoFit/>
+          </a:bodyPr>
+          <a:lstStyle/>
+          <a:p>
+            <a:pPr algn="ctr">
+              <a:defRPr sz="1600" b="1">
+                <a:solidFill>
+                  <a:srgbClr val="FFFFFF"/>
+                </a:solidFill>
+                <a:latin typeface="Avenir Next"/>
+              </a:defRPr>
+            </a:pPr>
+            <a:r>
+              <a:t>2</a:t>
+            </a:r>
+          </a:p>
+        </p:txBody>
+      </p:sp>
+      <p:sp>
+        <p:nvSpPr>
+          <p:cNvPr id="22" name="TextBox 21"/>
+          <p:cNvSpPr txBox="1"/>
+          <p:nvPr/>
+        </p:nvSpPr>
+        <p:spPr>
+          <a:xfrm>
+            <a:off x="5138928" y="2395728"/>
+            <a:ext cx="2487168" cy="512064"/>
+          </a:xfrm>
+          <a:prstGeom prst="rect">
+            <a:avLst/>
+          </a:prstGeom>
+          <a:noFill/>
+        </p:spPr>
+        <p:txBody>
+          <a:bodyPr wrap="square" lIns="18288" rIns="18288" tIns="18288" bIns="18288" anchor="t">
+            <a:spAutoFit/>
+          </a:bodyPr>
+          <a:lstStyle/>
+          <a:p>
+            <a:pPr algn="l">
+              <a:defRPr sz="2100" b="1">
+                <a:solidFill>
+                  <a:srgbClr val="21232B"/>
+                </a:solidFill>
+                <a:latin typeface="Avenir Next"/>
+              </a:defRPr>
+            </a:pPr>
+            <a:r>
+              <a:t>Find an entry</a:t>
+            </a:r>
+          </a:p>
+        </p:txBody>
+      </p:sp>
+      <p:sp>
+        <p:nvSpPr>
+          <p:cNvPr id="23" name="TextBox 22"/>
+          <p:cNvSpPr txBox="1"/>
+          <p:nvPr/>
+        </p:nvSpPr>
+        <p:spPr>
+          <a:xfrm>
+            <a:off x="4572000" y="3081528"/>
+            <a:ext cx="3035808" cy="2148839"/>
+          </a:xfrm>
+          <a:prstGeom prst="rect">
+            <a:avLst/>
+          </a:prstGeom>
+          <a:noFill/>
+        </p:spPr>
+        <p:txBody>
+          <a:bodyPr wrap="square" lIns="18288" rIns="18288" tIns="18288" bIns="18288" anchor="t">
+            <a:spAutoFit/>
+          </a:bodyPr>
+          <a:lstStyle/>
+          <a:p>
+            <a:pPr algn="l">
+              <a:defRPr sz="1700" b="0">
+                <a:solidFill>
+                  <a:srgbClr val="21232B"/>
+                </a:solidFill>
+                <a:latin typeface="Avenir Next"/>
+              </a:defRPr>
+            </a:pPr>
+            <a:r>
+              <a:t>Use the date range, feeling chips or “Search your thoughts” field to narrow the journal.</a:t>
+            </a:r>
+          </a:p>
+        </p:txBody>
+      </p:sp>
+      <p:sp>
+        <p:nvSpPr>
+          <p:cNvPr id="24" name="Rounded Rectangle 23"/>
+          <p:cNvSpPr/>
+          <p:nvPr/>
+        </p:nvSpPr>
+        <p:spPr>
+          <a:xfrm>
+            <a:off x="8101583" y="2148840"/>
+            <a:ext cx="3547872" cy="3264408"/>
+          </a:xfrm>
+          <a:prstGeom prst="roundRect">
+            <a:avLst>
+              <a:gd name="adj" fmla="val 8000"/>
+            </a:avLst>
+          </a:prstGeom>
+          <a:solidFill>
+            <a:srgbClr val="FFFFFF"/>
+          </a:solidFill>
+          <a:ln>
+            <a:solidFill>
+              <a:srgbClr val="DCD7CD"/>
+            </a:solidFill>
+          </a:ln>
+        </p:spPr>
+        <p:style>
+          <a:lnRef idx="1">
+            <a:schemeClr val="accent1"/>
+          </a:lnRef>
+          <a:fillRef idx="3">
+            <a:schemeClr val="accent1"/>
+          </a:fillRef>
+          <a:effectRef idx="2">
+            <a:schemeClr val="accent1"/>
+          </a:effectRef>
+          <a:fontRef idx="minor">
+            <a:schemeClr val="lt1"/>
+          </a:fontRef>
+        </p:style>
+        <p:txBody>
+          <a:bodyPr rtlCol="0" anchor="ctr"/>
+          <a:lstStyle/>
+          <a:p>
+            <a:pPr algn="ctr"/>
+          </a:p>
+        </p:txBody>
+      </p:sp>
+      <p:sp>
+        <p:nvSpPr>
+          <p:cNvPr id="25" name="Rectangle 24"/>
+          <p:cNvSpPr/>
+          <p:nvPr/>
+        </p:nvSpPr>
+        <p:spPr>
+          <a:xfrm>
+            <a:off x="8101583" y="2148840"/>
+            <a:ext cx="3547872" cy="68580"/>
+          </a:xfrm>
+          <a:prstGeom prst="rect">
+            <a:avLst/>
+          </a:prstGeom>
+          <a:solidFill>
+            <a:srgbClr val="DFA538"/>
+          </a:solidFill>
+          <a:ln>
+            <a:noFill/>
+          </a:ln>
+        </p:spPr>
+        <p:style>
+          <a:lnRef idx="1">
+            <a:schemeClr val="accent1"/>
+          </a:lnRef>
+          <a:fillRef idx="3">
+            <a:schemeClr val="accent1"/>
+          </a:fillRef>
+          <a:effectRef idx="2">
+            <a:schemeClr val="accent1"/>
+          </a:effectRef>
+          <a:fontRef idx="minor">
+            <a:schemeClr val="lt1"/>
+          </a:fontRef>
+        </p:style>
+        <p:txBody>
+          <a:bodyPr rtlCol="0" anchor="ctr"/>
+          <a:lstStyle/>
+          <a:p>
+            <a:pPr algn="ctr"/>
+          </a:p>
+        </p:txBody>
+      </p:sp>
+      <p:sp>
+        <p:nvSpPr>
+          <p:cNvPr id="26" name="Rounded Rectangle 25"/>
+          <p:cNvSpPr/>
+          <p:nvPr/>
+        </p:nvSpPr>
+        <p:spPr>
+          <a:xfrm>
+            <a:off x="8330183" y="2395728"/>
+            <a:ext cx="457200" cy="457200"/>
+          </a:xfrm>
+          <a:prstGeom prst="roundRect">
+            <a:avLst>
+              <a:gd name="adj" fmla="val 8000"/>
+            </a:avLst>
+          </a:prstGeom>
+          <a:solidFill>
+            <a:srgbClr val="DFA538"/>
+          </a:solidFill>
+          <a:ln>
+            <a:noFill/>
+          </a:ln>
+        </p:spPr>
+        <p:style>
+          <a:lnRef idx="1">
+            <a:schemeClr val="accent1"/>
+          </a:lnRef>
+          <a:fillRef idx="3">
+            <a:schemeClr val="accent1"/>
+          </a:fillRef>
+          <a:effectRef idx="2">
+            <a:schemeClr val="accent1"/>
+          </a:effectRef>
+          <a:fontRef idx="minor">
+            <a:schemeClr val="lt1"/>
+          </a:fontRef>
+        </p:style>
+        <p:txBody>
+          <a:bodyPr rtlCol="0" anchor="ctr"/>
+          <a:lstStyle/>
+          <a:p>
+            <a:pPr algn="ctr"/>
+          </a:p>
+        </p:txBody>
+      </p:sp>
+      <p:sp>
+        <p:nvSpPr>
+          <p:cNvPr id="27" name="TextBox 26"/>
+          <p:cNvSpPr txBox="1"/>
+          <p:nvPr/>
+        </p:nvSpPr>
+        <p:spPr>
+          <a:xfrm>
+            <a:off x="8330183" y="2459736"/>
+            <a:ext cx="457200" cy="201168"/>
+          </a:xfrm>
+          <a:prstGeom prst="rect">
+            <a:avLst/>
+          </a:prstGeom>
+          <a:noFill/>
+        </p:spPr>
+        <p:txBody>
+          <a:bodyPr wrap="square" lIns="18288" rIns="18288" tIns="18288" bIns="18288" anchor="t">
+            <a:spAutoFit/>
+          </a:bodyPr>
+          <a:lstStyle/>
+          <a:p>
+            <a:pPr algn="ctr">
+              <a:defRPr sz="1600" b="1">
+                <a:solidFill>
+                  <a:srgbClr val="FFFFFF"/>
+                </a:solidFill>
+                <a:latin typeface="Avenir Next"/>
+              </a:defRPr>
+            </a:pPr>
+            <a:r>
+              <a:t>3</a:t>
+            </a:r>
+          </a:p>
+        </p:txBody>
+      </p:sp>
+      <p:sp>
+        <p:nvSpPr>
+          <p:cNvPr id="28" name="TextBox 27"/>
+          <p:cNvSpPr txBox="1"/>
+          <p:nvPr/>
+        </p:nvSpPr>
+        <p:spPr>
+          <a:xfrm>
+            <a:off x="8924544" y="2395728"/>
+            <a:ext cx="2487168" cy="512064"/>
+          </a:xfrm>
+          <a:prstGeom prst="rect">
+            <a:avLst/>
+          </a:prstGeom>
+          <a:noFill/>
+        </p:spPr>
+        <p:txBody>
+          <a:bodyPr wrap="square" lIns="18288" rIns="18288" tIns="18288" bIns="18288" anchor="t">
+            <a:spAutoFit/>
+          </a:bodyPr>
+          <a:lstStyle/>
+          <a:p>
+            <a:pPr algn="l">
+              <a:defRPr sz="2100" b="1">
+                <a:solidFill>
+                  <a:srgbClr val="21232B"/>
+                </a:solidFill>
+                <a:latin typeface="Avenir Next"/>
+              </a:defRPr>
+            </a:pPr>
+            <a:r>
+              <a:t>Add a reflection</a:t>
+            </a:r>
+          </a:p>
+        </p:txBody>
+      </p:sp>
+      <p:sp>
+        <p:nvSpPr>
+          <p:cNvPr id="29" name="TextBox 28"/>
+          <p:cNvSpPr txBox="1"/>
+          <p:nvPr/>
+        </p:nvSpPr>
+        <p:spPr>
+          <a:xfrm>
+            <a:off x="8357615" y="3081528"/>
+            <a:ext cx="3035808" cy="2148839"/>
+          </a:xfrm>
+          <a:prstGeom prst="rect">
+            <a:avLst/>
+          </a:prstGeom>
+          <a:noFill/>
+        </p:spPr>
+        <p:txBody>
+          <a:bodyPr wrap="square" lIns="18288" rIns="18288" tIns="18288" bIns="18288" anchor="t">
+            <a:spAutoFit/>
+          </a:bodyPr>
+          <a:lstStyle/>
+          <a:p>
+            <a:pPr algn="l">
+              <a:defRPr sz="1700" b="0">
+                <a:solidFill>
+                  <a:srgbClr val="21232B"/>
+                </a:solidFill>
+                <a:latin typeface="Avenir Next"/>
+              </a:defRPr>
+            </a:pPr>
+            <a:r>
+              <a:t>Tell Mira about a day in chat or share a relevant photo. Return to the journal to check what was kept.</a:t>
+            </a:r>
+          </a:p>
+        </p:txBody>
+      </p:sp>
+      <p:sp>
+        <p:nvSpPr>
+          <p:cNvPr id="30" name="Rounded Rectangle 29"/>
+          <p:cNvSpPr/>
+          <p:nvPr/>
+        </p:nvSpPr>
+        <p:spPr>
+          <a:xfrm>
+            <a:off x="521207" y="5833872"/>
+            <a:ext cx="11128248" cy="438912"/>
+          </a:xfrm>
+          <a:prstGeom prst="roundRect">
+            <a:avLst>
+              <a:gd name="adj" fmla="val 8000"/>
+            </a:avLst>
+          </a:prstGeom>
+          <a:solidFill>
+            <a:srgbClr val="EEEADF"/>
+          </a:solidFill>
+          <a:ln>
+            <a:noFill/>
+          </a:ln>
+        </p:spPr>
+        <p:style>
+          <a:lnRef idx="1">
+            <a:schemeClr val="accent1"/>
+          </a:lnRef>
+          <a:fillRef idx="3">
+            <a:schemeClr val="accent1"/>
+          </a:fillRef>
+          <a:effectRef idx="2">
+            <a:schemeClr val="accent1"/>
+          </a:effectRef>
+          <a:fontRef idx="minor">
+            <a:schemeClr val="lt1"/>
+          </a:fontRef>
+        </p:style>
+        <p:txBody>
+          <a:bodyPr rtlCol="0" anchor="ctr"/>
+          <a:lstStyle/>
+          <a:p>
+            <a:pPr algn="ctr"/>
+          </a:p>
+        </p:txBody>
+      </p:sp>
+      <p:sp>
+        <p:nvSpPr>
+          <p:cNvPr id="31" name="Rectangle 30"/>
+          <p:cNvSpPr/>
+          <p:nvPr/>
+        </p:nvSpPr>
+        <p:spPr>
+          <a:xfrm>
+            <a:off x="521207" y="5833872"/>
+            <a:ext cx="73152" cy="438912"/>
+          </a:xfrm>
+          <a:prstGeom prst="rect">
+            <a:avLst/>
+          </a:prstGeom>
+          <a:solidFill>
+            <a:srgbClr val="8E64B9"/>
+          </a:solidFill>
+          <a:ln>
+            <a:noFill/>
+          </a:ln>
+        </p:spPr>
+        <p:style>
+          <a:lnRef idx="1">
+            <a:schemeClr val="accent1"/>
+          </a:lnRef>
+          <a:fillRef idx="3">
+            <a:schemeClr val="accent1"/>
+          </a:fillRef>
+          <a:effectRef idx="2">
+            <a:schemeClr val="accent1"/>
+          </a:effectRef>
+          <a:fontRef idx="minor">
+            <a:schemeClr val="lt1"/>
+          </a:fontRef>
+        </p:style>
+        <p:txBody>
+          <a:bodyPr rtlCol="0" anchor="ctr"/>
+          <a:lstStyle/>
+          <a:p>
+            <a:pPr algn="ctr"/>
+          </a:p>
+        </p:txBody>
+      </p:sp>
+      <p:sp>
+        <p:nvSpPr>
+          <p:cNvPr id="32" name="TextBox 31"/>
+          <p:cNvSpPr txBox="1"/>
+          <p:nvPr/>
+        </p:nvSpPr>
+        <p:spPr>
+          <a:xfrm>
+            <a:off x="713232" y="5925312"/>
+            <a:ext cx="10698480" cy="265176"/>
+          </a:xfrm>
+          <a:prstGeom prst="rect">
+            <a:avLst/>
+          </a:prstGeom>
+          <a:noFill/>
+        </p:spPr>
+        <p:txBody>
+          <a:bodyPr wrap="square" lIns="18288" rIns="18288" tIns="18288" bIns="18288" anchor="t">
+            <a:spAutoFit/>
+          </a:bodyPr>
+          <a:lstStyle/>
+          <a:p>
+            <a:pPr algn="l">
+              <a:defRPr sz="1400" b="0">
+                <a:solidFill>
+                  <a:srgbClr val="21232B"/>
+                </a:solidFill>
+                <a:latin typeface="Avenir Next"/>
+              </a:defRPr>
+            </a:pPr>
+            <a:r>
+              <a:t>Use fictional or non-personal content when trying a new reflection in the shared QA account.</a:t>
+            </a:r>
+          </a:p>
+        </p:txBody>
+      </p:sp>
+    </p:spTree>
+  </p:cSld>
+  <p:clrMapOvr>
+    <a:masterClrMapping/>
+  </p:clrMapOvr>
+</p:sld>
+</file>
+
+<file path=ppt/slides/slide12.xml><?xml version="1.0" encoding="utf-8"?>
+<p:sld xmlns:a="http://schemas.openxmlformats.org/drawingml/2006/main" xmlns:p="http://schemas.openxmlformats.org/presentationml/2006/main" xmlns:r="http://schemas.openxmlformats.org/officeDocument/2006/relationships">
+  <p:cSld>
+    <p:spTree>
+      <p:nvGrpSpPr>
+        <p:cNvPr id="1" name=""/>
+        <p:cNvGrpSpPr/>
+        <p:nvPr/>
+      </p:nvGrpSpPr>
+      <p:grpSpPr/>
+      <p:sp>
+        <p:nvSpPr>
+          <p:cNvPr id="2" name="Rectangle 1"/>
+          <p:cNvSpPr/>
+          <p:nvPr/>
+        </p:nvSpPr>
+        <p:spPr>
+          <a:xfrm>
+            <a:off x="0" y="0"/>
+            <a:ext cx="12191695" cy="6858000"/>
+          </a:xfrm>
+          <a:prstGeom prst="rect">
+            <a:avLst/>
+          </a:prstGeom>
+          <a:solidFill>
+            <a:srgbClr val="F8F5EC"/>
+          </a:solidFill>
+          <a:ln>
+            <a:noFill/>
+          </a:ln>
+        </p:spPr>
+        <p:style>
+          <a:lnRef idx="1">
+            <a:schemeClr val="accent1"/>
+          </a:lnRef>
+          <a:fillRef idx="3">
+            <a:schemeClr val="accent1"/>
+          </a:fillRef>
+          <a:effectRef idx="2">
+            <a:schemeClr val="accent1"/>
+          </a:effectRef>
+          <a:fontRef idx="minor">
+            <a:schemeClr val="lt1"/>
+          </a:fontRef>
+        </p:style>
+        <p:txBody>
+          <a:bodyPr rtlCol="0" anchor="ctr"/>
+          <a:lstStyle/>
+          <a:p>
+            <a:pPr algn="ctr"/>
+          </a:p>
+        </p:txBody>
+      </p:sp>
+      <p:sp>
+        <p:nvSpPr>
+          <p:cNvPr id="3" name="Rectangle 2"/>
+          <p:cNvSpPr/>
+          <p:nvPr/>
+        </p:nvSpPr>
+        <p:spPr>
+          <a:xfrm>
+            <a:off x="0" y="0"/>
+            <a:ext cx="12191695" cy="585216"/>
+          </a:xfrm>
+          <a:prstGeom prst="rect">
+            <a:avLst/>
+          </a:prstGeom>
+          <a:solidFill>
+            <a:srgbClr val="08090C"/>
+          </a:solidFill>
+          <a:ln>
+            <a:noFill/>
+          </a:ln>
+        </p:spPr>
+        <p:style>
+          <a:lnRef idx="1">
+            <a:schemeClr val="accent1"/>
+          </a:lnRef>
+          <a:fillRef idx="3">
+            <a:schemeClr val="accent1"/>
+          </a:fillRef>
+          <a:effectRef idx="2">
+            <a:schemeClr val="accent1"/>
+          </a:effectRef>
+          <a:fontRef idx="minor">
+            <a:schemeClr val="lt1"/>
+          </a:fontRef>
+        </p:style>
+        <p:txBody>
+          <a:bodyPr rtlCol="0" anchor="ctr"/>
+          <a:lstStyle/>
+          <a:p>
+            <a:pPr algn="ctr"/>
+          </a:p>
+        </p:txBody>
+      </p:sp>
+      <p:sp>
+        <p:nvSpPr>
+          <p:cNvPr id="4" name="TextBox 3"/>
+          <p:cNvSpPr txBox="1"/>
+          <p:nvPr/>
+        </p:nvSpPr>
+        <p:spPr>
+          <a:xfrm>
+            <a:off x="512064" y="128016"/>
+            <a:ext cx="2011680" cy="283464"/>
+          </a:xfrm>
+          <a:prstGeom prst="rect">
+            <a:avLst/>
+          </a:prstGeom>
+          <a:noFill/>
+        </p:spPr>
+        <p:txBody>
+          <a:bodyPr wrap="square" lIns="18288" rIns="18288" tIns="18288" bIns="18288" anchor="t">
+            <a:spAutoFit/>
+          </a:bodyPr>
+          <a:lstStyle/>
+          <a:p>
+            <a:pPr algn="l">
+              <a:defRPr sz="1700" b="1">
+                <a:solidFill>
+                  <a:srgbClr val="FFFFFF"/>
+                </a:solidFill>
+                <a:latin typeface="Avenir Next"/>
+              </a:defRPr>
+            </a:pPr>
+            <a:r>
+              <a:t>PETAK</a:t>
+            </a:r>
+          </a:p>
+        </p:txBody>
+      </p:sp>
+      <p:sp>
+        <p:nvSpPr>
+          <p:cNvPr id="5" name="TextBox 4"/>
+          <p:cNvSpPr txBox="1"/>
+          <p:nvPr/>
+        </p:nvSpPr>
+        <p:spPr>
+          <a:xfrm>
+            <a:off x="3794760" y="155448"/>
+            <a:ext cx="4617720" cy="237744"/>
+          </a:xfrm>
+          <a:prstGeom prst="rect">
+            <a:avLst/>
+          </a:prstGeom>
+          <a:noFill/>
+        </p:spPr>
+        <p:txBody>
+          <a:bodyPr wrap="square" lIns="18288" rIns="18288" tIns="18288" bIns="18288" anchor="t">
+            <a:spAutoFit/>
+          </a:bodyPr>
+          <a:lstStyle/>
+          <a:p>
+            <a:pPr algn="ctr">
+              <a:defRPr sz="1300" b="1">
+                <a:solidFill>
+                  <a:srgbClr val="FFFFFF"/>
+                </a:solidFill>
+                <a:latin typeface="Avenir Next"/>
+              </a:defRPr>
+            </a:pPr>
+            <a:r>
+              <a:t>FEATURE REFERENCE</a:t>
+            </a:r>
+          </a:p>
+        </p:txBody>
+      </p:sp>
+      <p:sp>
+        <p:nvSpPr>
+          <p:cNvPr id="6" name="TextBox 5"/>
+          <p:cNvSpPr txBox="1"/>
+          <p:nvPr/>
+        </p:nvSpPr>
+        <p:spPr>
+          <a:xfrm>
+            <a:off x="9418320" y="164592"/>
+            <a:ext cx="2221992" cy="228600"/>
+          </a:xfrm>
+          <a:prstGeom prst="rect">
+            <a:avLst/>
+          </a:prstGeom>
+          <a:noFill/>
+        </p:spPr>
+        <p:txBody>
+          <a:bodyPr wrap="square" lIns="18288" rIns="18288" tIns="18288" bIns="18288" anchor="t">
+            <a:spAutoFit/>
+          </a:bodyPr>
+          <a:lstStyle/>
+          <a:p>
+            <a:pPr algn="r">
+              <a:defRPr sz="1100" b="1">
+                <a:solidFill>
+                  <a:srgbClr val="FFFFFF"/>
+                </a:solidFill>
+                <a:latin typeface="Avenir Next"/>
+              </a:defRPr>
+            </a:pPr>
+            <a:r>
+              <a:t>AI BUILDER CUP 2026</a:t>
+            </a:r>
+          </a:p>
+        </p:txBody>
+      </p:sp>
+      <p:sp>
+        <p:nvSpPr>
+          <p:cNvPr id="7" name="TextBox 6"/>
+          <p:cNvSpPr txBox="1"/>
+          <p:nvPr/>
+        </p:nvSpPr>
+        <p:spPr>
+          <a:xfrm>
+            <a:off x="512064" y="859536"/>
+            <a:ext cx="11064240" cy="594360"/>
+          </a:xfrm>
+          <a:prstGeom prst="rect">
+            <a:avLst/>
+          </a:prstGeom>
+          <a:noFill/>
+        </p:spPr>
+        <p:txBody>
+          <a:bodyPr wrap="square" lIns="18288" rIns="18288" tIns="18288" bIns="18288" anchor="t">
+            <a:spAutoFit/>
+          </a:bodyPr>
+          <a:lstStyle/>
+          <a:p>
+            <a:pPr algn="l">
+              <a:defRPr sz="3100" b="1">
+                <a:solidFill>
+                  <a:srgbClr val="21232B"/>
+                </a:solidFill>
+                <a:latin typeface="Avenir Next"/>
+              </a:defRPr>
+            </a:pPr>
+            <a:r>
+              <a:t>Other places in the app</a:t>
+            </a:r>
+          </a:p>
+        </p:txBody>
+      </p:sp>
+      <p:sp>
+        <p:nvSpPr>
+          <p:cNvPr id="8" name="TextBox 7"/>
+          <p:cNvSpPr txBox="1"/>
+          <p:nvPr/>
+        </p:nvSpPr>
+        <p:spPr>
+          <a:xfrm>
+            <a:off x="530352" y="1517904"/>
+            <a:ext cx="10881360" cy="512064"/>
+          </a:xfrm>
+          <a:prstGeom prst="rect">
+            <a:avLst/>
+          </a:prstGeom>
+          <a:noFill/>
+        </p:spPr>
+        <p:txBody>
+          <a:bodyPr wrap="square" lIns="18288" rIns="18288" tIns="18288" bIns="18288" anchor="t">
+            <a:spAutoFit/>
+          </a:bodyPr>
+          <a:lstStyle/>
+          <a:p>
+            <a:pPr algn="l">
+              <a:defRPr sz="1600" b="0">
+                <a:solidFill>
+                  <a:srgbClr val="5B5E67"/>
+                </a:solidFill>
+                <a:latin typeface="Avenir Next"/>
+              </a:defRPr>
+            </a:pPr>
+            <a:r>
+              <a:t>The menu also exposes account and household controls.</a:t>
+            </a:r>
+          </a:p>
+        </p:txBody>
+      </p:sp>
+      <p:sp>
+        <p:nvSpPr>
+          <p:cNvPr id="9" name="Rectangle 8"/>
+          <p:cNvSpPr/>
+          <p:nvPr/>
+        </p:nvSpPr>
+        <p:spPr>
+          <a:xfrm>
+            <a:off x="502920" y="6519672"/>
+            <a:ext cx="11155680" cy="13716"/>
+          </a:xfrm>
+          <a:prstGeom prst="rect">
+            <a:avLst/>
+          </a:prstGeom>
+          <a:solidFill>
+            <a:srgbClr val="DCD7CD"/>
+          </a:solidFill>
+          <a:ln>
+            <a:noFill/>
+          </a:ln>
+        </p:spPr>
+        <p:style>
+          <a:lnRef idx="1">
+            <a:schemeClr val="accent1"/>
+          </a:lnRef>
+          <a:fillRef idx="3">
+            <a:schemeClr val="accent1"/>
+          </a:fillRef>
+          <a:effectRef idx="2">
+            <a:schemeClr val="accent1"/>
+          </a:effectRef>
+          <a:fontRef idx="minor">
+            <a:schemeClr val="lt1"/>
+          </a:fontRef>
+        </p:style>
+        <p:txBody>
+          <a:bodyPr rtlCol="0" anchor="ctr"/>
+          <a:lstStyle/>
+          <a:p>
+            <a:pPr algn="ctr"/>
+          </a:p>
+        </p:txBody>
+      </p:sp>
+      <p:sp>
+        <p:nvSpPr>
+          <p:cNvPr id="10" name="TextBox 9"/>
+          <p:cNvSpPr txBox="1"/>
+          <p:nvPr/>
+        </p:nvSpPr>
+        <p:spPr>
+          <a:xfrm>
+            <a:off x="530352" y="6574536"/>
+            <a:ext cx="8412480" cy="182880"/>
+          </a:xfrm>
+          <a:prstGeom prst="rect">
+            <a:avLst/>
+          </a:prstGeom>
+          <a:noFill/>
+        </p:spPr>
+        <p:txBody>
+          <a:bodyPr wrap="square" lIns="18288" rIns="18288" tIns="18288" bIns="18288" anchor="t">
+            <a:spAutoFit/>
+          </a:bodyPr>
+          <a:lstStyle/>
+          <a:p>
+            <a:pPr algn="l">
+              <a:defRPr sz="1000" b="0">
+                <a:solidFill>
+                  <a:srgbClr val="5B5E67"/>
+                </a:solidFill>
+                <a:latin typeface="Avenir Next"/>
+              </a:defRPr>
+            </a:pPr>
+            <a:r>
+              <a:t>Petak QA · use the reviewer access supplied separately</a:t>
+            </a:r>
+          </a:p>
+        </p:txBody>
+      </p:sp>
+      <p:sp>
+        <p:nvSpPr>
+          <p:cNvPr id="11" name="TextBox 10"/>
+          <p:cNvSpPr txBox="1"/>
+          <p:nvPr/>
+        </p:nvSpPr>
+        <p:spPr>
+          <a:xfrm>
+            <a:off x="11128248" y="6556248"/>
+            <a:ext cx="502920" cy="219456"/>
+          </a:xfrm>
+          <a:prstGeom prst="rect">
+            <a:avLst/>
+          </a:prstGeom>
+          <a:noFill/>
+        </p:spPr>
+        <p:txBody>
+          <a:bodyPr wrap="square" lIns="18288" rIns="18288" tIns="18288" bIns="18288" anchor="t">
+            <a:spAutoFit/>
+          </a:bodyPr>
+          <a:lstStyle/>
+          <a:p>
+            <a:pPr algn="r">
+              <a:defRPr sz="1100" b="1">
+                <a:solidFill>
+                  <a:srgbClr val="5B5E67"/>
+                </a:solidFill>
+                <a:latin typeface="Avenir Next"/>
+              </a:defRPr>
+            </a:pPr>
+            <a:r>
+              <a:t>12</a:t>
+            </a:r>
+          </a:p>
+        </p:txBody>
+      </p:sp>
+      <p:sp>
+        <p:nvSpPr>
+          <p:cNvPr id="12" name="Rounded Rectangle 11"/>
+          <p:cNvSpPr/>
+          <p:nvPr/>
+        </p:nvSpPr>
+        <p:spPr>
+          <a:xfrm>
+            <a:off x="530352" y="2148840"/>
+            <a:ext cx="3547872" cy="3264408"/>
+          </a:xfrm>
+          <a:prstGeom prst="roundRect">
+            <a:avLst>
+              <a:gd name="adj" fmla="val 8000"/>
+            </a:avLst>
+          </a:prstGeom>
+          <a:solidFill>
+            <a:srgbClr val="FFFFFF"/>
+          </a:solidFill>
+          <a:ln>
+            <a:solidFill>
+              <a:srgbClr val="DCD7CD"/>
+            </a:solidFill>
+          </a:ln>
+        </p:spPr>
+        <p:style>
+          <a:lnRef idx="1">
+            <a:schemeClr val="accent1"/>
+          </a:lnRef>
+          <a:fillRef idx="3">
+            <a:schemeClr val="accent1"/>
+          </a:fillRef>
+          <a:effectRef idx="2">
+            <a:schemeClr val="accent1"/>
+          </a:effectRef>
+          <a:fontRef idx="minor">
+            <a:schemeClr val="lt1"/>
+          </a:fontRef>
+        </p:style>
+        <p:txBody>
+          <a:bodyPr rtlCol="0" anchor="ctr"/>
+          <a:lstStyle/>
+          <a:p>
+            <a:pPr algn="ctr"/>
+          </a:p>
+        </p:txBody>
+      </p:sp>
+      <p:sp>
+        <p:nvSpPr>
+          <p:cNvPr id="13" name="Rectangle 12"/>
+          <p:cNvSpPr/>
+          <p:nvPr/>
+        </p:nvSpPr>
+        <p:spPr>
+          <a:xfrm>
+            <a:off x="530352" y="2148840"/>
+            <a:ext cx="3547872" cy="68580"/>
+          </a:xfrm>
+          <a:prstGeom prst="rect">
+            <a:avLst/>
+          </a:prstGeom>
+          <a:solidFill>
+            <a:srgbClr val="21A391"/>
+          </a:solidFill>
+          <a:ln>
+            <a:noFill/>
+          </a:ln>
+        </p:spPr>
+        <p:style>
+          <a:lnRef idx="1">
+            <a:schemeClr val="accent1"/>
+          </a:lnRef>
+          <a:fillRef idx="3">
+            <a:schemeClr val="accent1"/>
+          </a:fillRef>
+          <a:effectRef idx="2">
+            <a:schemeClr val="accent1"/>
+          </a:effectRef>
+          <a:fontRef idx="minor">
+            <a:schemeClr val="lt1"/>
+          </a:fontRef>
+        </p:style>
+        <p:txBody>
+          <a:bodyPr rtlCol="0" anchor="ctr"/>
+          <a:lstStyle/>
+          <a:p>
+            <a:pPr algn="ctr"/>
+          </a:p>
+        </p:txBody>
+      </p:sp>
+      <p:sp>
+        <p:nvSpPr>
+          <p:cNvPr id="14" name="Rounded Rectangle 13"/>
+          <p:cNvSpPr/>
+          <p:nvPr/>
+        </p:nvSpPr>
+        <p:spPr>
+          <a:xfrm>
+            <a:off x="758952" y="2395728"/>
+            <a:ext cx="457200" cy="457200"/>
+          </a:xfrm>
+          <a:prstGeom prst="roundRect">
+            <a:avLst>
+              <a:gd name="adj" fmla="val 8000"/>
+            </a:avLst>
+          </a:prstGeom>
+          <a:solidFill>
+            <a:srgbClr val="21A391"/>
+          </a:solidFill>
+          <a:ln>
+            <a:noFill/>
+          </a:ln>
+        </p:spPr>
+        <p:style>
+          <a:lnRef idx="1">
+            <a:schemeClr val="accent1"/>
+          </a:lnRef>
+          <a:fillRef idx="3">
+            <a:schemeClr val="accent1"/>
+          </a:fillRef>
+          <a:effectRef idx="2">
+            <a:schemeClr val="accent1"/>
+          </a:effectRef>
+          <a:fontRef idx="minor">
+            <a:schemeClr val="lt1"/>
+          </a:fontRef>
+        </p:style>
+        <p:txBody>
+          <a:bodyPr rtlCol="0" anchor="ctr"/>
+          <a:lstStyle/>
+          <a:p>
+            <a:pPr algn="ctr"/>
+          </a:p>
+        </p:txBody>
+      </p:sp>
+      <p:sp>
+        <p:nvSpPr>
+          <p:cNvPr id="15" name="TextBox 14"/>
+          <p:cNvSpPr txBox="1"/>
+          <p:nvPr/>
+        </p:nvSpPr>
+        <p:spPr>
+          <a:xfrm>
+            <a:off x="758952" y="2459736"/>
+            <a:ext cx="457200" cy="201168"/>
+          </a:xfrm>
+          <a:prstGeom prst="rect">
+            <a:avLst/>
+          </a:prstGeom>
+          <a:noFill/>
+        </p:spPr>
+        <p:txBody>
+          <a:bodyPr wrap="square" lIns="18288" rIns="18288" tIns="18288" bIns="18288" anchor="t">
+            <a:spAutoFit/>
+          </a:bodyPr>
+          <a:lstStyle/>
+          <a:p>
+            <a:pPr algn="ctr">
+              <a:defRPr sz="1600" b="1">
+                <a:solidFill>
+                  <a:srgbClr val="FFFFFF"/>
+                </a:solidFill>
+                <a:latin typeface="Avenir Next"/>
+              </a:defRPr>
+            </a:pPr>
+            <a:r>
+              <a:t>1</a:t>
+            </a:r>
+          </a:p>
+        </p:txBody>
+      </p:sp>
+      <p:sp>
+        <p:nvSpPr>
+          <p:cNvPr id="16" name="TextBox 15"/>
+          <p:cNvSpPr txBox="1"/>
+          <p:nvPr/>
+        </p:nvSpPr>
+        <p:spPr>
+          <a:xfrm>
+            <a:off x="1353312" y="2395728"/>
+            <a:ext cx="2487168" cy="512064"/>
+          </a:xfrm>
+          <a:prstGeom prst="rect">
+            <a:avLst/>
+          </a:prstGeom>
+          <a:noFill/>
+        </p:spPr>
+        <p:txBody>
+          <a:bodyPr wrap="square" lIns="18288" rIns="18288" tIns="18288" bIns="18288" anchor="t">
+            <a:spAutoFit/>
+          </a:bodyPr>
+          <a:lstStyle/>
+          <a:p>
+            <a:pPr algn="l">
+              <a:defRPr sz="2100" b="1">
+                <a:solidFill>
+                  <a:srgbClr val="21232B"/>
+                </a:solidFill>
+                <a:latin typeface="Avenir Next"/>
+              </a:defRPr>
+            </a:pPr>
+            <a:r>
+              <a:t>Your neighbours</a:t>
+            </a:r>
+          </a:p>
+        </p:txBody>
+      </p:sp>
+      <p:sp>
+        <p:nvSpPr>
+          <p:cNvPr id="17" name="TextBox 16"/>
+          <p:cNvSpPr txBox="1"/>
+          <p:nvPr/>
+        </p:nvSpPr>
+        <p:spPr>
+          <a:xfrm>
+            <a:off x="786384" y="3081528"/>
+            <a:ext cx="3035808" cy="2148839"/>
+          </a:xfrm>
+          <a:prstGeom prst="rect">
+            <a:avLst/>
+          </a:prstGeom>
+          <a:noFill/>
+        </p:spPr>
+        <p:txBody>
+          <a:bodyPr wrap="square" lIns="18288" rIns="18288" tIns="18288" bIns="18288" anchor="t">
+            <a:spAutoFit/>
+          </a:bodyPr>
+          <a:lstStyle/>
+          <a:p>
+            <a:pPr algn="l">
+              <a:defRPr sz="1700" b="0">
+                <a:solidFill>
+                  <a:srgbClr val="21232B"/>
+                </a:solidFill>
+                <a:latin typeface="Avenir Next"/>
+              </a:defRPr>
+            </a:pPr>
+            <a:r>
+              <a:t>See who lives in the household. Ollie, Penny, Milo and Mira are already active for this reviewer account.</a:t>
+            </a:r>
+          </a:p>
+        </p:txBody>
+      </p:sp>
+      <p:sp>
+        <p:nvSpPr>
+          <p:cNvPr id="18" name="Rounded Rectangle 17"/>
+          <p:cNvSpPr/>
+          <p:nvPr/>
+        </p:nvSpPr>
+        <p:spPr>
+          <a:xfrm>
+            <a:off x="4315968" y="2148840"/>
+            <a:ext cx="3547872" cy="3264408"/>
+          </a:xfrm>
+          <a:prstGeom prst="roundRect">
+            <a:avLst>
+              <a:gd name="adj" fmla="val 8000"/>
+            </a:avLst>
+          </a:prstGeom>
+          <a:solidFill>
+            <a:srgbClr val="FFFFFF"/>
+          </a:solidFill>
+          <a:ln>
+            <a:solidFill>
+              <a:srgbClr val="DCD7CD"/>
+            </a:solidFill>
+          </a:ln>
+        </p:spPr>
+        <p:style>
+          <a:lnRef idx="1">
+            <a:schemeClr val="accent1"/>
+          </a:lnRef>
+          <a:fillRef idx="3">
+            <a:schemeClr val="accent1"/>
+          </a:fillRef>
+          <a:effectRef idx="2">
+            <a:schemeClr val="accent1"/>
+          </a:effectRef>
+          <a:fontRef idx="minor">
+            <a:schemeClr val="lt1"/>
+          </a:fontRef>
+        </p:style>
+        <p:txBody>
+          <a:bodyPr rtlCol="0" anchor="ctr"/>
+          <a:lstStyle/>
+          <a:p>
+            <a:pPr algn="ctr"/>
+          </a:p>
+        </p:txBody>
+      </p:sp>
+      <p:sp>
+        <p:nvSpPr>
+          <p:cNvPr id="19" name="Rectangle 18"/>
+          <p:cNvSpPr/>
+          <p:nvPr/>
+        </p:nvSpPr>
+        <p:spPr>
+          <a:xfrm>
+            <a:off x="4315968" y="2148840"/>
+            <a:ext cx="3547872" cy="68580"/>
+          </a:xfrm>
+          <a:prstGeom prst="rect">
+            <a:avLst/>
+          </a:prstGeom>
+          <a:solidFill>
+            <a:srgbClr val="DFA538"/>
+          </a:solidFill>
+          <a:ln>
+            <a:noFill/>
+          </a:ln>
+        </p:spPr>
+        <p:style>
+          <a:lnRef idx="1">
+            <a:schemeClr val="accent1"/>
+          </a:lnRef>
+          <a:fillRef idx="3">
+            <a:schemeClr val="accent1"/>
+          </a:fillRef>
+          <a:effectRef idx="2">
+            <a:schemeClr val="accent1"/>
+          </a:effectRef>
+          <a:fontRef idx="minor">
+            <a:schemeClr val="lt1"/>
+          </a:fontRef>
+        </p:style>
+        <p:txBody>
+          <a:bodyPr rtlCol="0" anchor="ctr"/>
+          <a:lstStyle/>
+          <a:p>
+            <a:pPr algn="ctr"/>
+          </a:p>
+        </p:txBody>
+      </p:sp>
+      <p:sp>
+        <p:nvSpPr>
+          <p:cNvPr id="20" name="Rounded Rectangle 19"/>
+          <p:cNvSpPr/>
+          <p:nvPr/>
+        </p:nvSpPr>
+        <p:spPr>
+          <a:xfrm>
+            <a:off x="4544568" y="2395728"/>
+            <a:ext cx="457200" cy="457200"/>
+          </a:xfrm>
+          <a:prstGeom prst="roundRect">
+            <a:avLst>
+              <a:gd name="adj" fmla="val 8000"/>
+            </a:avLst>
+          </a:prstGeom>
+          <a:solidFill>
+            <a:srgbClr val="DFA538"/>
+          </a:solidFill>
+          <a:ln>
+            <a:noFill/>
+          </a:ln>
+        </p:spPr>
+        <p:style>
+          <a:lnRef idx="1">
+            <a:schemeClr val="accent1"/>
+          </a:lnRef>
+          <a:fillRef idx="3">
+            <a:schemeClr val="accent1"/>
+          </a:fillRef>
+          <a:effectRef idx="2">
+            <a:schemeClr val="accent1"/>
+          </a:effectRef>
+          <a:fontRef idx="minor">
+            <a:schemeClr val="lt1"/>
+          </a:fontRef>
+        </p:style>
+        <p:txBody>
+          <a:bodyPr rtlCol="0" anchor="ctr"/>
+          <a:lstStyle/>
+          <a:p>
+            <a:pPr algn="ctr"/>
+          </a:p>
+        </p:txBody>
+      </p:sp>
+      <p:sp>
+        <p:nvSpPr>
+          <p:cNvPr id="21" name="TextBox 20"/>
+          <p:cNvSpPr txBox="1"/>
+          <p:nvPr/>
+        </p:nvSpPr>
+        <p:spPr>
+          <a:xfrm>
+            <a:off x="4544568" y="2459736"/>
+            <a:ext cx="457200" cy="201168"/>
+          </a:xfrm>
+          <a:prstGeom prst="rect">
+            <a:avLst/>
+          </a:prstGeom>
+          <a:noFill/>
+        </p:spPr>
+        <p:txBody>
+          <a:bodyPr wrap="square" lIns="18288" rIns="18288" tIns="18288" bIns="18288" anchor="t">
+            <a:spAutoFit/>
+          </a:bodyPr>
+          <a:lstStyle/>
+          <a:p>
+            <a:pPr algn="ctr">
+              <a:defRPr sz="1600" b="1">
+                <a:solidFill>
+                  <a:srgbClr val="FFFFFF"/>
+                </a:solidFill>
+                <a:latin typeface="Avenir Next"/>
+              </a:defRPr>
+            </a:pPr>
+            <a:r>
+              <a:t>2</a:t>
+            </a:r>
+          </a:p>
+        </p:txBody>
+      </p:sp>
+      <p:sp>
+        <p:nvSpPr>
+          <p:cNvPr id="22" name="TextBox 21"/>
+          <p:cNvSpPr txBox="1"/>
+          <p:nvPr/>
+        </p:nvSpPr>
+        <p:spPr>
+          <a:xfrm>
+            <a:off x="5138928" y="2395728"/>
+            <a:ext cx="2487168" cy="512064"/>
+          </a:xfrm>
+          <a:prstGeom prst="rect">
+            <a:avLst/>
+          </a:prstGeom>
+          <a:noFill/>
+        </p:spPr>
+        <p:txBody>
+          <a:bodyPr wrap="square" lIns="18288" rIns="18288" tIns="18288" bIns="18288" anchor="t">
+            <a:spAutoFit/>
+          </a:bodyPr>
+          <a:lstStyle/>
+          <a:p>
+            <a:pPr algn="l">
+              <a:defRPr sz="2100" b="1">
+                <a:solidFill>
+                  <a:srgbClr val="21232B"/>
+                </a:solidFill>
+                <a:latin typeface="Avenir Next"/>
+              </a:defRPr>
+            </a:pPr>
+            <a:r>
+              <a:t>Photos &amp; credits</a:t>
+            </a:r>
+          </a:p>
+        </p:txBody>
+      </p:sp>
+      <p:sp>
+        <p:nvSpPr>
+          <p:cNvPr id="23" name="TextBox 22"/>
+          <p:cNvSpPr txBox="1"/>
+          <p:nvPr/>
+        </p:nvSpPr>
+        <p:spPr>
+          <a:xfrm>
+            <a:off x="4572000" y="3081528"/>
+            <a:ext cx="3035808" cy="2148839"/>
+          </a:xfrm>
+          <a:prstGeom prst="rect">
+            <a:avLst/>
+          </a:prstGeom>
+          <a:noFill/>
+        </p:spPr>
+        <p:txBody>
+          <a:bodyPr wrap="square" lIns="18288" rIns="18288" tIns="18288" bIns="18288" anchor="t">
+            <a:spAutoFit/>
+          </a:bodyPr>
+          <a:lstStyle/>
+          <a:p>
+            <a:pPr algn="l">
+              <a:defRPr sz="1700" b="0">
+                <a:solidFill>
+                  <a:srgbClr val="21232B"/>
+                </a:solidFill>
+                <a:latin typeface="Avenir Next"/>
+              </a:defRPr>
+            </a:pPr>
+            <a:r>
+              <a:t>The menu shows coins and photo credits. The attachment sheet also shows the remaining photo allowance.</a:t>
+            </a:r>
+          </a:p>
+        </p:txBody>
+      </p:sp>
+      <p:sp>
+        <p:nvSpPr>
+          <p:cNvPr id="24" name="Rounded Rectangle 23"/>
+          <p:cNvSpPr/>
+          <p:nvPr/>
+        </p:nvSpPr>
+        <p:spPr>
+          <a:xfrm>
+            <a:off x="8101583" y="2148840"/>
+            <a:ext cx="3547872" cy="3264408"/>
+          </a:xfrm>
+          <a:prstGeom prst="roundRect">
+            <a:avLst>
+              <a:gd name="adj" fmla="val 8000"/>
+            </a:avLst>
+          </a:prstGeom>
+          <a:solidFill>
+            <a:srgbClr val="FFFFFF"/>
+          </a:solidFill>
+          <a:ln>
+            <a:solidFill>
+              <a:srgbClr val="DCD7CD"/>
+            </a:solidFill>
+          </a:ln>
+        </p:spPr>
+        <p:style>
+          <a:lnRef idx="1">
+            <a:schemeClr val="accent1"/>
+          </a:lnRef>
+          <a:fillRef idx="3">
+            <a:schemeClr val="accent1"/>
+          </a:fillRef>
+          <a:effectRef idx="2">
+            <a:schemeClr val="accent1"/>
+          </a:effectRef>
+          <a:fontRef idx="minor">
+            <a:schemeClr val="lt1"/>
+          </a:fontRef>
+        </p:style>
+        <p:txBody>
+          <a:bodyPr rtlCol="0" anchor="ctr"/>
+          <a:lstStyle/>
+          <a:p>
+            <a:pPr algn="ctr"/>
+          </a:p>
+        </p:txBody>
+      </p:sp>
+      <p:sp>
+        <p:nvSpPr>
+          <p:cNvPr id="25" name="Rectangle 24"/>
+          <p:cNvSpPr/>
+          <p:nvPr/>
+        </p:nvSpPr>
+        <p:spPr>
+          <a:xfrm>
+            <a:off x="8101583" y="2148840"/>
+            <a:ext cx="3547872" cy="68580"/>
+          </a:xfrm>
+          <a:prstGeom prst="rect">
+            <a:avLst/>
+          </a:prstGeom>
+          <a:solidFill>
+            <a:srgbClr val="8E64B9"/>
+          </a:solidFill>
+          <a:ln>
+            <a:noFill/>
+          </a:ln>
+        </p:spPr>
+        <p:style>
+          <a:lnRef idx="1">
+            <a:schemeClr val="accent1"/>
+          </a:lnRef>
+          <a:fillRef idx="3">
+            <a:schemeClr val="accent1"/>
+          </a:fillRef>
+          <a:effectRef idx="2">
+            <a:schemeClr val="accent1"/>
+          </a:effectRef>
+          <a:fontRef idx="minor">
+            <a:schemeClr val="lt1"/>
+          </a:fontRef>
+        </p:style>
+        <p:txBody>
+          <a:bodyPr rtlCol="0" anchor="ctr"/>
+          <a:lstStyle/>
+          <a:p>
+            <a:pPr algn="ctr"/>
+          </a:p>
+        </p:txBody>
+      </p:sp>
+      <p:sp>
+        <p:nvSpPr>
+          <p:cNvPr id="26" name="Rounded Rectangle 25"/>
+          <p:cNvSpPr/>
+          <p:nvPr/>
+        </p:nvSpPr>
+        <p:spPr>
+          <a:xfrm>
+            <a:off x="8330183" y="2395728"/>
+            <a:ext cx="457200" cy="457200"/>
+          </a:xfrm>
+          <a:prstGeom prst="roundRect">
+            <a:avLst>
+              <a:gd name="adj" fmla="val 8000"/>
+            </a:avLst>
+          </a:prstGeom>
+          <a:solidFill>
+            <a:srgbClr val="8E64B9"/>
+          </a:solidFill>
+          <a:ln>
+            <a:noFill/>
+          </a:ln>
+        </p:spPr>
+        <p:style>
+          <a:lnRef idx="1">
+            <a:schemeClr val="accent1"/>
+          </a:lnRef>
+          <a:fillRef idx="3">
+            <a:schemeClr val="accent1"/>
+          </a:fillRef>
+          <a:effectRef idx="2">
+            <a:schemeClr val="accent1"/>
+          </a:effectRef>
+          <a:fontRef idx="minor">
+            <a:schemeClr val="lt1"/>
+          </a:fontRef>
+        </p:style>
+        <p:txBody>
+          <a:bodyPr rtlCol="0" anchor="ctr"/>
+          <a:lstStyle/>
+          <a:p>
+            <a:pPr algn="ctr"/>
+          </a:p>
+        </p:txBody>
+      </p:sp>
+      <p:sp>
+        <p:nvSpPr>
+          <p:cNvPr id="27" name="TextBox 26"/>
+          <p:cNvSpPr txBox="1"/>
+          <p:nvPr/>
+        </p:nvSpPr>
+        <p:spPr>
+          <a:xfrm>
+            <a:off x="8330183" y="2459736"/>
+            <a:ext cx="457200" cy="201168"/>
+          </a:xfrm>
+          <a:prstGeom prst="rect">
+            <a:avLst/>
+          </a:prstGeom>
+          <a:noFill/>
+        </p:spPr>
+        <p:txBody>
+          <a:bodyPr wrap="square" lIns="18288" rIns="18288" tIns="18288" bIns="18288" anchor="t">
+            <a:spAutoFit/>
+          </a:bodyPr>
+          <a:lstStyle/>
+          <a:p>
+            <a:pPr algn="ctr">
+              <a:defRPr sz="1600" b="1">
+                <a:solidFill>
+                  <a:srgbClr val="FFFFFF"/>
+                </a:solidFill>
+                <a:latin typeface="Avenir Next"/>
+              </a:defRPr>
+            </a:pPr>
+            <a:r>
+              <a:t>3</a:t>
+            </a:r>
+          </a:p>
+        </p:txBody>
+      </p:sp>
+      <p:sp>
+        <p:nvSpPr>
+          <p:cNvPr id="28" name="TextBox 27"/>
+          <p:cNvSpPr txBox="1"/>
+          <p:nvPr/>
+        </p:nvSpPr>
+        <p:spPr>
+          <a:xfrm>
+            <a:off x="8924544" y="2395728"/>
+            <a:ext cx="2487168" cy="512064"/>
+          </a:xfrm>
+          <a:prstGeom prst="rect">
+            <a:avLst/>
+          </a:prstGeom>
+          <a:noFill/>
+        </p:spPr>
+        <p:txBody>
+          <a:bodyPr wrap="square" lIns="18288" rIns="18288" tIns="18288" bIns="18288" anchor="t">
+            <a:spAutoFit/>
+          </a:bodyPr>
+          <a:lstStyle/>
+          <a:p>
+            <a:pPr algn="l">
+              <a:defRPr sz="2100" b="1">
+                <a:solidFill>
+                  <a:srgbClr val="21232B"/>
+                </a:solidFill>
+                <a:latin typeface="Avenir Next"/>
+              </a:defRPr>
+            </a:pPr>
+            <a:r>
+              <a:t>Settings</a:t>
+            </a:r>
+          </a:p>
+        </p:txBody>
+      </p:sp>
+      <p:sp>
+        <p:nvSpPr>
+          <p:cNvPr id="29" name="TextBox 28"/>
+          <p:cNvSpPr txBox="1"/>
+          <p:nvPr/>
+        </p:nvSpPr>
+        <p:spPr>
+          <a:xfrm>
+            <a:off x="8357615" y="3081528"/>
+            <a:ext cx="3035808" cy="2148839"/>
+          </a:xfrm>
+          <a:prstGeom prst="rect">
+            <a:avLst/>
+          </a:prstGeom>
+          <a:noFill/>
+        </p:spPr>
+        <p:txBody>
+          <a:bodyPr wrap="square" lIns="18288" rIns="18288" tIns="18288" bIns="18288" anchor="t">
+            <a:spAutoFit/>
+          </a:bodyPr>
+          <a:lstStyle/>
+          <a:p>
+            <a:pPr algn="l">
+              <a:defRPr sz="1700" b="0">
+                <a:solidFill>
+                  <a:srgbClr val="21232B"/>
+                </a:solidFill>
+                <a:latin typeface="Avenir Next"/>
+              </a:defRPr>
+            </a:pPr>
+            <a:r>
+              <a:t>Review personal details, notification preferences and Penny’s saved rules. Use Log out when finished.</a:t>
+            </a:r>
+          </a:p>
+        </p:txBody>
+      </p:sp>
+      <p:sp>
+        <p:nvSpPr>
+          <p:cNvPr id="30" name="Rounded Rectangle 29"/>
+          <p:cNvSpPr/>
+          <p:nvPr/>
+        </p:nvSpPr>
+        <p:spPr>
+          <a:xfrm>
+            <a:off x="521207" y="5833872"/>
+            <a:ext cx="11128248" cy="438912"/>
+          </a:xfrm>
+          <a:prstGeom prst="roundRect">
+            <a:avLst>
+              <a:gd name="adj" fmla="val 8000"/>
+            </a:avLst>
+          </a:prstGeom>
+          <a:solidFill>
+            <a:srgbClr val="EEEADF"/>
+          </a:solidFill>
+          <a:ln>
+            <a:noFill/>
+          </a:ln>
+        </p:spPr>
+        <p:style>
+          <a:lnRef idx="1">
+            <a:schemeClr val="accent1"/>
+          </a:lnRef>
+          <a:fillRef idx="3">
+            <a:schemeClr val="accent1"/>
+          </a:fillRef>
+          <a:effectRef idx="2">
+            <a:schemeClr val="accent1"/>
+          </a:effectRef>
+          <a:fontRef idx="minor">
+            <a:schemeClr val="lt1"/>
+          </a:fontRef>
+        </p:style>
+        <p:txBody>
+          <a:bodyPr rtlCol="0" anchor="ctr"/>
+          <a:lstStyle/>
+          <a:p>
+            <a:pPr algn="ctr"/>
+          </a:p>
+        </p:txBody>
+      </p:sp>
+      <p:sp>
+        <p:nvSpPr>
+          <p:cNvPr id="31" name="Rectangle 30"/>
+          <p:cNvSpPr/>
+          <p:nvPr/>
+        </p:nvSpPr>
+        <p:spPr>
+          <a:xfrm>
+            <a:off x="521207" y="5833872"/>
+            <a:ext cx="73152" cy="438912"/>
+          </a:xfrm>
+          <a:prstGeom prst="rect">
+            <a:avLst/>
+          </a:prstGeom>
+          <a:solidFill>
+            <a:srgbClr val="21A391"/>
+          </a:solidFill>
+          <a:ln>
+            <a:noFill/>
+          </a:ln>
+        </p:spPr>
+        <p:style>
+          <a:lnRef idx="1">
+            <a:schemeClr val="accent1"/>
+          </a:lnRef>
+          <a:fillRef idx="3">
+            <a:schemeClr val="accent1"/>
+          </a:fillRef>
+          <a:effectRef idx="2">
+            <a:schemeClr val="accent1"/>
+          </a:effectRef>
+          <a:fontRef idx="minor">
+            <a:schemeClr val="lt1"/>
+          </a:fontRef>
+        </p:style>
+        <p:txBody>
+          <a:bodyPr rtlCol="0" anchor="ctr"/>
+          <a:lstStyle/>
+          <a:p>
+            <a:pPr algn="ctr"/>
+          </a:p>
+        </p:txBody>
+      </p:sp>
+      <p:sp>
+        <p:nvSpPr>
+          <p:cNvPr id="32" name="TextBox 31"/>
+          <p:cNvSpPr txBox="1"/>
+          <p:nvPr/>
+        </p:nvSpPr>
+        <p:spPr>
+          <a:xfrm>
+            <a:off x="713232" y="5925312"/>
+            <a:ext cx="10698480" cy="265176"/>
+          </a:xfrm>
+          <a:prstGeom prst="rect">
+            <a:avLst/>
+          </a:prstGeom>
+          <a:noFill/>
+        </p:spPr>
+        <p:txBody>
+          <a:bodyPr wrap="square" lIns="18288" rIns="18288" tIns="18288" bIns="18288" anchor="t">
+            <a:spAutoFit/>
+          </a:bodyPr>
+          <a:lstStyle/>
+          <a:p>
+            <a:pPr algn="l">
+              <a:defRPr sz="1400" b="0">
+                <a:solidFill>
+                  <a:srgbClr val="21232B"/>
+                </a:solidFill>
+                <a:latin typeface="Avenir Next"/>
+              </a:defRPr>
+            </a:pPr>
+            <a:r>
+              <a:t>The supplied demo video shows the full story; this manual is a reference while trying the app.</a:t>
             </a:r>
           </a:p>
         </p:txBody>
@@ -11164,6 +14925,2510 @@
             </a:pPr>
             <a:r>
               <a:t>For implementation details, see docs/architecture.md and docs/api-contract.md in the public repo.</a:t>
+            </a:r>
+          </a:p>
+        </p:txBody>
+      </p:sp>
+    </p:spTree>
+  </p:cSld>
+  <p:clrMapOvr>
+    <a:masterClrMapping/>
+  </p:clrMapOvr>
+</p:sld>
+</file>
+
+<file path=ppt/slides/slide8.xml><?xml version="1.0" encoding="utf-8"?>
+<p:sld xmlns:a="http://schemas.openxmlformats.org/drawingml/2006/main" xmlns:p="http://schemas.openxmlformats.org/presentationml/2006/main" xmlns:r="http://schemas.openxmlformats.org/officeDocument/2006/relationships">
+  <p:cSld>
+    <p:spTree>
+      <p:nvGrpSpPr>
+        <p:cNvPr id="1" name=""/>
+        <p:cNvGrpSpPr/>
+        <p:nvPr/>
+      </p:nvGrpSpPr>
+      <p:grpSpPr/>
+      <p:sp>
+        <p:nvSpPr>
+          <p:cNvPr id="2" name="Rectangle 1"/>
+          <p:cNvSpPr/>
+          <p:nvPr/>
+        </p:nvSpPr>
+        <p:spPr>
+          <a:xfrm>
+            <a:off x="0" y="0"/>
+            <a:ext cx="12191695" cy="6858000"/>
+          </a:xfrm>
+          <a:prstGeom prst="rect">
+            <a:avLst/>
+          </a:prstGeom>
+          <a:solidFill>
+            <a:srgbClr val="F8F5EC"/>
+          </a:solidFill>
+          <a:ln>
+            <a:noFill/>
+          </a:ln>
+        </p:spPr>
+        <p:style>
+          <a:lnRef idx="1">
+            <a:schemeClr val="accent1"/>
+          </a:lnRef>
+          <a:fillRef idx="3">
+            <a:schemeClr val="accent1"/>
+          </a:fillRef>
+          <a:effectRef idx="2">
+            <a:schemeClr val="accent1"/>
+          </a:effectRef>
+          <a:fontRef idx="minor">
+            <a:schemeClr val="lt1"/>
+          </a:fontRef>
+        </p:style>
+        <p:txBody>
+          <a:bodyPr rtlCol="0" anchor="ctr"/>
+          <a:lstStyle/>
+          <a:p>
+            <a:pPr algn="ctr"/>
+          </a:p>
+        </p:txBody>
+      </p:sp>
+      <p:sp>
+        <p:nvSpPr>
+          <p:cNvPr id="3" name="Rectangle 2"/>
+          <p:cNvSpPr/>
+          <p:nvPr/>
+        </p:nvSpPr>
+        <p:spPr>
+          <a:xfrm>
+            <a:off x="0" y="0"/>
+            <a:ext cx="12191695" cy="585216"/>
+          </a:xfrm>
+          <a:prstGeom prst="rect">
+            <a:avLst/>
+          </a:prstGeom>
+          <a:solidFill>
+            <a:srgbClr val="08090C"/>
+          </a:solidFill>
+          <a:ln>
+            <a:noFill/>
+          </a:ln>
+        </p:spPr>
+        <p:style>
+          <a:lnRef idx="1">
+            <a:schemeClr val="accent1"/>
+          </a:lnRef>
+          <a:fillRef idx="3">
+            <a:schemeClr val="accent1"/>
+          </a:fillRef>
+          <a:effectRef idx="2">
+            <a:schemeClr val="accent1"/>
+          </a:effectRef>
+          <a:fontRef idx="minor">
+            <a:schemeClr val="lt1"/>
+          </a:fontRef>
+        </p:style>
+        <p:txBody>
+          <a:bodyPr rtlCol="0" anchor="ctr"/>
+          <a:lstStyle/>
+          <a:p>
+            <a:pPr algn="ctr"/>
+          </a:p>
+        </p:txBody>
+      </p:sp>
+      <p:sp>
+        <p:nvSpPr>
+          <p:cNvPr id="4" name="TextBox 3"/>
+          <p:cNvSpPr txBox="1"/>
+          <p:nvPr/>
+        </p:nvSpPr>
+        <p:spPr>
+          <a:xfrm>
+            <a:off x="512064" y="128016"/>
+            <a:ext cx="2011680" cy="283464"/>
+          </a:xfrm>
+          <a:prstGeom prst="rect">
+            <a:avLst/>
+          </a:prstGeom>
+          <a:noFill/>
+        </p:spPr>
+        <p:txBody>
+          <a:bodyPr wrap="square" lIns="18288" rIns="18288" tIns="18288" bIns="18288" anchor="t">
+            <a:spAutoFit/>
+          </a:bodyPr>
+          <a:lstStyle/>
+          <a:p>
+            <a:pPr algn="l">
+              <a:defRPr sz="1700" b="1">
+                <a:solidFill>
+                  <a:srgbClr val="FFFFFF"/>
+                </a:solidFill>
+                <a:latin typeface="Avenir Next"/>
+              </a:defRPr>
+            </a:pPr>
+            <a:r>
+              <a:t>PETAK</a:t>
+            </a:r>
+          </a:p>
+        </p:txBody>
+      </p:sp>
+      <p:sp>
+        <p:nvSpPr>
+          <p:cNvPr id="5" name="TextBox 4"/>
+          <p:cNvSpPr txBox="1"/>
+          <p:nvPr/>
+        </p:nvSpPr>
+        <p:spPr>
+          <a:xfrm>
+            <a:off x="3794760" y="155448"/>
+            <a:ext cx="4617720" cy="237744"/>
+          </a:xfrm>
+          <a:prstGeom prst="rect">
+            <a:avLst/>
+          </a:prstGeom>
+          <a:noFill/>
+        </p:spPr>
+        <p:txBody>
+          <a:bodyPr wrap="square" lIns="18288" rIns="18288" tIns="18288" bIns="18288" anchor="t">
+            <a:spAutoFit/>
+          </a:bodyPr>
+          <a:lstStyle/>
+          <a:p>
+            <a:pPr algn="ctr">
+              <a:defRPr sz="1300" b="1">
+                <a:solidFill>
+                  <a:srgbClr val="FFFFFF"/>
+                </a:solidFill>
+                <a:latin typeface="Avenir Next"/>
+              </a:defRPr>
+            </a:pPr>
+            <a:r>
+              <a:t>FEATURE REFERENCE</a:t>
+            </a:r>
+          </a:p>
+        </p:txBody>
+      </p:sp>
+      <p:sp>
+        <p:nvSpPr>
+          <p:cNvPr id="6" name="TextBox 5"/>
+          <p:cNvSpPr txBox="1"/>
+          <p:nvPr/>
+        </p:nvSpPr>
+        <p:spPr>
+          <a:xfrm>
+            <a:off x="9418320" y="164592"/>
+            <a:ext cx="2221992" cy="228600"/>
+          </a:xfrm>
+          <a:prstGeom prst="rect">
+            <a:avLst/>
+          </a:prstGeom>
+          <a:noFill/>
+        </p:spPr>
+        <p:txBody>
+          <a:bodyPr wrap="square" lIns="18288" rIns="18288" tIns="18288" bIns="18288" anchor="t">
+            <a:spAutoFit/>
+          </a:bodyPr>
+          <a:lstStyle/>
+          <a:p>
+            <a:pPr algn="r">
+              <a:defRPr sz="1100" b="1">
+                <a:solidFill>
+                  <a:srgbClr val="FFFFFF"/>
+                </a:solidFill>
+                <a:latin typeface="Avenir Next"/>
+              </a:defRPr>
+            </a:pPr>
+            <a:r>
+              <a:t>AI BUILDER CUP 2026</a:t>
+            </a:r>
+          </a:p>
+        </p:txBody>
+      </p:sp>
+      <p:sp>
+        <p:nvSpPr>
+          <p:cNvPr id="7" name="TextBox 6"/>
+          <p:cNvSpPr txBox="1"/>
+          <p:nvPr/>
+        </p:nvSpPr>
+        <p:spPr>
+          <a:xfrm>
+            <a:off x="512064" y="859536"/>
+            <a:ext cx="11064240" cy="594360"/>
+          </a:xfrm>
+          <a:prstGeom prst="rect">
+            <a:avLst/>
+          </a:prstGeom>
+          <a:noFill/>
+        </p:spPr>
+        <p:txBody>
+          <a:bodyPr wrap="square" lIns="18288" rIns="18288" tIns="18288" bIns="18288" anchor="t">
+            <a:spAutoFit/>
+          </a:bodyPr>
+          <a:lstStyle/>
+          <a:p>
+            <a:pPr algn="l">
+              <a:defRPr sz="3100" b="1">
+                <a:solidFill>
+                  <a:srgbClr val="21232B"/>
+                </a:solidFill>
+                <a:latin typeface="Avenir Next"/>
+              </a:defRPr>
+            </a:pPr>
+            <a:r>
+              <a:t>Ollie's board: manage tasks</a:t>
+            </a:r>
+          </a:p>
+        </p:txBody>
+      </p:sp>
+      <p:sp>
+        <p:nvSpPr>
+          <p:cNvPr id="8" name="TextBox 7"/>
+          <p:cNvSpPr txBox="1"/>
+          <p:nvPr/>
+        </p:nvSpPr>
+        <p:spPr>
+          <a:xfrm>
+            <a:off x="530352" y="1517904"/>
+            <a:ext cx="10881360" cy="512064"/>
+          </a:xfrm>
+          <a:prstGeom prst="rect">
+            <a:avLst/>
+          </a:prstGeom>
+          <a:noFill/>
+        </p:spPr>
+        <p:txBody>
+          <a:bodyPr wrap="square" lIns="18288" rIns="18288" tIns="18288" bIns="18288" anchor="t">
+            <a:spAutoFit/>
+          </a:bodyPr>
+          <a:lstStyle/>
+          <a:p>
+            <a:pPr algn="l">
+              <a:defRPr sz="1600" b="0">
+                <a:solidFill>
+                  <a:srgbClr val="5B5E67"/>
+                </a:solidFill>
+                <a:latin typeface="Avenir Next"/>
+              </a:defRPr>
+            </a:pPr>
+            <a:r>
+              <a:t>The board gathers work from the active neighbours in one place.</a:t>
+            </a:r>
+          </a:p>
+        </p:txBody>
+      </p:sp>
+      <p:sp>
+        <p:nvSpPr>
+          <p:cNvPr id="9" name="Rectangle 8"/>
+          <p:cNvSpPr/>
+          <p:nvPr/>
+        </p:nvSpPr>
+        <p:spPr>
+          <a:xfrm>
+            <a:off x="502920" y="6519672"/>
+            <a:ext cx="11155680" cy="13716"/>
+          </a:xfrm>
+          <a:prstGeom prst="rect">
+            <a:avLst/>
+          </a:prstGeom>
+          <a:solidFill>
+            <a:srgbClr val="DCD7CD"/>
+          </a:solidFill>
+          <a:ln>
+            <a:noFill/>
+          </a:ln>
+        </p:spPr>
+        <p:style>
+          <a:lnRef idx="1">
+            <a:schemeClr val="accent1"/>
+          </a:lnRef>
+          <a:fillRef idx="3">
+            <a:schemeClr val="accent1"/>
+          </a:fillRef>
+          <a:effectRef idx="2">
+            <a:schemeClr val="accent1"/>
+          </a:effectRef>
+          <a:fontRef idx="minor">
+            <a:schemeClr val="lt1"/>
+          </a:fontRef>
+        </p:style>
+        <p:txBody>
+          <a:bodyPr rtlCol="0" anchor="ctr"/>
+          <a:lstStyle/>
+          <a:p>
+            <a:pPr algn="ctr"/>
+          </a:p>
+        </p:txBody>
+      </p:sp>
+      <p:sp>
+        <p:nvSpPr>
+          <p:cNvPr id="10" name="TextBox 9"/>
+          <p:cNvSpPr txBox="1"/>
+          <p:nvPr/>
+        </p:nvSpPr>
+        <p:spPr>
+          <a:xfrm>
+            <a:off x="530352" y="6574536"/>
+            <a:ext cx="8412480" cy="182880"/>
+          </a:xfrm>
+          <a:prstGeom prst="rect">
+            <a:avLst/>
+          </a:prstGeom>
+          <a:noFill/>
+        </p:spPr>
+        <p:txBody>
+          <a:bodyPr wrap="square" lIns="18288" rIns="18288" tIns="18288" bIns="18288" anchor="t">
+            <a:spAutoFit/>
+          </a:bodyPr>
+          <a:lstStyle/>
+          <a:p>
+            <a:pPr algn="l">
+              <a:defRPr sz="1000" b="0">
+                <a:solidFill>
+                  <a:srgbClr val="5B5E67"/>
+                </a:solidFill>
+                <a:latin typeface="Avenir Next"/>
+              </a:defRPr>
+            </a:pPr>
+            <a:r>
+              <a:t>Petak QA · use the reviewer access supplied separately</a:t>
+            </a:r>
+          </a:p>
+        </p:txBody>
+      </p:sp>
+      <p:sp>
+        <p:nvSpPr>
+          <p:cNvPr id="11" name="TextBox 10"/>
+          <p:cNvSpPr txBox="1"/>
+          <p:nvPr/>
+        </p:nvSpPr>
+        <p:spPr>
+          <a:xfrm>
+            <a:off x="11128248" y="6556248"/>
+            <a:ext cx="502920" cy="219456"/>
+          </a:xfrm>
+          <a:prstGeom prst="rect">
+            <a:avLst/>
+          </a:prstGeom>
+          <a:noFill/>
+        </p:spPr>
+        <p:txBody>
+          <a:bodyPr wrap="square" lIns="18288" rIns="18288" tIns="18288" bIns="18288" anchor="t">
+            <a:spAutoFit/>
+          </a:bodyPr>
+          <a:lstStyle/>
+          <a:p>
+            <a:pPr algn="r">
+              <a:defRPr sz="1100" b="1">
+                <a:solidFill>
+                  <a:srgbClr val="5B5E67"/>
+                </a:solidFill>
+                <a:latin typeface="Avenir Next"/>
+              </a:defRPr>
+            </a:pPr>
+            <a:r>
+              <a:t>8</a:t>
+            </a:r>
+          </a:p>
+        </p:txBody>
+      </p:sp>
+      <p:sp>
+        <p:nvSpPr>
+          <p:cNvPr id="12" name="Rounded Rectangle 11"/>
+          <p:cNvSpPr/>
+          <p:nvPr/>
+        </p:nvSpPr>
+        <p:spPr>
+          <a:xfrm>
+            <a:off x="530352" y="2148840"/>
+            <a:ext cx="3547872" cy="3264408"/>
+          </a:xfrm>
+          <a:prstGeom prst="roundRect">
+            <a:avLst>
+              <a:gd name="adj" fmla="val 8000"/>
+            </a:avLst>
+          </a:prstGeom>
+          <a:solidFill>
+            <a:srgbClr val="FFFFFF"/>
+          </a:solidFill>
+          <a:ln>
+            <a:solidFill>
+              <a:srgbClr val="DCD7CD"/>
+            </a:solidFill>
+          </a:ln>
+        </p:spPr>
+        <p:style>
+          <a:lnRef idx="1">
+            <a:schemeClr val="accent1"/>
+          </a:lnRef>
+          <a:fillRef idx="3">
+            <a:schemeClr val="accent1"/>
+          </a:fillRef>
+          <a:effectRef idx="2">
+            <a:schemeClr val="accent1"/>
+          </a:effectRef>
+          <a:fontRef idx="minor">
+            <a:schemeClr val="lt1"/>
+          </a:fontRef>
+        </p:style>
+        <p:txBody>
+          <a:bodyPr rtlCol="0" anchor="ctr"/>
+          <a:lstStyle/>
+          <a:p>
+            <a:pPr algn="ctr"/>
+          </a:p>
+        </p:txBody>
+      </p:sp>
+      <p:sp>
+        <p:nvSpPr>
+          <p:cNvPr id="13" name="Rectangle 12"/>
+          <p:cNvSpPr/>
+          <p:nvPr/>
+        </p:nvSpPr>
+        <p:spPr>
+          <a:xfrm>
+            <a:off x="530352" y="2148840"/>
+            <a:ext cx="3547872" cy="68580"/>
+          </a:xfrm>
+          <a:prstGeom prst="rect">
+            <a:avLst/>
+          </a:prstGeom>
+          <a:solidFill>
+            <a:srgbClr val="21A391"/>
+          </a:solidFill>
+          <a:ln>
+            <a:noFill/>
+          </a:ln>
+        </p:spPr>
+        <p:style>
+          <a:lnRef idx="1">
+            <a:schemeClr val="accent1"/>
+          </a:lnRef>
+          <a:fillRef idx="3">
+            <a:schemeClr val="accent1"/>
+          </a:fillRef>
+          <a:effectRef idx="2">
+            <a:schemeClr val="accent1"/>
+          </a:effectRef>
+          <a:fontRef idx="minor">
+            <a:schemeClr val="lt1"/>
+          </a:fontRef>
+        </p:style>
+        <p:txBody>
+          <a:bodyPr rtlCol="0" anchor="ctr"/>
+          <a:lstStyle/>
+          <a:p>
+            <a:pPr algn="ctr"/>
+          </a:p>
+        </p:txBody>
+      </p:sp>
+      <p:sp>
+        <p:nvSpPr>
+          <p:cNvPr id="14" name="Rounded Rectangle 13"/>
+          <p:cNvSpPr/>
+          <p:nvPr/>
+        </p:nvSpPr>
+        <p:spPr>
+          <a:xfrm>
+            <a:off x="758952" y="2395728"/>
+            <a:ext cx="457200" cy="457200"/>
+          </a:xfrm>
+          <a:prstGeom prst="roundRect">
+            <a:avLst>
+              <a:gd name="adj" fmla="val 8000"/>
+            </a:avLst>
+          </a:prstGeom>
+          <a:solidFill>
+            <a:srgbClr val="21A391"/>
+          </a:solidFill>
+          <a:ln>
+            <a:noFill/>
+          </a:ln>
+        </p:spPr>
+        <p:style>
+          <a:lnRef idx="1">
+            <a:schemeClr val="accent1"/>
+          </a:lnRef>
+          <a:fillRef idx="3">
+            <a:schemeClr val="accent1"/>
+          </a:fillRef>
+          <a:effectRef idx="2">
+            <a:schemeClr val="accent1"/>
+          </a:effectRef>
+          <a:fontRef idx="minor">
+            <a:schemeClr val="lt1"/>
+          </a:fontRef>
+        </p:style>
+        <p:txBody>
+          <a:bodyPr rtlCol="0" anchor="ctr"/>
+          <a:lstStyle/>
+          <a:p>
+            <a:pPr algn="ctr"/>
+          </a:p>
+        </p:txBody>
+      </p:sp>
+      <p:sp>
+        <p:nvSpPr>
+          <p:cNvPr id="15" name="TextBox 14"/>
+          <p:cNvSpPr txBox="1"/>
+          <p:nvPr/>
+        </p:nvSpPr>
+        <p:spPr>
+          <a:xfrm>
+            <a:off x="758952" y="2459736"/>
+            <a:ext cx="457200" cy="201168"/>
+          </a:xfrm>
+          <a:prstGeom prst="rect">
+            <a:avLst/>
+          </a:prstGeom>
+          <a:noFill/>
+        </p:spPr>
+        <p:txBody>
+          <a:bodyPr wrap="square" lIns="18288" rIns="18288" tIns="18288" bIns="18288" anchor="t">
+            <a:spAutoFit/>
+          </a:bodyPr>
+          <a:lstStyle/>
+          <a:p>
+            <a:pPr algn="ctr">
+              <a:defRPr sz="1600" b="1">
+                <a:solidFill>
+                  <a:srgbClr val="FFFFFF"/>
+                </a:solidFill>
+                <a:latin typeface="Avenir Next"/>
+              </a:defRPr>
+            </a:pPr>
+            <a:r>
+              <a:t>1</a:t>
+            </a:r>
+          </a:p>
+        </p:txBody>
+      </p:sp>
+      <p:sp>
+        <p:nvSpPr>
+          <p:cNvPr id="16" name="TextBox 15"/>
+          <p:cNvSpPr txBox="1"/>
+          <p:nvPr/>
+        </p:nvSpPr>
+        <p:spPr>
+          <a:xfrm>
+            <a:off x="1353312" y="2395728"/>
+            <a:ext cx="2487168" cy="512064"/>
+          </a:xfrm>
+          <a:prstGeom prst="rect">
+            <a:avLst/>
+          </a:prstGeom>
+          <a:noFill/>
+        </p:spPr>
+        <p:txBody>
+          <a:bodyPr wrap="square" lIns="18288" rIns="18288" tIns="18288" bIns="18288" anchor="t">
+            <a:spAutoFit/>
+          </a:bodyPr>
+          <a:lstStyle/>
+          <a:p>
+            <a:pPr algn="l">
+              <a:defRPr sz="2100" b="1">
+                <a:solidFill>
+                  <a:srgbClr val="21232B"/>
+                </a:solidFill>
+                <a:latin typeface="Avenir Next"/>
+              </a:defRPr>
+            </a:pPr>
+            <a:r>
+              <a:t>Open the board</a:t>
+            </a:r>
+          </a:p>
+        </p:txBody>
+      </p:sp>
+      <p:sp>
+        <p:nvSpPr>
+          <p:cNvPr id="17" name="TextBox 16"/>
+          <p:cNvSpPr txBox="1"/>
+          <p:nvPr/>
+        </p:nvSpPr>
+        <p:spPr>
+          <a:xfrm>
+            <a:off x="786384" y="3081528"/>
+            <a:ext cx="3035808" cy="2148839"/>
+          </a:xfrm>
+          <a:prstGeom prst="rect">
+            <a:avLst/>
+          </a:prstGeom>
+          <a:noFill/>
+        </p:spPr>
+        <p:txBody>
+          <a:bodyPr wrap="square" lIns="18288" rIns="18288" tIns="18288" bIns="18288" anchor="t">
+            <a:spAutoFit/>
+          </a:bodyPr>
+          <a:lstStyle/>
+          <a:p>
+            <a:pPr algn="l">
+              <a:defRPr sz="1700" b="0">
+                <a:solidFill>
+                  <a:srgbClr val="21232B"/>
+                </a:solidFill>
+                <a:latin typeface="Avenir Next"/>
+              </a:defRPr>
+            </a:pPr>
+            <a:r>
+              <a:t>Open the menu and tap Ollie. The board shows tasks from Penny, Milo and Mira.</a:t>
+            </a:r>
+          </a:p>
+        </p:txBody>
+      </p:sp>
+      <p:sp>
+        <p:nvSpPr>
+          <p:cNvPr id="18" name="Rounded Rectangle 17"/>
+          <p:cNvSpPr/>
+          <p:nvPr/>
+        </p:nvSpPr>
+        <p:spPr>
+          <a:xfrm>
+            <a:off x="4315968" y="2148840"/>
+            <a:ext cx="3547872" cy="3264408"/>
+          </a:xfrm>
+          <a:prstGeom prst="roundRect">
+            <a:avLst>
+              <a:gd name="adj" fmla="val 8000"/>
+            </a:avLst>
+          </a:prstGeom>
+          <a:solidFill>
+            <a:srgbClr val="FFFFFF"/>
+          </a:solidFill>
+          <a:ln>
+            <a:solidFill>
+              <a:srgbClr val="DCD7CD"/>
+            </a:solidFill>
+          </a:ln>
+        </p:spPr>
+        <p:style>
+          <a:lnRef idx="1">
+            <a:schemeClr val="accent1"/>
+          </a:lnRef>
+          <a:fillRef idx="3">
+            <a:schemeClr val="accent1"/>
+          </a:fillRef>
+          <a:effectRef idx="2">
+            <a:schemeClr val="accent1"/>
+          </a:effectRef>
+          <a:fontRef idx="minor">
+            <a:schemeClr val="lt1"/>
+          </a:fontRef>
+        </p:style>
+        <p:txBody>
+          <a:bodyPr rtlCol="0" anchor="ctr"/>
+          <a:lstStyle/>
+          <a:p>
+            <a:pPr algn="ctr"/>
+          </a:p>
+        </p:txBody>
+      </p:sp>
+      <p:sp>
+        <p:nvSpPr>
+          <p:cNvPr id="19" name="Rectangle 18"/>
+          <p:cNvSpPr/>
+          <p:nvPr/>
+        </p:nvSpPr>
+        <p:spPr>
+          <a:xfrm>
+            <a:off x="4315968" y="2148840"/>
+            <a:ext cx="3547872" cy="68580"/>
+          </a:xfrm>
+          <a:prstGeom prst="rect">
+            <a:avLst/>
+          </a:prstGeom>
+          <a:solidFill>
+            <a:srgbClr val="DFA538"/>
+          </a:solidFill>
+          <a:ln>
+            <a:noFill/>
+          </a:ln>
+        </p:spPr>
+        <p:style>
+          <a:lnRef idx="1">
+            <a:schemeClr val="accent1"/>
+          </a:lnRef>
+          <a:fillRef idx="3">
+            <a:schemeClr val="accent1"/>
+          </a:fillRef>
+          <a:effectRef idx="2">
+            <a:schemeClr val="accent1"/>
+          </a:effectRef>
+          <a:fontRef idx="minor">
+            <a:schemeClr val="lt1"/>
+          </a:fontRef>
+        </p:style>
+        <p:txBody>
+          <a:bodyPr rtlCol="0" anchor="ctr"/>
+          <a:lstStyle/>
+          <a:p>
+            <a:pPr algn="ctr"/>
+          </a:p>
+        </p:txBody>
+      </p:sp>
+      <p:sp>
+        <p:nvSpPr>
+          <p:cNvPr id="20" name="Rounded Rectangle 19"/>
+          <p:cNvSpPr/>
+          <p:nvPr/>
+        </p:nvSpPr>
+        <p:spPr>
+          <a:xfrm>
+            <a:off x="4544568" y="2395728"/>
+            <a:ext cx="457200" cy="457200"/>
+          </a:xfrm>
+          <a:prstGeom prst="roundRect">
+            <a:avLst>
+              <a:gd name="adj" fmla="val 8000"/>
+            </a:avLst>
+          </a:prstGeom>
+          <a:solidFill>
+            <a:srgbClr val="DFA538"/>
+          </a:solidFill>
+          <a:ln>
+            <a:noFill/>
+          </a:ln>
+        </p:spPr>
+        <p:style>
+          <a:lnRef idx="1">
+            <a:schemeClr val="accent1"/>
+          </a:lnRef>
+          <a:fillRef idx="3">
+            <a:schemeClr val="accent1"/>
+          </a:fillRef>
+          <a:effectRef idx="2">
+            <a:schemeClr val="accent1"/>
+          </a:effectRef>
+          <a:fontRef idx="minor">
+            <a:schemeClr val="lt1"/>
+          </a:fontRef>
+        </p:style>
+        <p:txBody>
+          <a:bodyPr rtlCol="0" anchor="ctr"/>
+          <a:lstStyle/>
+          <a:p>
+            <a:pPr algn="ctr"/>
+          </a:p>
+        </p:txBody>
+      </p:sp>
+      <p:sp>
+        <p:nvSpPr>
+          <p:cNvPr id="21" name="TextBox 20"/>
+          <p:cNvSpPr txBox="1"/>
+          <p:nvPr/>
+        </p:nvSpPr>
+        <p:spPr>
+          <a:xfrm>
+            <a:off x="4544568" y="2459736"/>
+            <a:ext cx="457200" cy="201168"/>
+          </a:xfrm>
+          <a:prstGeom prst="rect">
+            <a:avLst/>
+          </a:prstGeom>
+          <a:noFill/>
+        </p:spPr>
+        <p:txBody>
+          <a:bodyPr wrap="square" lIns="18288" rIns="18288" tIns="18288" bIns="18288" anchor="t">
+            <a:spAutoFit/>
+          </a:bodyPr>
+          <a:lstStyle/>
+          <a:p>
+            <a:pPr algn="ctr">
+              <a:defRPr sz="1600" b="1">
+                <a:solidFill>
+                  <a:srgbClr val="FFFFFF"/>
+                </a:solidFill>
+                <a:latin typeface="Avenir Next"/>
+              </a:defRPr>
+            </a:pPr>
+            <a:r>
+              <a:t>2</a:t>
+            </a:r>
+          </a:p>
+        </p:txBody>
+      </p:sp>
+      <p:sp>
+        <p:nvSpPr>
+          <p:cNvPr id="22" name="TextBox 21"/>
+          <p:cNvSpPr txBox="1"/>
+          <p:nvPr/>
+        </p:nvSpPr>
+        <p:spPr>
+          <a:xfrm>
+            <a:off x="5138928" y="2395728"/>
+            <a:ext cx="2487168" cy="512064"/>
+          </a:xfrm>
+          <a:prstGeom prst="rect">
+            <a:avLst/>
+          </a:prstGeom>
+          <a:noFill/>
+        </p:spPr>
+        <p:txBody>
+          <a:bodyPr wrap="square" lIns="18288" rIns="18288" tIns="18288" bIns="18288" anchor="t">
+            <a:spAutoFit/>
+          </a:bodyPr>
+          <a:lstStyle/>
+          <a:p>
+            <a:pPr algn="l">
+              <a:defRPr sz="2100" b="1">
+                <a:solidFill>
+                  <a:srgbClr val="21232B"/>
+                </a:solidFill>
+                <a:latin typeface="Avenir Next"/>
+              </a:defRPr>
+            </a:pPr>
+            <a:r>
+              <a:t>Filter tasks</a:t>
+            </a:r>
+          </a:p>
+        </p:txBody>
+      </p:sp>
+      <p:sp>
+        <p:nvSpPr>
+          <p:cNvPr id="23" name="TextBox 22"/>
+          <p:cNvSpPr txBox="1"/>
+          <p:nvPr/>
+        </p:nvSpPr>
+        <p:spPr>
+          <a:xfrm>
+            <a:off x="4572000" y="3081528"/>
+            <a:ext cx="3035808" cy="2148839"/>
+          </a:xfrm>
+          <a:prstGeom prst="rect">
+            <a:avLst/>
+          </a:prstGeom>
+          <a:noFill/>
+        </p:spPr>
+        <p:txBody>
+          <a:bodyPr wrap="square" lIns="18288" rIns="18288" tIns="18288" bIns="18288" anchor="t">
+            <a:spAutoFit/>
+          </a:bodyPr>
+          <a:lstStyle/>
+          <a:p>
+            <a:pPr algn="l">
+              <a:defRPr sz="1700" b="0">
+                <a:solidFill>
+                  <a:srgbClr val="21232B"/>
+                </a:solidFill>
+                <a:latin typeface="Avenir Next"/>
+              </a:defRPr>
+            </a:pPr>
+            <a:r>
+              <a:t>Change the date range and status chips to inspect planned, in-progress, done or declined work.</a:t>
+            </a:r>
+          </a:p>
+        </p:txBody>
+      </p:sp>
+      <p:sp>
+        <p:nvSpPr>
+          <p:cNvPr id="24" name="Rounded Rectangle 23"/>
+          <p:cNvSpPr/>
+          <p:nvPr/>
+        </p:nvSpPr>
+        <p:spPr>
+          <a:xfrm>
+            <a:off x="8101583" y="2148840"/>
+            <a:ext cx="3547872" cy="3264408"/>
+          </a:xfrm>
+          <a:prstGeom prst="roundRect">
+            <a:avLst>
+              <a:gd name="adj" fmla="val 8000"/>
+            </a:avLst>
+          </a:prstGeom>
+          <a:solidFill>
+            <a:srgbClr val="FFFFFF"/>
+          </a:solidFill>
+          <a:ln>
+            <a:solidFill>
+              <a:srgbClr val="DCD7CD"/>
+            </a:solidFill>
+          </a:ln>
+        </p:spPr>
+        <p:style>
+          <a:lnRef idx="1">
+            <a:schemeClr val="accent1"/>
+          </a:lnRef>
+          <a:fillRef idx="3">
+            <a:schemeClr val="accent1"/>
+          </a:fillRef>
+          <a:effectRef idx="2">
+            <a:schemeClr val="accent1"/>
+          </a:effectRef>
+          <a:fontRef idx="minor">
+            <a:schemeClr val="lt1"/>
+          </a:fontRef>
+        </p:style>
+        <p:txBody>
+          <a:bodyPr rtlCol="0" anchor="ctr"/>
+          <a:lstStyle/>
+          <a:p>
+            <a:pPr algn="ctr"/>
+          </a:p>
+        </p:txBody>
+      </p:sp>
+      <p:sp>
+        <p:nvSpPr>
+          <p:cNvPr id="25" name="Rectangle 24"/>
+          <p:cNvSpPr/>
+          <p:nvPr/>
+        </p:nvSpPr>
+        <p:spPr>
+          <a:xfrm>
+            <a:off x="8101583" y="2148840"/>
+            <a:ext cx="3547872" cy="68580"/>
+          </a:xfrm>
+          <a:prstGeom prst="rect">
+            <a:avLst/>
+          </a:prstGeom>
+          <a:solidFill>
+            <a:srgbClr val="8E64B9"/>
+          </a:solidFill>
+          <a:ln>
+            <a:noFill/>
+          </a:ln>
+        </p:spPr>
+        <p:style>
+          <a:lnRef idx="1">
+            <a:schemeClr val="accent1"/>
+          </a:lnRef>
+          <a:fillRef idx="3">
+            <a:schemeClr val="accent1"/>
+          </a:fillRef>
+          <a:effectRef idx="2">
+            <a:schemeClr val="accent1"/>
+          </a:effectRef>
+          <a:fontRef idx="minor">
+            <a:schemeClr val="lt1"/>
+          </a:fontRef>
+        </p:style>
+        <p:txBody>
+          <a:bodyPr rtlCol="0" anchor="ctr"/>
+          <a:lstStyle/>
+          <a:p>
+            <a:pPr algn="ctr"/>
+          </a:p>
+        </p:txBody>
+      </p:sp>
+      <p:sp>
+        <p:nvSpPr>
+          <p:cNvPr id="26" name="Rounded Rectangle 25"/>
+          <p:cNvSpPr/>
+          <p:nvPr/>
+        </p:nvSpPr>
+        <p:spPr>
+          <a:xfrm>
+            <a:off x="8330183" y="2395728"/>
+            <a:ext cx="457200" cy="457200"/>
+          </a:xfrm>
+          <a:prstGeom prst="roundRect">
+            <a:avLst>
+              <a:gd name="adj" fmla="val 8000"/>
+            </a:avLst>
+          </a:prstGeom>
+          <a:solidFill>
+            <a:srgbClr val="8E64B9"/>
+          </a:solidFill>
+          <a:ln>
+            <a:noFill/>
+          </a:ln>
+        </p:spPr>
+        <p:style>
+          <a:lnRef idx="1">
+            <a:schemeClr val="accent1"/>
+          </a:lnRef>
+          <a:fillRef idx="3">
+            <a:schemeClr val="accent1"/>
+          </a:fillRef>
+          <a:effectRef idx="2">
+            <a:schemeClr val="accent1"/>
+          </a:effectRef>
+          <a:fontRef idx="minor">
+            <a:schemeClr val="lt1"/>
+          </a:fontRef>
+        </p:style>
+        <p:txBody>
+          <a:bodyPr rtlCol="0" anchor="ctr"/>
+          <a:lstStyle/>
+          <a:p>
+            <a:pPr algn="ctr"/>
+          </a:p>
+        </p:txBody>
+      </p:sp>
+      <p:sp>
+        <p:nvSpPr>
+          <p:cNvPr id="27" name="TextBox 26"/>
+          <p:cNvSpPr txBox="1"/>
+          <p:nvPr/>
+        </p:nvSpPr>
+        <p:spPr>
+          <a:xfrm>
+            <a:off x="8330183" y="2459736"/>
+            <a:ext cx="457200" cy="201168"/>
+          </a:xfrm>
+          <a:prstGeom prst="rect">
+            <a:avLst/>
+          </a:prstGeom>
+          <a:noFill/>
+        </p:spPr>
+        <p:txBody>
+          <a:bodyPr wrap="square" lIns="18288" rIns="18288" tIns="18288" bIns="18288" anchor="t">
+            <a:spAutoFit/>
+          </a:bodyPr>
+          <a:lstStyle/>
+          <a:p>
+            <a:pPr algn="ctr">
+              <a:defRPr sz="1600" b="1">
+                <a:solidFill>
+                  <a:srgbClr val="FFFFFF"/>
+                </a:solidFill>
+                <a:latin typeface="Avenir Next"/>
+              </a:defRPr>
+            </a:pPr>
+            <a:r>
+              <a:t>3</a:t>
+            </a:r>
+          </a:p>
+        </p:txBody>
+      </p:sp>
+      <p:sp>
+        <p:nvSpPr>
+          <p:cNvPr id="28" name="TextBox 27"/>
+          <p:cNvSpPr txBox="1"/>
+          <p:nvPr/>
+        </p:nvSpPr>
+        <p:spPr>
+          <a:xfrm>
+            <a:off x="8924544" y="2395728"/>
+            <a:ext cx="2487168" cy="512064"/>
+          </a:xfrm>
+          <a:prstGeom prst="rect">
+            <a:avLst/>
+          </a:prstGeom>
+          <a:noFill/>
+        </p:spPr>
+        <p:txBody>
+          <a:bodyPr wrap="square" lIns="18288" rIns="18288" tIns="18288" bIns="18288" anchor="t">
+            <a:spAutoFit/>
+          </a:bodyPr>
+          <a:lstStyle/>
+          <a:p>
+            <a:pPr algn="l">
+              <a:defRPr sz="2100" b="1">
+                <a:solidFill>
+                  <a:srgbClr val="21232B"/>
+                </a:solidFill>
+                <a:latin typeface="Avenir Next"/>
+              </a:defRPr>
+            </a:pPr>
+            <a:r>
+              <a:t>Open a task</a:t>
+            </a:r>
+          </a:p>
+        </p:txBody>
+      </p:sp>
+      <p:sp>
+        <p:nvSpPr>
+          <p:cNvPr id="29" name="TextBox 28"/>
+          <p:cNvSpPr txBox="1"/>
+          <p:nvPr/>
+        </p:nvSpPr>
+        <p:spPr>
+          <a:xfrm>
+            <a:off x="8357615" y="3081528"/>
+            <a:ext cx="3035808" cy="2148839"/>
+          </a:xfrm>
+          <a:prstGeom prst="rect">
+            <a:avLst/>
+          </a:prstGeom>
+          <a:noFill/>
+        </p:spPr>
+        <p:txBody>
+          <a:bodyPr wrap="square" lIns="18288" rIns="18288" tIns="18288" bIns="18288" anchor="t">
+            <a:spAutoFit/>
+          </a:bodyPr>
+          <a:lstStyle/>
+          <a:p>
+            <a:pPr algn="l">
+              <a:defRPr sz="1700" b="0">
+                <a:solidFill>
+                  <a:srgbClr val="21232B"/>
+                </a:solidFill>
+                <a:latin typeface="Avenir Next"/>
+              </a:defRPr>
+            </a:pPr>
+            <a:r>
+              <a:t>Tap a task to return to its conversation and answer the question there. Task status can also be changed on the board.</a:t>
+            </a:r>
+          </a:p>
+        </p:txBody>
+      </p:sp>
+      <p:sp>
+        <p:nvSpPr>
+          <p:cNvPr id="30" name="Rounded Rectangle 29"/>
+          <p:cNvSpPr/>
+          <p:nvPr/>
+        </p:nvSpPr>
+        <p:spPr>
+          <a:xfrm>
+            <a:off x="521207" y="5833872"/>
+            <a:ext cx="11128248" cy="438912"/>
+          </a:xfrm>
+          <a:prstGeom prst="roundRect">
+            <a:avLst>
+              <a:gd name="adj" fmla="val 8000"/>
+            </a:avLst>
+          </a:prstGeom>
+          <a:solidFill>
+            <a:srgbClr val="EEEADF"/>
+          </a:solidFill>
+          <a:ln>
+            <a:noFill/>
+          </a:ln>
+        </p:spPr>
+        <p:style>
+          <a:lnRef idx="1">
+            <a:schemeClr val="accent1"/>
+          </a:lnRef>
+          <a:fillRef idx="3">
+            <a:schemeClr val="accent1"/>
+          </a:fillRef>
+          <a:effectRef idx="2">
+            <a:schemeClr val="accent1"/>
+          </a:effectRef>
+          <a:fontRef idx="minor">
+            <a:schemeClr val="lt1"/>
+          </a:fontRef>
+        </p:style>
+        <p:txBody>
+          <a:bodyPr rtlCol="0" anchor="ctr"/>
+          <a:lstStyle/>
+          <a:p>
+            <a:pPr algn="ctr"/>
+          </a:p>
+        </p:txBody>
+      </p:sp>
+      <p:sp>
+        <p:nvSpPr>
+          <p:cNvPr id="31" name="Rectangle 30"/>
+          <p:cNvSpPr/>
+          <p:nvPr/>
+        </p:nvSpPr>
+        <p:spPr>
+          <a:xfrm>
+            <a:off x="521207" y="5833872"/>
+            <a:ext cx="73152" cy="438912"/>
+          </a:xfrm>
+          <a:prstGeom prst="rect">
+            <a:avLst/>
+          </a:prstGeom>
+          <a:solidFill>
+            <a:srgbClr val="21A391"/>
+          </a:solidFill>
+          <a:ln>
+            <a:noFill/>
+          </a:ln>
+        </p:spPr>
+        <p:style>
+          <a:lnRef idx="1">
+            <a:schemeClr val="accent1"/>
+          </a:lnRef>
+          <a:fillRef idx="3">
+            <a:schemeClr val="accent1"/>
+          </a:fillRef>
+          <a:effectRef idx="2">
+            <a:schemeClr val="accent1"/>
+          </a:effectRef>
+          <a:fontRef idx="minor">
+            <a:schemeClr val="lt1"/>
+          </a:fontRef>
+        </p:style>
+        <p:txBody>
+          <a:bodyPr rtlCol="0" anchor="ctr"/>
+          <a:lstStyle/>
+          <a:p>
+            <a:pPr algn="ctr"/>
+          </a:p>
+        </p:txBody>
+      </p:sp>
+      <p:sp>
+        <p:nvSpPr>
+          <p:cNvPr id="32" name="TextBox 31"/>
+          <p:cNvSpPr txBox="1"/>
+          <p:nvPr/>
+        </p:nvSpPr>
+        <p:spPr>
+          <a:xfrm>
+            <a:off x="713232" y="5925312"/>
+            <a:ext cx="10698480" cy="265176"/>
+          </a:xfrm>
+          <a:prstGeom prst="rect">
+            <a:avLst/>
+          </a:prstGeom>
+          <a:noFill/>
+        </p:spPr>
+        <p:txBody>
+          <a:bodyPr wrap="square" lIns="18288" rIns="18288" tIns="18288" bIns="18288" anchor="t">
+            <a:spAutoFit/>
+          </a:bodyPr>
+          <a:lstStyle/>
+          <a:p>
+            <a:pPr algn="l">
+              <a:defRPr sz="1400" b="0">
+                <a:solidFill>
+                  <a:srgbClr val="21232B"/>
+                </a:solidFill>
+                <a:latin typeface="Avenir Next"/>
+              </a:defRPr>
+            </a:pPr>
+            <a:r>
+              <a:t>The board organizes tasks; the conversation holds the answer and supporting context.</a:t>
+            </a:r>
+          </a:p>
+        </p:txBody>
+      </p:sp>
+    </p:spTree>
+  </p:cSld>
+  <p:clrMapOvr>
+    <a:masterClrMapping/>
+  </p:clrMapOvr>
+</p:sld>
+</file>
+
+<file path=ppt/slides/slide9.xml><?xml version="1.0" encoding="utf-8"?>
+<p:sld xmlns:a="http://schemas.openxmlformats.org/drawingml/2006/main" xmlns:p="http://schemas.openxmlformats.org/presentationml/2006/main" xmlns:r="http://schemas.openxmlformats.org/officeDocument/2006/relationships">
+  <p:cSld>
+    <p:spTree>
+      <p:nvGrpSpPr>
+        <p:cNvPr id="1" name=""/>
+        <p:cNvGrpSpPr/>
+        <p:nvPr/>
+      </p:nvGrpSpPr>
+      <p:grpSpPr/>
+      <p:sp>
+        <p:nvSpPr>
+          <p:cNvPr id="2" name="Rectangle 1"/>
+          <p:cNvSpPr/>
+          <p:nvPr/>
+        </p:nvSpPr>
+        <p:spPr>
+          <a:xfrm>
+            <a:off x="0" y="0"/>
+            <a:ext cx="12191695" cy="6858000"/>
+          </a:xfrm>
+          <a:prstGeom prst="rect">
+            <a:avLst/>
+          </a:prstGeom>
+          <a:solidFill>
+            <a:srgbClr val="F8F5EC"/>
+          </a:solidFill>
+          <a:ln>
+            <a:noFill/>
+          </a:ln>
+        </p:spPr>
+        <p:style>
+          <a:lnRef idx="1">
+            <a:schemeClr val="accent1"/>
+          </a:lnRef>
+          <a:fillRef idx="3">
+            <a:schemeClr val="accent1"/>
+          </a:fillRef>
+          <a:effectRef idx="2">
+            <a:schemeClr val="accent1"/>
+          </a:effectRef>
+          <a:fontRef idx="minor">
+            <a:schemeClr val="lt1"/>
+          </a:fontRef>
+        </p:style>
+        <p:txBody>
+          <a:bodyPr rtlCol="0" anchor="ctr"/>
+          <a:lstStyle/>
+          <a:p>
+            <a:pPr algn="ctr"/>
+          </a:p>
+        </p:txBody>
+      </p:sp>
+      <p:sp>
+        <p:nvSpPr>
+          <p:cNvPr id="3" name="Rectangle 2"/>
+          <p:cNvSpPr/>
+          <p:nvPr/>
+        </p:nvSpPr>
+        <p:spPr>
+          <a:xfrm>
+            <a:off x="0" y="0"/>
+            <a:ext cx="12191695" cy="585216"/>
+          </a:xfrm>
+          <a:prstGeom prst="rect">
+            <a:avLst/>
+          </a:prstGeom>
+          <a:solidFill>
+            <a:srgbClr val="08090C"/>
+          </a:solidFill>
+          <a:ln>
+            <a:noFill/>
+          </a:ln>
+        </p:spPr>
+        <p:style>
+          <a:lnRef idx="1">
+            <a:schemeClr val="accent1"/>
+          </a:lnRef>
+          <a:fillRef idx="3">
+            <a:schemeClr val="accent1"/>
+          </a:fillRef>
+          <a:effectRef idx="2">
+            <a:schemeClr val="accent1"/>
+          </a:effectRef>
+          <a:fontRef idx="minor">
+            <a:schemeClr val="lt1"/>
+          </a:fontRef>
+        </p:style>
+        <p:txBody>
+          <a:bodyPr rtlCol="0" anchor="ctr"/>
+          <a:lstStyle/>
+          <a:p>
+            <a:pPr algn="ctr"/>
+          </a:p>
+        </p:txBody>
+      </p:sp>
+      <p:sp>
+        <p:nvSpPr>
+          <p:cNvPr id="4" name="TextBox 3"/>
+          <p:cNvSpPr txBox="1"/>
+          <p:nvPr/>
+        </p:nvSpPr>
+        <p:spPr>
+          <a:xfrm>
+            <a:off x="512064" y="128016"/>
+            <a:ext cx="2011680" cy="283464"/>
+          </a:xfrm>
+          <a:prstGeom prst="rect">
+            <a:avLst/>
+          </a:prstGeom>
+          <a:noFill/>
+        </p:spPr>
+        <p:txBody>
+          <a:bodyPr wrap="square" lIns="18288" rIns="18288" tIns="18288" bIns="18288" anchor="t">
+            <a:spAutoFit/>
+          </a:bodyPr>
+          <a:lstStyle/>
+          <a:p>
+            <a:pPr algn="l">
+              <a:defRPr sz="1700" b="1">
+                <a:solidFill>
+                  <a:srgbClr val="FFFFFF"/>
+                </a:solidFill>
+                <a:latin typeface="Avenir Next"/>
+              </a:defRPr>
+            </a:pPr>
+            <a:r>
+              <a:t>PETAK</a:t>
+            </a:r>
+          </a:p>
+        </p:txBody>
+      </p:sp>
+      <p:sp>
+        <p:nvSpPr>
+          <p:cNvPr id="5" name="TextBox 4"/>
+          <p:cNvSpPr txBox="1"/>
+          <p:nvPr/>
+        </p:nvSpPr>
+        <p:spPr>
+          <a:xfrm>
+            <a:off x="3794760" y="155448"/>
+            <a:ext cx="4617720" cy="237744"/>
+          </a:xfrm>
+          <a:prstGeom prst="rect">
+            <a:avLst/>
+          </a:prstGeom>
+          <a:noFill/>
+        </p:spPr>
+        <p:txBody>
+          <a:bodyPr wrap="square" lIns="18288" rIns="18288" tIns="18288" bIns="18288" anchor="t">
+            <a:spAutoFit/>
+          </a:bodyPr>
+          <a:lstStyle/>
+          <a:p>
+            <a:pPr algn="ctr">
+              <a:defRPr sz="1300" b="1">
+                <a:solidFill>
+                  <a:srgbClr val="FFFFFF"/>
+                </a:solidFill>
+                <a:latin typeface="Avenir Next"/>
+              </a:defRPr>
+            </a:pPr>
+            <a:r>
+              <a:t>FEATURE REFERENCE</a:t>
+            </a:r>
+          </a:p>
+        </p:txBody>
+      </p:sp>
+      <p:sp>
+        <p:nvSpPr>
+          <p:cNvPr id="6" name="TextBox 5"/>
+          <p:cNvSpPr txBox="1"/>
+          <p:nvPr/>
+        </p:nvSpPr>
+        <p:spPr>
+          <a:xfrm>
+            <a:off x="9418320" y="164592"/>
+            <a:ext cx="2221992" cy="228600"/>
+          </a:xfrm>
+          <a:prstGeom prst="rect">
+            <a:avLst/>
+          </a:prstGeom>
+          <a:noFill/>
+        </p:spPr>
+        <p:txBody>
+          <a:bodyPr wrap="square" lIns="18288" rIns="18288" tIns="18288" bIns="18288" anchor="t">
+            <a:spAutoFit/>
+          </a:bodyPr>
+          <a:lstStyle/>
+          <a:p>
+            <a:pPr algn="r">
+              <a:defRPr sz="1100" b="1">
+                <a:solidFill>
+                  <a:srgbClr val="FFFFFF"/>
+                </a:solidFill>
+                <a:latin typeface="Avenir Next"/>
+              </a:defRPr>
+            </a:pPr>
+            <a:r>
+              <a:t>AI BUILDER CUP 2026</a:t>
+            </a:r>
+          </a:p>
+        </p:txBody>
+      </p:sp>
+      <p:sp>
+        <p:nvSpPr>
+          <p:cNvPr id="7" name="TextBox 6"/>
+          <p:cNvSpPr txBox="1"/>
+          <p:nvPr/>
+        </p:nvSpPr>
+        <p:spPr>
+          <a:xfrm>
+            <a:off x="512064" y="859536"/>
+            <a:ext cx="11064240" cy="594360"/>
+          </a:xfrm>
+          <a:prstGeom prst="rect">
+            <a:avLst/>
+          </a:prstGeom>
+          <a:noFill/>
+        </p:spPr>
+        <p:txBody>
+          <a:bodyPr wrap="square" lIns="18288" rIns="18288" tIns="18288" bIns="18288" anchor="t">
+            <a:spAutoFit/>
+          </a:bodyPr>
+          <a:lstStyle/>
+          <a:p>
+            <a:pPr algn="l">
+              <a:defRPr sz="3100" b="1">
+                <a:solidFill>
+                  <a:srgbClr val="21232B"/>
+                </a:solidFill>
+                <a:latin typeface="Avenir Next"/>
+              </a:defRPr>
+            </a:pPr>
+            <a:r>
+              <a:t>Penny: spending and receipts</a:t>
+            </a:r>
+          </a:p>
+        </p:txBody>
+      </p:sp>
+      <p:sp>
+        <p:nvSpPr>
+          <p:cNvPr id="8" name="TextBox 7"/>
+          <p:cNvSpPr txBox="1"/>
+          <p:nvPr/>
+        </p:nvSpPr>
+        <p:spPr>
+          <a:xfrm>
+            <a:off x="530352" y="1517904"/>
+            <a:ext cx="10881360" cy="512064"/>
+          </a:xfrm>
+          <a:prstGeom prst="rect">
+            <a:avLst/>
+          </a:prstGeom>
+          <a:noFill/>
+        </p:spPr>
+        <p:txBody>
+          <a:bodyPr wrap="square" lIns="18288" rIns="18288" tIns="18288" bIns="18288" anchor="t">
+            <a:spAutoFit/>
+          </a:bodyPr>
+          <a:lstStyle/>
+          <a:p>
+            <a:pPr algn="l">
+              <a:defRPr sz="1600" b="0">
+                <a:solidFill>
+                  <a:srgbClr val="5B5E67"/>
+                </a:solidFill>
+                <a:latin typeface="Avenir Next"/>
+              </a:defRPr>
+            </a:pPr>
+            <a:r>
+              <a:t>Use the dashboard to inspect the saved expense, not only the chat reply.</a:t>
+            </a:r>
+          </a:p>
+        </p:txBody>
+      </p:sp>
+      <p:sp>
+        <p:nvSpPr>
+          <p:cNvPr id="9" name="Rectangle 8"/>
+          <p:cNvSpPr/>
+          <p:nvPr/>
+        </p:nvSpPr>
+        <p:spPr>
+          <a:xfrm>
+            <a:off x="502920" y="6519672"/>
+            <a:ext cx="11155680" cy="13716"/>
+          </a:xfrm>
+          <a:prstGeom prst="rect">
+            <a:avLst/>
+          </a:prstGeom>
+          <a:solidFill>
+            <a:srgbClr val="DCD7CD"/>
+          </a:solidFill>
+          <a:ln>
+            <a:noFill/>
+          </a:ln>
+        </p:spPr>
+        <p:style>
+          <a:lnRef idx="1">
+            <a:schemeClr val="accent1"/>
+          </a:lnRef>
+          <a:fillRef idx="3">
+            <a:schemeClr val="accent1"/>
+          </a:fillRef>
+          <a:effectRef idx="2">
+            <a:schemeClr val="accent1"/>
+          </a:effectRef>
+          <a:fontRef idx="minor">
+            <a:schemeClr val="lt1"/>
+          </a:fontRef>
+        </p:style>
+        <p:txBody>
+          <a:bodyPr rtlCol="0" anchor="ctr"/>
+          <a:lstStyle/>
+          <a:p>
+            <a:pPr algn="ctr"/>
+          </a:p>
+        </p:txBody>
+      </p:sp>
+      <p:sp>
+        <p:nvSpPr>
+          <p:cNvPr id="10" name="TextBox 9"/>
+          <p:cNvSpPr txBox="1"/>
+          <p:nvPr/>
+        </p:nvSpPr>
+        <p:spPr>
+          <a:xfrm>
+            <a:off x="530352" y="6574536"/>
+            <a:ext cx="8412480" cy="182880"/>
+          </a:xfrm>
+          <a:prstGeom prst="rect">
+            <a:avLst/>
+          </a:prstGeom>
+          <a:noFill/>
+        </p:spPr>
+        <p:txBody>
+          <a:bodyPr wrap="square" lIns="18288" rIns="18288" tIns="18288" bIns="18288" anchor="t">
+            <a:spAutoFit/>
+          </a:bodyPr>
+          <a:lstStyle/>
+          <a:p>
+            <a:pPr algn="l">
+              <a:defRPr sz="1000" b="0">
+                <a:solidFill>
+                  <a:srgbClr val="5B5E67"/>
+                </a:solidFill>
+                <a:latin typeface="Avenir Next"/>
+              </a:defRPr>
+            </a:pPr>
+            <a:r>
+              <a:t>Petak QA · use the reviewer access supplied separately</a:t>
+            </a:r>
+          </a:p>
+        </p:txBody>
+      </p:sp>
+      <p:sp>
+        <p:nvSpPr>
+          <p:cNvPr id="11" name="TextBox 10"/>
+          <p:cNvSpPr txBox="1"/>
+          <p:nvPr/>
+        </p:nvSpPr>
+        <p:spPr>
+          <a:xfrm>
+            <a:off x="11128248" y="6556248"/>
+            <a:ext cx="502920" cy="219456"/>
+          </a:xfrm>
+          <a:prstGeom prst="rect">
+            <a:avLst/>
+          </a:prstGeom>
+          <a:noFill/>
+        </p:spPr>
+        <p:txBody>
+          <a:bodyPr wrap="square" lIns="18288" rIns="18288" tIns="18288" bIns="18288" anchor="t">
+            <a:spAutoFit/>
+          </a:bodyPr>
+          <a:lstStyle/>
+          <a:p>
+            <a:pPr algn="r">
+              <a:defRPr sz="1100" b="1">
+                <a:solidFill>
+                  <a:srgbClr val="5B5E67"/>
+                </a:solidFill>
+                <a:latin typeface="Avenir Next"/>
+              </a:defRPr>
+            </a:pPr>
+            <a:r>
+              <a:t>9</a:t>
+            </a:r>
+          </a:p>
+        </p:txBody>
+      </p:sp>
+      <p:sp>
+        <p:nvSpPr>
+          <p:cNvPr id="12" name="Rounded Rectangle 11"/>
+          <p:cNvSpPr/>
+          <p:nvPr/>
+        </p:nvSpPr>
+        <p:spPr>
+          <a:xfrm>
+            <a:off x="530352" y="2148840"/>
+            <a:ext cx="3547872" cy="3264408"/>
+          </a:xfrm>
+          <a:prstGeom prst="roundRect">
+            <a:avLst>
+              <a:gd name="adj" fmla="val 8000"/>
+            </a:avLst>
+          </a:prstGeom>
+          <a:solidFill>
+            <a:srgbClr val="FFFFFF"/>
+          </a:solidFill>
+          <a:ln>
+            <a:solidFill>
+              <a:srgbClr val="DCD7CD"/>
+            </a:solidFill>
+          </a:ln>
+        </p:spPr>
+        <p:style>
+          <a:lnRef idx="1">
+            <a:schemeClr val="accent1"/>
+          </a:lnRef>
+          <a:fillRef idx="3">
+            <a:schemeClr val="accent1"/>
+          </a:fillRef>
+          <a:effectRef idx="2">
+            <a:schemeClr val="accent1"/>
+          </a:effectRef>
+          <a:fontRef idx="minor">
+            <a:schemeClr val="lt1"/>
+          </a:fontRef>
+        </p:style>
+        <p:txBody>
+          <a:bodyPr rtlCol="0" anchor="ctr"/>
+          <a:lstStyle/>
+          <a:p>
+            <a:pPr algn="ctr"/>
+          </a:p>
+        </p:txBody>
+      </p:sp>
+      <p:sp>
+        <p:nvSpPr>
+          <p:cNvPr id="13" name="Rectangle 12"/>
+          <p:cNvSpPr/>
+          <p:nvPr/>
+        </p:nvSpPr>
+        <p:spPr>
+          <a:xfrm>
+            <a:off x="530352" y="2148840"/>
+            <a:ext cx="3547872" cy="68580"/>
+          </a:xfrm>
+          <a:prstGeom prst="rect">
+            <a:avLst/>
+          </a:prstGeom>
+          <a:solidFill>
+            <a:srgbClr val="DFA538"/>
+          </a:solidFill>
+          <a:ln>
+            <a:noFill/>
+          </a:ln>
+        </p:spPr>
+        <p:style>
+          <a:lnRef idx="1">
+            <a:schemeClr val="accent1"/>
+          </a:lnRef>
+          <a:fillRef idx="3">
+            <a:schemeClr val="accent1"/>
+          </a:fillRef>
+          <a:effectRef idx="2">
+            <a:schemeClr val="accent1"/>
+          </a:effectRef>
+          <a:fontRef idx="minor">
+            <a:schemeClr val="lt1"/>
+          </a:fontRef>
+        </p:style>
+        <p:txBody>
+          <a:bodyPr rtlCol="0" anchor="ctr"/>
+          <a:lstStyle/>
+          <a:p>
+            <a:pPr algn="ctr"/>
+          </a:p>
+        </p:txBody>
+      </p:sp>
+      <p:sp>
+        <p:nvSpPr>
+          <p:cNvPr id="14" name="Rounded Rectangle 13"/>
+          <p:cNvSpPr/>
+          <p:nvPr/>
+        </p:nvSpPr>
+        <p:spPr>
+          <a:xfrm>
+            <a:off x="758952" y="2395728"/>
+            <a:ext cx="457200" cy="457200"/>
+          </a:xfrm>
+          <a:prstGeom prst="roundRect">
+            <a:avLst>
+              <a:gd name="adj" fmla="val 8000"/>
+            </a:avLst>
+          </a:prstGeom>
+          <a:solidFill>
+            <a:srgbClr val="DFA538"/>
+          </a:solidFill>
+          <a:ln>
+            <a:noFill/>
+          </a:ln>
+        </p:spPr>
+        <p:style>
+          <a:lnRef idx="1">
+            <a:schemeClr val="accent1"/>
+          </a:lnRef>
+          <a:fillRef idx="3">
+            <a:schemeClr val="accent1"/>
+          </a:fillRef>
+          <a:effectRef idx="2">
+            <a:schemeClr val="accent1"/>
+          </a:effectRef>
+          <a:fontRef idx="minor">
+            <a:schemeClr val="lt1"/>
+          </a:fontRef>
+        </p:style>
+        <p:txBody>
+          <a:bodyPr rtlCol="0" anchor="ctr"/>
+          <a:lstStyle/>
+          <a:p>
+            <a:pPr algn="ctr"/>
+          </a:p>
+        </p:txBody>
+      </p:sp>
+      <p:sp>
+        <p:nvSpPr>
+          <p:cNvPr id="15" name="TextBox 14"/>
+          <p:cNvSpPr txBox="1"/>
+          <p:nvPr/>
+        </p:nvSpPr>
+        <p:spPr>
+          <a:xfrm>
+            <a:off x="758952" y="2459736"/>
+            <a:ext cx="457200" cy="201168"/>
+          </a:xfrm>
+          <a:prstGeom prst="rect">
+            <a:avLst/>
+          </a:prstGeom>
+          <a:noFill/>
+        </p:spPr>
+        <p:txBody>
+          <a:bodyPr wrap="square" lIns="18288" rIns="18288" tIns="18288" bIns="18288" anchor="t">
+            <a:spAutoFit/>
+          </a:bodyPr>
+          <a:lstStyle/>
+          <a:p>
+            <a:pPr algn="ctr">
+              <a:defRPr sz="1600" b="1">
+                <a:solidFill>
+                  <a:srgbClr val="FFFFFF"/>
+                </a:solidFill>
+                <a:latin typeface="Avenir Next"/>
+              </a:defRPr>
+            </a:pPr>
+            <a:r>
+              <a:t>1</a:t>
+            </a:r>
+          </a:p>
+        </p:txBody>
+      </p:sp>
+      <p:sp>
+        <p:nvSpPr>
+          <p:cNvPr id="16" name="TextBox 15"/>
+          <p:cNvSpPr txBox="1"/>
+          <p:nvPr/>
+        </p:nvSpPr>
+        <p:spPr>
+          <a:xfrm>
+            <a:off x="1353312" y="2395728"/>
+            <a:ext cx="2487168" cy="512064"/>
+          </a:xfrm>
+          <a:prstGeom prst="rect">
+            <a:avLst/>
+          </a:prstGeom>
+          <a:noFill/>
+        </p:spPr>
+        <p:txBody>
+          <a:bodyPr wrap="square" lIns="18288" rIns="18288" tIns="18288" bIns="18288" anchor="t">
+            <a:spAutoFit/>
+          </a:bodyPr>
+          <a:lstStyle/>
+          <a:p>
+            <a:pPr algn="l">
+              <a:defRPr sz="2100" b="1">
+                <a:solidFill>
+                  <a:srgbClr val="21232B"/>
+                </a:solidFill>
+                <a:latin typeface="Avenir Next"/>
+              </a:defRPr>
+            </a:pPr>
+            <a:r>
+              <a:t>Choose a range</a:t>
+            </a:r>
+          </a:p>
+        </p:txBody>
+      </p:sp>
+      <p:sp>
+        <p:nvSpPr>
+          <p:cNvPr id="17" name="TextBox 16"/>
+          <p:cNvSpPr txBox="1"/>
+          <p:nvPr/>
+        </p:nvSpPr>
+        <p:spPr>
+          <a:xfrm>
+            <a:off x="786384" y="3081528"/>
+            <a:ext cx="3035808" cy="2148839"/>
+          </a:xfrm>
+          <a:prstGeom prst="rect">
+            <a:avLst/>
+          </a:prstGeom>
+          <a:noFill/>
+        </p:spPr>
+        <p:txBody>
+          <a:bodyPr wrap="square" lIns="18288" rIns="18288" tIns="18288" bIns="18288" anchor="t">
+            <a:spAutoFit/>
+          </a:bodyPr>
+          <a:lstStyle/>
+          <a:p>
+            <a:pPr algn="l">
+              <a:defRPr sz="1700" b="0">
+                <a:solidFill>
+                  <a:srgbClr val="21232B"/>
+                </a:solidFill>
+                <a:latin typeface="Avenir Next"/>
+              </a:defRPr>
+            </a:pPr>
+            <a:r>
+              <a:t>Open Penny from the menu. Switch between Today, Week, Month, Year or a custom date range.</a:t>
+            </a:r>
+          </a:p>
+        </p:txBody>
+      </p:sp>
+      <p:sp>
+        <p:nvSpPr>
+          <p:cNvPr id="18" name="Rounded Rectangle 17"/>
+          <p:cNvSpPr/>
+          <p:nvPr/>
+        </p:nvSpPr>
+        <p:spPr>
+          <a:xfrm>
+            <a:off x="4315968" y="2148840"/>
+            <a:ext cx="3547872" cy="3264408"/>
+          </a:xfrm>
+          <a:prstGeom prst="roundRect">
+            <a:avLst>
+              <a:gd name="adj" fmla="val 8000"/>
+            </a:avLst>
+          </a:prstGeom>
+          <a:solidFill>
+            <a:srgbClr val="FFFFFF"/>
+          </a:solidFill>
+          <a:ln>
+            <a:solidFill>
+              <a:srgbClr val="DCD7CD"/>
+            </a:solidFill>
+          </a:ln>
+        </p:spPr>
+        <p:style>
+          <a:lnRef idx="1">
+            <a:schemeClr val="accent1"/>
+          </a:lnRef>
+          <a:fillRef idx="3">
+            <a:schemeClr val="accent1"/>
+          </a:fillRef>
+          <a:effectRef idx="2">
+            <a:schemeClr val="accent1"/>
+          </a:effectRef>
+          <a:fontRef idx="minor">
+            <a:schemeClr val="lt1"/>
+          </a:fontRef>
+        </p:style>
+        <p:txBody>
+          <a:bodyPr rtlCol="0" anchor="ctr"/>
+          <a:lstStyle/>
+          <a:p>
+            <a:pPr algn="ctr"/>
+          </a:p>
+        </p:txBody>
+      </p:sp>
+      <p:sp>
+        <p:nvSpPr>
+          <p:cNvPr id="19" name="Rectangle 18"/>
+          <p:cNvSpPr/>
+          <p:nvPr/>
+        </p:nvSpPr>
+        <p:spPr>
+          <a:xfrm>
+            <a:off x="4315968" y="2148840"/>
+            <a:ext cx="3547872" cy="68580"/>
+          </a:xfrm>
+          <a:prstGeom prst="rect">
+            <a:avLst/>
+          </a:prstGeom>
+          <a:solidFill>
+            <a:srgbClr val="21A391"/>
+          </a:solidFill>
+          <a:ln>
+            <a:noFill/>
+          </a:ln>
+        </p:spPr>
+        <p:style>
+          <a:lnRef idx="1">
+            <a:schemeClr val="accent1"/>
+          </a:lnRef>
+          <a:fillRef idx="3">
+            <a:schemeClr val="accent1"/>
+          </a:fillRef>
+          <a:effectRef idx="2">
+            <a:schemeClr val="accent1"/>
+          </a:effectRef>
+          <a:fontRef idx="minor">
+            <a:schemeClr val="lt1"/>
+          </a:fontRef>
+        </p:style>
+        <p:txBody>
+          <a:bodyPr rtlCol="0" anchor="ctr"/>
+          <a:lstStyle/>
+          <a:p>
+            <a:pPr algn="ctr"/>
+          </a:p>
+        </p:txBody>
+      </p:sp>
+      <p:sp>
+        <p:nvSpPr>
+          <p:cNvPr id="20" name="Rounded Rectangle 19"/>
+          <p:cNvSpPr/>
+          <p:nvPr/>
+        </p:nvSpPr>
+        <p:spPr>
+          <a:xfrm>
+            <a:off x="4544568" y="2395728"/>
+            <a:ext cx="457200" cy="457200"/>
+          </a:xfrm>
+          <a:prstGeom prst="roundRect">
+            <a:avLst>
+              <a:gd name="adj" fmla="val 8000"/>
+            </a:avLst>
+          </a:prstGeom>
+          <a:solidFill>
+            <a:srgbClr val="21A391"/>
+          </a:solidFill>
+          <a:ln>
+            <a:noFill/>
+          </a:ln>
+        </p:spPr>
+        <p:style>
+          <a:lnRef idx="1">
+            <a:schemeClr val="accent1"/>
+          </a:lnRef>
+          <a:fillRef idx="3">
+            <a:schemeClr val="accent1"/>
+          </a:fillRef>
+          <a:effectRef idx="2">
+            <a:schemeClr val="accent1"/>
+          </a:effectRef>
+          <a:fontRef idx="minor">
+            <a:schemeClr val="lt1"/>
+          </a:fontRef>
+        </p:style>
+        <p:txBody>
+          <a:bodyPr rtlCol="0" anchor="ctr"/>
+          <a:lstStyle/>
+          <a:p>
+            <a:pPr algn="ctr"/>
+          </a:p>
+        </p:txBody>
+      </p:sp>
+      <p:sp>
+        <p:nvSpPr>
+          <p:cNvPr id="21" name="TextBox 20"/>
+          <p:cNvSpPr txBox="1"/>
+          <p:nvPr/>
+        </p:nvSpPr>
+        <p:spPr>
+          <a:xfrm>
+            <a:off x="4544568" y="2459736"/>
+            <a:ext cx="457200" cy="201168"/>
+          </a:xfrm>
+          <a:prstGeom prst="rect">
+            <a:avLst/>
+          </a:prstGeom>
+          <a:noFill/>
+        </p:spPr>
+        <p:txBody>
+          <a:bodyPr wrap="square" lIns="18288" rIns="18288" tIns="18288" bIns="18288" anchor="t">
+            <a:spAutoFit/>
+          </a:bodyPr>
+          <a:lstStyle/>
+          <a:p>
+            <a:pPr algn="ctr">
+              <a:defRPr sz="1600" b="1">
+                <a:solidFill>
+                  <a:srgbClr val="FFFFFF"/>
+                </a:solidFill>
+                <a:latin typeface="Avenir Next"/>
+              </a:defRPr>
+            </a:pPr>
+            <a:r>
+              <a:t>2</a:t>
+            </a:r>
+          </a:p>
+        </p:txBody>
+      </p:sp>
+      <p:sp>
+        <p:nvSpPr>
+          <p:cNvPr id="22" name="TextBox 21"/>
+          <p:cNvSpPr txBox="1"/>
+          <p:nvPr/>
+        </p:nvSpPr>
+        <p:spPr>
+          <a:xfrm>
+            <a:off x="5138928" y="2395728"/>
+            <a:ext cx="2487168" cy="512064"/>
+          </a:xfrm>
+          <a:prstGeom prst="rect">
+            <a:avLst/>
+          </a:prstGeom>
+          <a:noFill/>
+        </p:spPr>
+        <p:txBody>
+          <a:bodyPr wrap="square" lIns="18288" rIns="18288" tIns="18288" bIns="18288" anchor="t">
+            <a:spAutoFit/>
+          </a:bodyPr>
+          <a:lstStyle/>
+          <a:p>
+            <a:pPr algn="l">
+              <a:defRPr sz="2100" b="1">
+                <a:solidFill>
+                  <a:srgbClr val="21232B"/>
+                </a:solidFill>
+                <a:latin typeface="Avenir Next"/>
+              </a:defRPr>
+            </a:pPr>
+            <a:r>
+              <a:t>Read the summary</a:t>
+            </a:r>
+          </a:p>
+        </p:txBody>
+      </p:sp>
+      <p:sp>
+        <p:nvSpPr>
+          <p:cNvPr id="23" name="TextBox 22"/>
+          <p:cNvSpPr txBox="1"/>
+          <p:nvPr/>
+        </p:nvSpPr>
+        <p:spPr>
+          <a:xfrm>
+            <a:off x="4572000" y="3081528"/>
+            <a:ext cx="3035808" cy="2148839"/>
+          </a:xfrm>
+          <a:prstGeom prst="rect">
+            <a:avLst/>
+          </a:prstGeom>
+          <a:noFill/>
+        </p:spPr>
+        <p:txBody>
+          <a:bodyPr wrap="square" lIns="18288" rIns="18288" tIns="18288" bIns="18288" anchor="t">
+            <a:spAutoFit/>
+          </a:bodyPr>
+          <a:lstStyle/>
+          <a:p>
+            <a:pPr algn="l">
+              <a:defRPr sz="1700" b="0">
+                <a:solidFill>
+                  <a:srgbClr val="21232B"/>
+                </a:solidFill>
+                <a:latin typeface="Avenir Next"/>
+              </a:defRPr>
+            </a:pPr>
+            <a:r>
+              <a:t>Inspect spending totals, categories and receipt counts. Scroll to the expense log for individual entries.</a:t>
+            </a:r>
+          </a:p>
+        </p:txBody>
+      </p:sp>
+      <p:sp>
+        <p:nvSpPr>
+          <p:cNvPr id="24" name="Rounded Rectangle 23"/>
+          <p:cNvSpPr/>
+          <p:nvPr/>
+        </p:nvSpPr>
+        <p:spPr>
+          <a:xfrm>
+            <a:off x="8101583" y="2148840"/>
+            <a:ext cx="3547872" cy="3264408"/>
+          </a:xfrm>
+          <a:prstGeom prst="roundRect">
+            <a:avLst>
+              <a:gd name="adj" fmla="val 8000"/>
+            </a:avLst>
+          </a:prstGeom>
+          <a:solidFill>
+            <a:srgbClr val="FFFFFF"/>
+          </a:solidFill>
+          <a:ln>
+            <a:solidFill>
+              <a:srgbClr val="DCD7CD"/>
+            </a:solidFill>
+          </a:ln>
+        </p:spPr>
+        <p:style>
+          <a:lnRef idx="1">
+            <a:schemeClr val="accent1"/>
+          </a:lnRef>
+          <a:fillRef idx="3">
+            <a:schemeClr val="accent1"/>
+          </a:fillRef>
+          <a:effectRef idx="2">
+            <a:schemeClr val="accent1"/>
+          </a:effectRef>
+          <a:fontRef idx="minor">
+            <a:schemeClr val="lt1"/>
+          </a:fontRef>
+        </p:style>
+        <p:txBody>
+          <a:bodyPr rtlCol="0" anchor="ctr"/>
+          <a:lstStyle/>
+          <a:p>
+            <a:pPr algn="ctr"/>
+          </a:p>
+        </p:txBody>
+      </p:sp>
+      <p:sp>
+        <p:nvSpPr>
+          <p:cNvPr id="25" name="Rectangle 24"/>
+          <p:cNvSpPr/>
+          <p:nvPr/>
+        </p:nvSpPr>
+        <p:spPr>
+          <a:xfrm>
+            <a:off x="8101583" y="2148840"/>
+            <a:ext cx="3547872" cy="68580"/>
+          </a:xfrm>
+          <a:prstGeom prst="rect">
+            <a:avLst/>
+          </a:prstGeom>
+          <a:solidFill>
+            <a:srgbClr val="E86F56"/>
+          </a:solidFill>
+          <a:ln>
+            <a:noFill/>
+          </a:ln>
+        </p:spPr>
+        <p:style>
+          <a:lnRef idx="1">
+            <a:schemeClr val="accent1"/>
+          </a:lnRef>
+          <a:fillRef idx="3">
+            <a:schemeClr val="accent1"/>
+          </a:fillRef>
+          <a:effectRef idx="2">
+            <a:schemeClr val="accent1"/>
+          </a:effectRef>
+          <a:fontRef idx="minor">
+            <a:schemeClr val="lt1"/>
+          </a:fontRef>
+        </p:style>
+        <p:txBody>
+          <a:bodyPr rtlCol="0" anchor="ctr"/>
+          <a:lstStyle/>
+          <a:p>
+            <a:pPr algn="ctr"/>
+          </a:p>
+        </p:txBody>
+      </p:sp>
+      <p:sp>
+        <p:nvSpPr>
+          <p:cNvPr id="26" name="Rounded Rectangle 25"/>
+          <p:cNvSpPr/>
+          <p:nvPr/>
+        </p:nvSpPr>
+        <p:spPr>
+          <a:xfrm>
+            <a:off x="8330183" y="2395728"/>
+            <a:ext cx="457200" cy="457200"/>
+          </a:xfrm>
+          <a:prstGeom prst="roundRect">
+            <a:avLst>
+              <a:gd name="adj" fmla="val 8000"/>
+            </a:avLst>
+          </a:prstGeom>
+          <a:solidFill>
+            <a:srgbClr val="E86F56"/>
+          </a:solidFill>
+          <a:ln>
+            <a:noFill/>
+          </a:ln>
+        </p:spPr>
+        <p:style>
+          <a:lnRef idx="1">
+            <a:schemeClr val="accent1"/>
+          </a:lnRef>
+          <a:fillRef idx="3">
+            <a:schemeClr val="accent1"/>
+          </a:fillRef>
+          <a:effectRef idx="2">
+            <a:schemeClr val="accent1"/>
+          </a:effectRef>
+          <a:fontRef idx="minor">
+            <a:schemeClr val="lt1"/>
+          </a:fontRef>
+        </p:style>
+        <p:txBody>
+          <a:bodyPr rtlCol="0" anchor="ctr"/>
+          <a:lstStyle/>
+          <a:p>
+            <a:pPr algn="ctr"/>
+          </a:p>
+        </p:txBody>
+      </p:sp>
+      <p:sp>
+        <p:nvSpPr>
+          <p:cNvPr id="27" name="TextBox 26"/>
+          <p:cNvSpPr txBox="1"/>
+          <p:nvPr/>
+        </p:nvSpPr>
+        <p:spPr>
+          <a:xfrm>
+            <a:off x="8330183" y="2459736"/>
+            <a:ext cx="457200" cy="201168"/>
+          </a:xfrm>
+          <a:prstGeom prst="rect">
+            <a:avLst/>
+          </a:prstGeom>
+          <a:noFill/>
+        </p:spPr>
+        <p:txBody>
+          <a:bodyPr wrap="square" lIns="18288" rIns="18288" tIns="18288" bIns="18288" anchor="t">
+            <a:spAutoFit/>
+          </a:bodyPr>
+          <a:lstStyle/>
+          <a:p>
+            <a:pPr algn="ctr">
+              <a:defRPr sz="1600" b="1">
+                <a:solidFill>
+                  <a:srgbClr val="FFFFFF"/>
+                </a:solidFill>
+                <a:latin typeface="Avenir Next"/>
+              </a:defRPr>
+            </a:pPr>
+            <a:r>
+              <a:t>3</a:t>
+            </a:r>
+          </a:p>
+        </p:txBody>
+      </p:sp>
+      <p:sp>
+        <p:nvSpPr>
+          <p:cNvPr id="28" name="TextBox 27"/>
+          <p:cNvSpPr txBox="1"/>
+          <p:nvPr/>
+        </p:nvSpPr>
+        <p:spPr>
+          <a:xfrm>
+            <a:off x="8924544" y="2395728"/>
+            <a:ext cx="2487168" cy="512064"/>
+          </a:xfrm>
+          <a:prstGeom prst="rect">
+            <a:avLst/>
+          </a:prstGeom>
+          <a:noFill/>
+        </p:spPr>
+        <p:txBody>
+          <a:bodyPr wrap="square" lIns="18288" rIns="18288" tIns="18288" bIns="18288" anchor="t">
+            <a:spAutoFit/>
+          </a:bodyPr>
+          <a:lstStyle/>
+          <a:p>
+            <a:pPr algn="l">
+              <a:defRPr sz="2100" b="1">
+                <a:solidFill>
+                  <a:srgbClr val="21232B"/>
+                </a:solidFill>
+                <a:latin typeface="Avenir Next"/>
+              </a:defRPr>
+            </a:pPr>
+            <a:r>
+              <a:t>Inspect evidence</a:t>
+            </a:r>
+          </a:p>
+        </p:txBody>
+      </p:sp>
+      <p:sp>
+        <p:nvSpPr>
+          <p:cNvPr id="29" name="TextBox 28"/>
+          <p:cNvSpPr txBox="1"/>
+          <p:nvPr/>
+        </p:nvSpPr>
+        <p:spPr>
+          <a:xfrm>
+            <a:off x="8357615" y="3081528"/>
+            <a:ext cx="3035808" cy="2148839"/>
+          </a:xfrm>
+          <a:prstGeom prst="rect">
+            <a:avLst/>
+          </a:prstGeom>
+          <a:noFill/>
+        </p:spPr>
+        <p:txBody>
+          <a:bodyPr wrap="square" lIns="18288" rIns="18288" tIns="18288" bIns="18288" anchor="t">
+            <a:spAutoFit/>
+          </a:bodyPr>
+          <a:lstStyle/>
+          <a:p>
+            <a:pPr algn="l">
+              <a:defRPr sz="1700" b="0">
+                <a:solidFill>
+                  <a:srgbClr val="21232B"/>
+                </a:solidFill>
+                <a:latin typeface="Avenir Next"/>
+              </a:defRPr>
+            </a:pPr>
+            <a:r>
+              <a:t>Open an entry to check merchant, amount, date and receipt. If a detail is wrong, correct it in chat.</a:t>
+            </a:r>
+          </a:p>
+        </p:txBody>
+      </p:sp>
+      <p:sp>
+        <p:nvSpPr>
+          <p:cNvPr id="30" name="Rounded Rectangle 29"/>
+          <p:cNvSpPr/>
+          <p:nvPr/>
+        </p:nvSpPr>
+        <p:spPr>
+          <a:xfrm>
+            <a:off x="521207" y="5833872"/>
+            <a:ext cx="11128248" cy="438912"/>
+          </a:xfrm>
+          <a:prstGeom prst="roundRect">
+            <a:avLst>
+              <a:gd name="adj" fmla="val 8000"/>
+            </a:avLst>
+          </a:prstGeom>
+          <a:solidFill>
+            <a:srgbClr val="EEEADF"/>
+          </a:solidFill>
+          <a:ln>
+            <a:noFill/>
+          </a:ln>
+        </p:spPr>
+        <p:style>
+          <a:lnRef idx="1">
+            <a:schemeClr val="accent1"/>
+          </a:lnRef>
+          <a:fillRef idx="3">
+            <a:schemeClr val="accent1"/>
+          </a:fillRef>
+          <a:effectRef idx="2">
+            <a:schemeClr val="accent1"/>
+          </a:effectRef>
+          <a:fontRef idx="minor">
+            <a:schemeClr val="lt1"/>
+          </a:fontRef>
+        </p:style>
+        <p:txBody>
+          <a:bodyPr rtlCol="0" anchor="ctr"/>
+          <a:lstStyle/>
+          <a:p>
+            <a:pPr algn="ctr"/>
+          </a:p>
+        </p:txBody>
+      </p:sp>
+      <p:sp>
+        <p:nvSpPr>
+          <p:cNvPr id="31" name="Rectangle 30"/>
+          <p:cNvSpPr/>
+          <p:nvPr/>
+        </p:nvSpPr>
+        <p:spPr>
+          <a:xfrm>
+            <a:off x="521207" y="5833872"/>
+            <a:ext cx="73152" cy="438912"/>
+          </a:xfrm>
+          <a:prstGeom prst="rect">
+            <a:avLst/>
+          </a:prstGeom>
+          <a:solidFill>
+            <a:srgbClr val="DFA538"/>
+          </a:solidFill>
+          <a:ln>
+            <a:noFill/>
+          </a:ln>
+        </p:spPr>
+        <p:style>
+          <a:lnRef idx="1">
+            <a:schemeClr val="accent1"/>
+          </a:lnRef>
+          <a:fillRef idx="3">
+            <a:schemeClr val="accent1"/>
+          </a:fillRef>
+          <a:effectRef idx="2">
+            <a:schemeClr val="accent1"/>
+          </a:effectRef>
+          <a:fontRef idx="minor">
+            <a:schemeClr val="lt1"/>
+          </a:fontRef>
+        </p:style>
+        <p:txBody>
+          <a:bodyPr rtlCol="0" anchor="ctr"/>
+          <a:lstStyle/>
+          <a:p>
+            <a:pPr algn="ctr"/>
+          </a:p>
+        </p:txBody>
+      </p:sp>
+      <p:sp>
+        <p:nvSpPr>
+          <p:cNvPr id="32" name="TextBox 31"/>
+          <p:cNvSpPr txBox="1"/>
+          <p:nvPr/>
+        </p:nvSpPr>
+        <p:spPr>
+          <a:xfrm>
+            <a:off x="713232" y="5925312"/>
+            <a:ext cx="10698480" cy="265176"/>
+          </a:xfrm>
+          <a:prstGeom prst="rect">
+            <a:avLst/>
+          </a:prstGeom>
+          <a:noFill/>
+        </p:spPr>
+        <p:txBody>
+          <a:bodyPr wrap="square" lIns="18288" rIns="18288" tIns="18288" bIns="18288" anchor="t">
+            <a:spAutoFit/>
+          </a:bodyPr>
+          <a:lstStyle/>
+          <a:p>
+            <a:pPr algn="l">
+              <a:defRPr sz="1400" b="0">
+                <a:solidFill>
+                  <a:srgbClr val="21232B"/>
+                </a:solidFill>
+                <a:latin typeface="Avenir Next"/>
+              </a:defRPr>
+            </a:pPr>
+            <a:r>
+              <a:t>Prepared example: Corner Bakery · 4 October 2026 · S$9.60.</a:t>
             </a:r>
           </a:p>
         </p:txBody>

--- a/docs/judge-walkthrough.pptx
+++ b/docs/judge-walkthrough.pptx
@@ -13,10 +13,6 @@
     <p:sldId id="261" r:id="rId12"/>
     <p:sldId id="262" r:id="rId13"/>
     <p:sldId id="263" r:id="rId14"/>
-    <p:sldId id="264" r:id="rId15"/>
-    <p:sldId id="265" r:id="rId16"/>
-    <p:sldId id="266" r:id="rId17"/>
-    <p:sldId id="267" r:id="rId18"/>
   </p:sldIdLst>
   <p:sldSz cx="12191695" cy="6858000" type="screen4x3"/>
   <p:notesSz cx="6858000" cy="9144000"/>
@@ -3252,7 +3248,7 @@
               </a:defRPr>
             </a:pPr>
             <a:r>
-              <a:t>JUDGE WALKTHROUGH</a:t>
+              <a:t>JUDGE USER MANUAL</a:t>
             </a:r>
           </a:p>
         </p:txBody>
@@ -3967,3762 +3963,6 @@
             </a:pPr>
             <a:r>
               <a:t>Use the private QA build and reviewer credentials provided with the submission.</a:t>
-            </a:r>
-          </a:p>
-        </p:txBody>
-      </p:sp>
-    </p:spTree>
-  </p:cSld>
-  <p:clrMapOvr>
-    <a:masterClrMapping/>
-  </p:clrMapOvr>
-</p:sld>
-</file>
-
-<file path=ppt/slides/slide10.xml><?xml version="1.0" encoding="utf-8"?>
-<p:sld xmlns:a="http://schemas.openxmlformats.org/drawingml/2006/main" xmlns:p="http://schemas.openxmlformats.org/presentationml/2006/main" xmlns:r="http://schemas.openxmlformats.org/officeDocument/2006/relationships">
-  <p:cSld>
-    <p:spTree>
-      <p:nvGrpSpPr>
-        <p:cNvPr id="1" name=""/>
-        <p:cNvGrpSpPr/>
-        <p:nvPr/>
-      </p:nvGrpSpPr>
-      <p:grpSpPr/>
-      <p:sp>
-        <p:nvSpPr>
-          <p:cNvPr id="2" name="Rectangle 1"/>
-          <p:cNvSpPr/>
-          <p:nvPr/>
-        </p:nvSpPr>
-        <p:spPr>
-          <a:xfrm>
-            <a:off x="0" y="0"/>
-            <a:ext cx="12191695" cy="6858000"/>
-          </a:xfrm>
-          <a:prstGeom prst="rect">
-            <a:avLst/>
-          </a:prstGeom>
-          <a:solidFill>
-            <a:srgbClr val="F8F5EC"/>
-          </a:solidFill>
-          <a:ln>
-            <a:noFill/>
-          </a:ln>
-        </p:spPr>
-        <p:style>
-          <a:lnRef idx="1">
-            <a:schemeClr val="accent1"/>
-          </a:lnRef>
-          <a:fillRef idx="3">
-            <a:schemeClr val="accent1"/>
-          </a:fillRef>
-          <a:effectRef idx="2">
-            <a:schemeClr val="accent1"/>
-          </a:effectRef>
-          <a:fontRef idx="minor">
-            <a:schemeClr val="lt1"/>
-          </a:fontRef>
-        </p:style>
-        <p:txBody>
-          <a:bodyPr rtlCol="0" anchor="ctr"/>
-          <a:lstStyle/>
-          <a:p>
-            <a:pPr algn="ctr"/>
-          </a:p>
-        </p:txBody>
-      </p:sp>
-      <p:sp>
-        <p:nvSpPr>
-          <p:cNvPr id="3" name="Rectangle 2"/>
-          <p:cNvSpPr/>
-          <p:nvPr/>
-        </p:nvSpPr>
-        <p:spPr>
-          <a:xfrm>
-            <a:off x="0" y="0"/>
-            <a:ext cx="12191695" cy="585216"/>
-          </a:xfrm>
-          <a:prstGeom prst="rect">
-            <a:avLst/>
-          </a:prstGeom>
-          <a:solidFill>
-            <a:srgbClr val="08090C"/>
-          </a:solidFill>
-          <a:ln>
-            <a:noFill/>
-          </a:ln>
-        </p:spPr>
-        <p:style>
-          <a:lnRef idx="1">
-            <a:schemeClr val="accent1"/>
-          </a:lnRef>
-          <a:fillRef idx="3">
-            <a:schemeClr val="accent1"/>
-          </a:fillRef>
-          <a:effectRef idx="2">
-            <a:schemeClr val="accent1"/>
-          </a:effectRef>
-          <a:fontRef idx="minor">
-            <a:schemeClr val="lt1"/>
-          </a:fontRef>
-        </p:style>
-        <p:txBody>
-          <a:bodyPr rtlCol="0" anchor="ctr"/>
-          <a:lstStyle/>
-          <a:p>
-            <a:pPr algn="ctr"/>
-          </a:p>
-        </p:txBody>
-      </p:sp>
-      <p:sp>
-        <p:nvSpPr>
-          <p:cNvPr id="4" name="TextBox 3"/>
-          <p:cNvSpPr txBox="1"/>
-          <p:nvPr/>
-        </p:nvSpPr>
-        <p:spPr>
-          <a:xfrm>
-            <a:off x="512064" y="128016"/>
-            <a:ext cx="2011680" cy="283464"/>
-          </a:xfrm>
-          <a:prstGeom prst="rect">
-            <a:avLst/>
-          </a:prstGeom>
-          <a:noFill/>
-        </p:spPr>
-        <p:txBody>
-          <a:bodyPr wrap="square" lIns="18288" rIns="18288" tIns="18288" bIns="18288" anchor="t">
-            <a:spAutoFit/>
-          </a:bodyPr>
-          <a:lstStyle/>
-          <a:p>
-            <a:pPr algn="l">
-              <a:defRPr sz="1700" b="1">
-                <a:solidFill>
-                  <a:srgbClr val="FFFFFF"/>
-                </a:solidFill>
-                <a:latin typeface="Avenir Next"/>
-              </a:defRPr>
-            </a:pPr>
-            <a:r>
-              <a:t>PETAK</a:t>
-            </a:r>
-          </a:p>
-        </p:txBody>
-      </p:sp>
-      <p:sp>
-        <p:nvSpPr>
-          <p:cNvPr id="5" name="TextBox 4"/>
-          <p:cNvSpPr txBox="1"/>
-          <p:nvPr/>
-        </p:nvSpPr>
-        <p:spPr>
-          <a:xfrm>
-            <a:off x="3794760" y="155448"/>
-            <a:ext cx="4617720" cy="237744"/>
-          </a:xfrm>
-          <a:prstGeom prst="rect">
-            <a:avLst/>
-          </a:prstGeom>
-          <a:noFill/>
-        </p:spPr>
-        <p:txBody>
-          <a:bodyPr wrap="square" lIns="18288" rIns="18288" tIns="18288" bIns="18288" anchor="t">
-            <a:spAutoFit/>
-          </a:bodyPr>
-          <a:lstStyle/>
-          <a:p>
-            <a:pPr algn="ctr">
-              <a:defRPr sz="1300" b="1">
-                <a:solidFill>
-                  <a:srgbClr val="FFFFFF"/>
-                </a:solidFill>
-                <a:latin typeface="Avenir Next"/>
-              </a:defRPr>
-            </a:pPr>
-            <a:r>
-              <a:t>FEATURE REFERENCE</a:t>
-            </a:r>
-          </a:p>
-        </p:txBody>
-      </p:sp>
-      <p:sp>
-        <p:nvSpPr>
-          <p:cNvPr id="6" name="TextBox 5"/>
-          <p:cNvSpPr txBox="1"/>
-          <p:nvPr/>
-        </p:nvSpPr>
-        <p:spPr>
-          <a:xfrm>
-            <a:off x="9418320" y="164592"/>
-            <a:ext cx="2221992" cy="228600"/>
-          </a:xfrm>
-          <a:prstGeom prst="rect">
-            <a:avLst/>
-          </a:prstGeom>
-          <a:noFill/>
-        </p:spPr>
-        <p:txBody>
-          <a:bodyPr wrap="square" lIns="18288" rIns="18288" tIns="18288" bIns="18288" anchor="t">
-            <a:spAutoFit/>
-          </a:bodyPr>
-          <a:lstStyle/>
-          <a:p>
-            <a:pPr algn="r">
-              <a:defRPr sz="1100" b="1">
-                <a:solidFill>
-                  <a:srgbClr val="FFFFFF"/>
-                </a:solidFill>
-                <a:latin typeface="Avenir Next"/>
-              </a:defRPr>
-            </a:pPr>
-            <a:r>
-              <a:t>AI BUILDER CUP 2026</a:t>
-            </a:r>
-          </a:p>
-        </p:txBody>
-      </p:sp>
-      <p:sp>
-        <p:nvSpPr>
-          <p:cNvPr id="7" name="TextBox 6"/>
-          <p:cNvSpPr txBox="1"/>
-          <p:nvPr/>
-        </p:nvSpPr>
-        <p:spPr>
-          <a:xfrm>
-            <a:off x="512064" y="859536"/>
-            <a:ext cx="11064240" cy="594360"/>
-          </a:xfrm>
-          <a:prstGeom prst="rect">
-            <a:avLst/>
-          </a:prstGeom>
-          <a:noFill/>
-        </p:spPr>
-        <p:txBody>
-          <a:bodyPr wrap="square" lIns="18288" rIns="18288" tIns="18288" bIns="18288" anchor="t">
-            <a:spAutoFit/>
-          </a:bodyPr>
-          <a:lstStyle/>
-          <a:p>
-            <a:pPr algn="l">
-              <a:defRPr sz="3100" b="1">
-                <a:solidFill>
-                  <a:srgbClr val="21232B"/>
-                </a:solidFill>
-                <a:latin typeface="Avenir Next"/>
-              </a:defRPr>
-            </a:pPr>
-            <a:r>
-              <a:t>Milo: meals and nutrition</a:t>
-            </a:r>
-          </a:p>
-        </p:txBody>
-      </p:sp>
-      <p:sp>
-        <p:nvSpPr>
-          <p:cNvPr id="8" name="TextBox 7"/>
-          <p:cNvSpPr txBox="1"/>
-          <p:nvPr/>
-        </p:nvSpPr>
-        <p:spPr>
-          <a:xfrm>
-            <a:off x="530352" y="1517904"/>
-            <a:ext cx="10881360" cy="512064"/>
-          </a:xfrm>
-          <a:prstGeom prst="rect">
-            <a:avLst/>
-          </a:prstGeom>
-          <a:noFill/>
-        </p:spPr>
-        <p:txBody>
-          <a:bodyPr wrap="square" lIns="18288" rIns="18288" tIns="18288" bIns="18288" anchor="t">
-            <a:spAutoFit/>
-          </a:bodyPr>
-          <a:lstStyle/>
-          <a:p>
-            <a:pPr algn="l">
-              <a:defRPr sz="1600" b="0">
-                <a:solidFill>
-                  <a:srgbClr val="5B5E67"/>
-                </a:solidFill>
-                <a:latin typeface="Avenir Next"/>
-              </a:defRPr>
-            </a:pPr>
-            <a:r>
-              <a:t>The food log shows what Milo saved from text and photos.</a:t>
-            </a:r>
-          </a:p>
-        </p:txBody>
-      </p:sp>
-      <p:sp>
-        <p:nvSpPr>
-          <p:cNvPr id="9" name="Rectangle 8"/>
-          <p:cNvSpPr/>
-          <p:nvPr/>
-        </p:nvSpPr>
-        <p:spPr>
-          <a:xfrm>
-            <a:off x="502920" y="6519672"/>
-            <a:ext cx="11155680" cy="13716"/>
-          </a:xfrm>
-          <a:prstGeom prst="rect">
-            <a:avLst/>
-          </a:prstGeom>
-          <a:solidFill>
-            <a:srgbClr val="DCD7CD"/>
-          </a:solidFill>
-          <a:ln>
-            <a:noFill/>
-          </a:ln>
-        </p:spPr>
-        <p:style>
-          <a:lnRef idx="1">
-            <a:schemeClr val="accent1"/>
-          </a:lnRef>
-          <a:fillRef idx="3">
-            <a:schemeClr val="accent1"/>
-          </a:fillRef>
-          <a:effectRef idx="2">
-            <a:schemeClr val="accent1"/>
-          </a:effectRef>
-          <a:fontRef idx="minor">
-            <a:schemeClr val="lt1"/>
-          </a:fontRef>
-        </p:style>
-        <p:txBody>
-          <a:bodyPr rtlCol="0" anchor="ctr"/>
-          <a:lstStyle/>
-          <a:p>
-            <a:pPr algn="ctr"/>
-          </a:p>
-        </p:txBody>
-      </p:sp>
-      <p:sp>
-        <p:nvSpPr>
-          <p:cNvPr id="10" name="TextBox 9"/>
-          <p:cNvSpPr txBox="1"/>
-          <p:nvPr/>
-        </p:nvSpPr>
-        <p:spPr>
-          <a:xfrm>
-            <a:off x="530352" y="6574536"/>
-            <a:ext cx="8412480" cy="182880"/>
-          </a:xfrm>
-          <a:prstGeom prst="rect">
-            <a:avLst/>
-          </a:prstGeom>
-          <a:noFill/>
-        </p:spPr>
-        <p:txBody>
-          <a:bodyPr wrap="square" lIns="18288" rIns="18288" tIns="18288" bIns="18288" anchor="t">
-            <a:spAutoFit/>
-          </a:bodyPr>
-          <a:lstStyle/>
-          <a:p>
-            <a:pPr algn="l">
-              <a:defRPr sz="1000" b="0">
-                <a:solidFill>
-                  <a:srgbClr val="5B5E67"/>
-                </a:solidFill>
-                <a:latin typeface="Avenir Next"/>
-              </a:defRPr>
-            </a:pPr>
-            <a:r>
-              <a:t>Petak QA · use the reviewer access supplied separately</a:t>
-            </a:r>
-          </a:p>
-        </p:txBody>
-      </p:sp>
-      <p:sp>
-        <p:nvSpPr>
-          <p:cNvPr id="11" name="TextBox 10"/>
-          <p:cNvSpPr txBox="1"/>
-          <p:nvPr/>
-        </p:nvSpPr>
-        <p:spPr>
-          <a:xfrm>
-            <a:off x="11128248" y="6556248"/>
-            <a:ext cx="502920" cy="219456"/>
-          </a:xfrm>
-          <a:prstGeom prst="rect">
-            <a:avLst/>
-          </a:prstGeom>
-          <a:noFill/>
-        </p:spPr>
-        <p:txBody>
-          <a:bodyPr wrap="square" lIns="18288" rIns="18288" tIns="18288" bIns="18288" anchor="t">
-            <a:spAutoFit/>
-          </a:bodyPr>
-          <a:lstStyle/>
-          <a:p>
-            <a:pPr algn="r">
-              <a:defRPr sz="1100" b="1">
-                <a:solidFill>
-                  <a:srgbClr val="5B5E67"/>
-                </a:solidFill>
-                <a:latin typeface="Avenir Next"/>
-              </a:defRPr>
-            </a:pPr>
-            <a:r>
-              <a:t>10</a:t>
-            </a:r>
-          </a:p>
-        </p:txBody>
-      </p:sp>
-      <p:sp>
-        <p:nvSpPr>
-          <p:cNvPr id="12" name="Rounded Rectangle 11"/>
-          <p:cNvSpPr/>
-          <p:nvPr/>
-        </p:nvSpPr>
-        <p:spPr>
-          <a:xfrm>
-            <a:off x="530352" y="2148840"/>
-            <a:ext cx="3547872" cy="3264408"/>
-          </a:xfrm>
-          <a:prstGeom prst="roundRect">
-            <a:avLst>
-              <a:gd name="adj" fmla="val 8000"/>
-            </a:avLst>
-          </a:prstGeom>
-          <a:solidFill>
-            <a:srgbClr val="FFFFFF"/>
-          </a:solidFill>
-          <a:ln>
-            <a:solidFill>
-              <a:srgbClr val="DCD7CD"/>
-            </a:solidFill>
-          </a:ln>
-        </p:spPr>
-        <p:style>
-          <a:lnRef idx="1">
-            <a:schemeClr val="accent1"/>
-          </a:lnRef>
-          <a:fillRef idx="3">
-            <a:schemeClr val="accent1"/>
-          </a:fillRef>
-          <a:effectRef idx="2">
-            <a:schemeClr val="accent1"/>
-          </a:effectRef>
-          <a:fontRef idx="minor">
-            <a:schemeClr val="lt1"/>
-          </a:fontRef>
-        </p:style>
-        <p:txBody>
-          <a:bodyPr rtlCol="0" anchor="ctr"/>
-          <a:lstStyle/>
-          <a:p>
-            <a:pPr algn="ctr"/>
-          </a:p>
-        </p:txBody>
-      </p:sp>
-      <p:sp>
-        <p:nvSpPr>
-          <p:cNvPr id="13" name="Rectangle 12"/>
-          <p:cNvSpPr/>
-          <p:nvPr/>
-        </p:nvSpPr>
-        <p:spPr>
-          <a:xfrm>
-            <a:off x="530352" y="2148840"/>
-            <a:ext cx="3547872" cy="68580"/>
-          </a:xfrm>
-          <a:prstGeom prst="rect">
-            <a:avLst/>
-          </a:prstGeom>
-          <a:solidFill>
-            <a:srgbClr val="E86F56"/>
-          </a:solidFill>
-          <a:ln>
-            <a:noFill/>
-          </a:ln>
-        </p:spPr>
-        <p:style>
-          <a:lnRef idx="1">
-            <a:schemeClr val="accent1"/>
-          </a:lnRef>
-          <a:fillRef idx="3">
-            <a:schemeClr val="accent1"/>
-          </a:fillRef>
-          <a:effectRef idx="2">
-            <a:schemeClr val="accent1"/>
-          </a:effectRef>
-          <a:fontRef idx="minor">
-            <a:schemeClr val="lt1"/>
-          </a:fontRef>
-        </p:style>
-        <p:txBody>
-          <a:bodyPr rtlCol="0" anchor="ctr"/>
-          <a:lstStyle/>
-          <a:p>
-            <a:pPr algn="ctr"/>
-          </a:p>
-        </p:txBody>
-      </p:sp>
-      <p:sp>
-        <p:nvSpPr>
-          <p:cNvPr id="14" name="Rounded Rectangle 13"/>
-          <p:cNvSpPr/>
-          <p:nvPr/>
-        </p:nvSpPr>
-        <p:spPr>
-          <a:xfrm>
-            <a:off x="758952" y="2395728"/>
-            <a:ext cx="457200" cy="457200"/>
-          </a:xfrm>
-          <a:prstGeom prst="roundRect">
-            <a:avLst>
-              <a:gd name="adj" fmla="val 8000"/>
-            </a:avLst>
-          </a:prstGeom>
-          <a:solidFill>
-            <a:srgbClr val="E86F56"/>
-          </a:solidFill>
-          <a:ln>
-            <a:noFill/>
-          </a:ln>
-        </p:spPr>
-        <p:style>
-          <a:lnRef idx="1">
-            <a:schemeClr val="accent1"/>
-          </a:lnRef>
-          <a:fillRef idx="3">
-            <a:schemeClr val="accent1"/>
-          </a:fillRef>
-          <a:effectRef idx="2">
-            <a:schemeClr val="accent1"/>
-          </a:effectRef>
-          <a:fontRef idx="minor">
-            <a:schemeClr val="lt1"/>
-          </a:fontRef>
-        </p:style>
-        <p:txBody>
-          <a:bodyPr rtlCol="0" anchor="ctr"/>
-          <a:lstStyle/>
-          <a:p>
-            <a:pPr algn="ctr"/>
-          </a:p>
-        </p:txBody>
-      </p:sp>
-      <p:sp>
-        <p:nvSpPr>
-          <p:cNvPr id="15" name="TextBox 14"/>
-          <p:cNvSpPr txBox="1"/>
-          <p:nvPr/>
-        </p:nvSpPr>
-        <p:spPr>
-          <a:xfrm>
-            <a:off x="758952" y="2459736"/>
-            <a:ext cx="457200" cy="201168"/>
-          </a:xfrm>
-          <a:prstGeom prst="rect">
-            <a:avLst/>
-          </a:prstGeom>
-          <a:noFill/>
-        </p:spPr>
-        <p:txBody>
-          <a:bodyPr wrap="square" lIns="18288" rIns="18288" tIns="18288" bIns="18288" anchor="t">
-            <a:spAutoFit/>
-          </a:bodyPr>
-          <a:lstStyle/>
-          <a:p>
-            <a:pPr algn="ctr">
-              <a:defRPr sz="1600" b="1">
-                <a:solidFill>
-                  <a:srgbClr val="FFFFFF"/>
-                </a:solidFill>
-                <a:latin typeface="Avenir Next"/>
-              </a:defRPr>
-            </a:pPr>
-            <a:r>
-              <a:t>1</a:t>
-            </a:r>
-          </a:p>
-        </p:txBody>
-      </p:sp>
-      <p:sp>
-        <p:nvSpPr>
-          <p:cNvPr id="16" name="TextBox 15"/>
-          <p:cNvSpPr txBox="1"/>
-          <p:nvPr/>
-        </p:nvSpPr>
-        <p:spPr>
-          <a:xfrm>
-            <a:off x="1353312" y="2395728"/>
-            <a:ext cx="2487168" cy="512064"/>
-          </a:xfrm>
-          <a:prstGeom prst="rect">
-            <a:avLst/>
-          </a:prstGeom>
-          <a:noFill/>
-        </p:spPr>
-        <p:txBody>
-          <a:bodyPr wrap="square" lIns="18288" rIns="18288" tIns="18288" bIns="18288" anchor="t">
-            <a:spAutoFit/>
-          </a:bodyPr>
-          <a:lstStyle/>
-          <a:p>
-            <a:pPr algn="l">
-              <a:defRPr sz="2100" b="1">
-                <a:solidFill>
-                  <a:srgbClr val="21232B"/>
-                </a:solidFill>
-                <a:latin typeface="Avenir Next"/>
-              </a:defRPr>
-            </a:pPr>
-            <a:r>
-              <a:t>Choose a range</a:t>
-            </a:r>
-          </a:p>
-        </p:txBody>
-      </p:sp>
-      <p:sp>
-        <p:nvSpPr>
-          <p:cNvPr id="17" name="TextBox 16"/>
-          <p:cNvSpPr txBox="1"/>
-          <p:nvPr/>
-        </p:nvSpPr>
-        <p:spPr>
-          <a:xfrm>
-            <a:off x="786384" y="3081528"/>
-            <a:ext cx="3035808" cy="2148839"/>
-          </a:xfrm>
-          <a:prstGeom prst="rect">
-            <a:avLst/>
-          </a:prstGeom>
-          <a:noFill/>
-        </p:spPr>
-        <p:txBody>
-          <a:bodyPr wrap="square" lIns="18288" rIns="18288" tIns="18288" bIns="18288" anchor="t">
-            <a:spAutoFit/>
-          </a:bodyPr>
-          <a:lstStyle/>
-          <a:p>
-            <a:pPr algn="l">
-              <a:defRPr sz="1700" b="0">
-                <a:solidFill>
-                  <a:srgbClr val="21232B"/>
-                </a:solidFill>
-                <a:latin typeface="Avenir Next"/>
-              </a:defRPr>
-            </a:pPr>
-            <a:r>
-              <a:t>Open Milo from the menu. Use the date controls to move between recent and historical meals.</a:t>
-            </a:r>
-          </a:p>
-        </p:txBody>
-      </p:sp>
-      <p:sp>
-        <p:nvSpPr>
-          <p:cNvPr id="18" name="Rounded Rectangle 17"/>
-          <p:cNvSpPr/>
-          <p:nvPr/>
-        </p:nvSpPr>
-        <p:spPr>
-          <a:xfrm>
-            <a:off x="4315968" y="2148840"/>
-            <a:ext cx="3547872" cy="3264408"/>
-          </a:xfrm>
-          <a:prstGeom prst="roundRect">
-            <a:avLst>
-              <a:gd name="adj" fmla="val 8000"/>
-            </a:avLst>
-          </a:prstGeom>
-          <a:solidFill>
-            <a:srgbClr val="FFFFFF"/>
-          </a:solidFill>
-          <a:ln>
-            <a:solidFill>
-              <a:srgbClr val="DCD7CD"/>
-            </a:solidFill>
-          </a:ln>
-        </p:spPr>
-        <p:style>
-          <a:lnRef idx="1">
-            <a:schemeClr val="accent1"/>
-          </a:lnRef>
-          <a:fillRef idx="3">
-            <a:schemeClr val="accent1"/>
-          </a:fillRef>
-          <a:effectRef idx="2">
-            <a:schemeClr val="accent1"/>
-          </a:effectRef>
-          <a:fontRef idx="minor">
-            <a:schemeClr val="lt1"/>
-          </a:fontRef>
-        </p:style>
-        <p:txBody>
-          <a:bodyPr rtlCol="0" anchor="ctr"/>
-          <a:lstStyle/>
-          <a:p>
-            <a:pPr algn="ctr"/>
-          </a:p>
-        </p:txBody>
-      </p:sp>
-      <p:sp>
-        <p:nvSpPr>
-          <p:cNvPr id="19" name="Rectangle 18"/>
-          <p:cNvSpPr/>
-          <p:nvPr/>
-        </p:nvSpPr>
-        <p:spPr>
-          <a:xfrm>
-            <a:off x="4315968" y="2148840"/>
-            <a:ext cx="3547872" cy="68580"/>
-          </a:xfrm>
-          <a:prstGeom prst="rect">
-            <a:avLst/>
-          </a:prstGeom>
-          <a:solidFill>
-            <a:srgbClr val="21A391"/>
-          </a:solidFill>
-          <a:ln>
-            <a:noFill/>
-          </a:ln>
-        </p:spPr>
-        <p:style>
-          <a:lnRef idx="1">
-            <a:schemeClr val="accent1"/>
-          </a:lnRef>
-          <a:fillRef idx="3">
-            <a:schemeClr val="accent1"/>
-          </a:fillRef>
-          <a:effectRef idx="2">
-            <a:schemeClr val="accent1"/>
-          </a:effectRef>
-          <a:fontRef idx="minor">
-            <a:schemeClr val="lt1"/>
-          </a:fontRef>
-        </p:style>
-        <p:txBody>
-          <a:bodyPr rtlCol="0" anchor="ctr"/>
-          <a:lstStyle/>
-          <a:p>
-            <a:pPr algn="ctr"/>
-          </a:p>
-        </p:txBody>
-      </p:sp>
-      <p:sp>
-        <p:nvSpPr>
-          <p:cNvPr id="20" name="Rounded Rectangle 19"/>
-          <p:cNvSpPr/>
-          <p:nvPr/>
-        </p:nvSpPr>
-        <p:spPr>
-          <a:xfrm>
-            <a:off x="4544568" y="2395728"/>
-            <a:ext cx="457200" cy="457200"/>
-          </a:xfrm>
-          <a:prstGeom prst="roundRect">
-            <a:avLst>
-              <a:gd name="adj" fmla="val 8000"/>
-            </a:avLst>
-          </a:prstGeom>
-          <a:solidFill>
-            <a:srgbClr val="21A391"/>
-          </a:solidFill>
-          <a:ln>
-            <a:noFill/>
-          </a:ln>
-        </p:spPr>
-        <p:style>
-          <a:lnRef idx="1">
-            <a:schemeClr val="accent1"/>
-          </a:lnRef>
-          <a:fillRef idx="3">
-            <a:schemeClr val="accent1"/>
-          </a:fillRef>
-          <a:effectRef idx="2">
-            <a:schemeClr val="accent1"/>
-          </a:effectRef>
-          <a:fontRef idx="minor">
-            <a:schemeClr val="lt1"/>
-          </a:fontRef>
-        </p:style>
-        <p:txBody>
-          <a:bodyPr rtlCol="0" anchor="ctr"/>
-          <a:lstStyle/>
-          <a:p>
-            <a:pPr algn="ctr"/>
-          </a:p>
-        </p:txBody>
-      </p:sp>
-      <p:sp>
-        <p:nvSpPr>
-          <p:cNvPr id="21" name="TextBox 20"/>
-          <p:cNvSpPr txBox="1"/>
-          <p:nvPr/>
-        </p:nvSpPr>
-        <p:spPr>
-          <a:xfrm>
-            <a:off x="4544568" y="2459736"/>
-            <a:ext cx="457200" cy="201168"/>
-          </a:xfrm>
-          <a:prstGeom prst="rect">
-            <a:avLst/>
-          </a:prstGeom>
-          <a:noFill/>
-        </p:spPr>
-        <p:txBody>
-          <a:bodyPr wrap="square" lIns="18288" rIns="18288" tIns="18288" bIns="18288" anchor="t">
-            <a:spAutoFit/>
-          </a:bodyPr>
-          <a:lstStyle/>
-          <a:p>
-            <a:pPr algn="ctr">
-              <a:defRPr sz="1600" b="1">
-                <a:solidFill>
-                  <a:srgbClr val="FFFFFF"/>
-                </a:solidFill>
-                <a:latin typeface="Avenir Next"/>
-              </a:defRPr>
-            </a:pPr>
-            <a:r>
-              <a:t>2</a:t>
-            </a:r>
-          </a:p>
-        </p:txBody>
-      </p:sp>
-      <p:sp>
-        <p:nvSpPr>
-          <p:cNvPr id="22" name="TextBox 21"/>
-          <p:cNvSpPr txBox="1"/>
-          <p:nvPr/>
-        </p:nvSpPr>
-        <p:spPr>
-          <a:xfrm>
-            <a:off x="5138928" y="2395728"/>
-            <a:ext cx="2487168" cy="512064"/>
-          </a:xfrm>
-          <a:prstGeom prst="rect">
-            <a:avLst/>
-          </a:prstGeom>
-          <a:noFill/>
-        </p:spPr>
-        <p:txBody>
-          <a:bodyPr wrap="square" lIns="18288" rIns="18288" tIns="18288" bIns="18288" anchor="t">
-            <a:spAutoFit/>
-          </a:bodyPr>
-          <a:lstStyle/>
-          <a:p>
-            <a:pPr algn="l">
-              <a:defRPr sz="2100" b="1">
-                <a:solidFill>
-                  <a:srgbClr val="21232B"/>
-                </a:solidFill>
-                <a:latin typeface="Avenir Next"/>
-              </a:defRPr>
-            </a:pPr>
-            <a:r>
-              <a:t>Inspect meals</a:t>
-            </a:r>
-          </a:p>
-        </p:txBody>
-      </p:sp>
-      <p:sp>
-        <p:nvSpPr>
-          <p:cNvPr id="23" name="TextBox 22"/>
-          <p:cNvSpPr txBox="1"/>
-          <p:nvPr/>
-        </p:nvSpPr>
-        <p:spPr>
-          <a:xfrm>
-            <a:off x="4572000" y="3081528"/>
-            <a:ext cx="3035808" cy="2148839"/>
-          </a:xfrm>
-          <a:prstGeom prst="rect">
-            <a:avLst/>
-          </a:prstGeom>
-          <a:noFill/>
-        </p:spPr>
-        <p:txBody>
-          <a:bodyPr wrap="square" lIns="18288" rIns="18288" tIns="18288" bIns="18288" anchor="t">
-            <a:spAutoFit/>
-          </a:bodyPr>
-          <a:lstStyle/>
-          <a:p>
-            <a:pPr algn="l">
-              <a:defRPr sz="1700" b="0">
-                <a:solidFill>
-                  <a:srgbClr val="21232B"/>
-                </a:solidFill>
-                <a:latin typeface="Avenir Next"/>
-              </a:defRPr>
-            </a:pPr>
-            <a:r>
-              <a:t>Review food entries and the energy summary. Open the log to see the meal details and available photo evidence.</a:t>
-            </a:r>
-          </a:p>
-        </p:txBody>
-      </p:sp>
-      <p:sp>
-        <p:nvSpPr>
-          <p:cNvPr id="24" name="Rounded Rectangle 23"/>
-          <p:cNvSpPr/>
-          <p:nvPr/>
-        </p:nvSpPr>
-        <p:spPr>
-          <a:xfrm>
-            <a:off x="8101583" y="2148840"/>
-            <a:ext cx="3547872" cy="3264408"/>
-          </a:xfrm>
-          <a:prstGeom prst="roundRect">
-            <a:avLst>
-              <a:gd name="adj" fmla="val 8000"/>
-            </a:avLst>
-          </a:prstGeom>
-          <a:solidFill>
-            <a:srgbClr val="FFFFFF"/>
-          </a:solidFill>
-          <a:ln>
-            <a:solidFill>
-              <a:srgbClr val="DCD7CD"/>
-            </a:solidFill>
-          </a:ln>
-        </p:spPr>
-        <p:style>
-          <a:lnRef idx="1">
-            <a:schemeClr val="accent1"/>
-          </a:lnRef>
-          <a:fillRef idx="3">
-            <a:schemeClr val="accent1"/>
-          </a:fillRef>
-          <a:effectRef idx="2">
-            <a:schemeClr val="accent1"/>
-          </a:effectRef>
-          <a:fontRef idx="minor">
-            <a:schemeClr val="lt1"/>
-          </a:fontRef>
-        </p:style>
-        <p:txBody>
-          <a:bodyPr rtlCol="0" anchor="ctr"/>
-          <a:lstStyle/>
-          <a:p>
-            <a:pPr algn="ctr"/>
-          </a:p>
-        </p:txBody>
-      </p:sp>
-      <p:sp>
-        <p:nvSpPr>
-          <p:cNvPr id="25" name="Rectangle 24"/>
-          <p:cNvSpPr/>
-          <p:nvPr/>
-        </p:nvSpPr>
-        <p:spPr>
-          <a:xfrm>
-            <a:off x="8101583" y="2148840"/>
-            <a:ext cx="3547872" cy="68580"/>
-          </a:xfrm>
-          <a:prstGeom prst="rect">
-            <a:avLst/>
-          </a:prstGeom>
-          <a:solidFill>
-            <a:srgbClr val="DFA538"/>
-          </a:solidFill>
-          <a:ln>
-            <a:noFill/>
-          </a:ln>
-        </p:spPr>
-        <p:style>
-          <a:lnRef idx="1">
-            <a:schemeClr val="accent1"/>
-          </a:lnRef>
-          <a:fillRef idx="3">
-            <a:schemeClr val="accent1"/>
-          </a:fillRef>
-          <a:effectRef idx="2">
-            <a:schemeClr val="accent1"/>
-          </a:effectRef>
-          <a:fontRef idx="minor">
-            <a:schemeClr val="lt1"/>
-          </a:fontRef>
-        </p:style>
-        <p:txBody>
-          <a:bodyPr rtlCol="0" anchor="ctr"/>
-          <a:lstStyle/>
-          <a:p>
-            <a:pPr algn="ctr"/>
-          </a:p>
-        </p:txBody>
-      </p:sp>
-      <p:sp>
-        <p:nvSpPr>
-          <p:cNvPr id="26" name="Rounded Rectangle 25"/>
-          <p:cNvSpPr/>
-          <p:nvPr/>
-        </p:nvSpPr>
-        <p:spPr>
-          <a:xfrm>
-            <a:off x="8330183" y="2395728"/>
-            <a:ext cx="457200" cy="457200"/>
-          </a:xfrm>
-          <a:prstGeom prst="roundRect">
-            <a:avLst>
-              <a:gd name="adj" fmla="val 8000"/>
-            </a:avLst>
-          </a:prstGeom>
-          <a:solidFill>
-            <a:srgbClr val="DFA538"/>
-          </a:solidFill>
-          <a:ln>
-            <a:noFill/>
-          </a:ln>
-        </p:spPr>
-        <p:style>
-          <a:lnRef idx="1">
-            <a:schemeClr val="accent1"/>
-          </a:lnRef>
-          <a:fillRef idx="3">
-            <a:schemeClr val="accent1"/>
-          </a:fillRef>
-          <a:effectRef idx="2">
-            <a:schemeClr val="accent1"/>
-          </a:effectRef>
-          <a:fontRef idx="minor">
-            <a:schemeClr val="lt1"/>
-          </a:fontRef>
-        </p:style>
-        <p:txBody>
-          <a:bodyPr rtlCol="0" anchor="ctr"/>
-          <a:lstStyle/>
-          <a:p>
-            <a:pPr algn="ctr"/>
-          </a:p>
-        </p:txBody>
-      </p:sp>
-      <p:sp>
-        <p:nvSpPr>
-          <p:cNvPr id="27" name="TextBox 26"/>
-          <p:cNvSpPr txBox="1"/>
-          <p:nvPr/>
-        </p:nvSpPr>
-        <p:spPr>
-          <a:xfrm>
-            <a:off x="8330183" y="2459736"/>
-            <a:ext cx="457200" cy="201168"/>
-          </a:xfrm>
-          <a:prstGeom prst="rect">
-            <a:avLst/>
-          </a:prstGeom>
-          <a:noFill/>
-        </p:spPr>
-        <p:txBody>
-          <a:bodyPr wrap="square" lIns="18288" rIns="18288" tIns="18288" bIns="18288" anchor="t">
-            <a:spAutoFit/>
-          </a:bodyPr>
-          <a:lstStyle/>
-          <a:p>
-            <a:pPr algn="ctr">
-              <a:defRPr sz="1600" b="1">
-                <a:solidFill>
-                  <a:srgbClr val="FFFFFF"/>
-                </a:solidFill>
-                <a:latin typeface="Avenir Next"/>
-              </a:defRPr>
-            </a:pPr>
-            <a:r>
-              <a:t>3</a:t>
-            </a:r>
-          </a:p>
-        </p:txBody>
-      </p:sp>
-      <p:sp>
-        <p:nvSpPr>
-          <p:cNvPr id="28" name="TextBox 27"/>
-          <p:cNvSpPr txBox="1"/>
-          <p:nvPr/>
-        </p:nvSpPr>
-        <p:spPr>
-          <a:xfrm>
-            <a:off x="8924544" y="2395728"/>
-            <a:ext cx="2487168" cy="512064"/>
-          </a:xfrm>
-          <a:prstGeom prst="rect">
-            <a:avLst/>
-          </a:prstGeom>
-          <a:noFill/>
-        </p:spPr>
-        <p:txBody>
-          <a:bodyPr wrap="square" lIns="18288" rIns="18288" tIns="18288" bIns="18288" anchor="t">
-            <a:spAutoFit/>
-          </a:bodyPr>
-          <a:lstStyle/>
-          <a:p>
-            <a:pPr algn="l">
-              <a:defRPr sz="2100" b="1">
-                <a:solidFill>
-                  <a:srgbClr val="21232B"/>
-                </a:solidFill>
-                <a:latin typeface="Avenir Next"/>
-              </a:defRPr>
-            </a:pPr>
-            <a:r>
-              <a:t>Compare context</a:t>
-            </a:r>
-          </a:p>
-        </p:txBody>
-      </p:sp>
-      <p:sp>
-        <p:nvSpPr>
-          <p:cNvPr id="29" name="TextBox 28"/>
-          <p:cNvSpPr txBox="1"/>
-          <p:nvPr/>
-        </p:nvSpPr>
-        <p:spPr>
-          <a:xfrm>
-            <a:off x="8357615" y="3081528"/>
-            <a:ext cx="3035808" cy="2148839"/>
-          </a:xfrm>
-          <a:prstGeom prst="rect">
-            <a:avLst/>
-          </a:prstGeom>
-          <a:noFill/>
-        </p:spPr>
-        <p:txBody>
-          <a:bodyPr wrap="square" lIns="18288" rIns="18288" tIns="18288" bIns="18288" anchor="t">
-            <a:spAutoFit/>
-          </a:bodyPr>
-          <a:lstStyle/>
-          <a:p>
-            <a:pPr algn="l">
-              <a:defRPr sz="1700" b="0">
-                <a:solidFill>
-                  <a:srgbClr val="21232B"/>
-                </a:solidFill>
-                <a:latin typeface="Avenir Next"/>
-              </a:defRPr>
-            </a:pPr>
-            <a:r>
-              <a:t>Check the 4 October sandwich and coffee against Penny, then inspect the separate porridge-and-egg photo example.</a:t>
-            </a:r>
-          </a:p>
-        </p:txBody>
-      </p:sp>
-      <p:sp>
-        <p:nvSpPr>
-          <p:cNvPr id="30" name="Rounded Rectangle 29"/>
-          <p:cNvSpPr/>
-          <p:nvPr/>
-        </p:nvSpPr>
-        <p:spPr>
-          <a:xfrm>
-            <a:off x="521207" y="5833872"/>
-            <a:ext cx="11128248" cy="438912"/>
-          </a:xfrm>
-          <a:prstGeom prst="roundRect">
-            <a:avLst>
-              <a:gd name="adj" fmla="val 8000"/>
-            </a:avLst>
-          </a:prstGeom>
-          <a:solidFill>
-            <a:srgbClr val="EEEADF"/>
-          </a:solidFill>
-          <a:ln>
-            <a:noFill/>
-          </a:ln>
-        </p:spPr>
-        <p:style>
-          <a:lnRef idx="1">
-            <a:schemeClr val="accent1"/>
-          </a:lnRef>
-          <a:fillRef idx="3">
-            <a:schemeClr val="accent1"/>
-          </a:fillRef>
-          <a:effectRef idx="2">
-            <a:schemeClr val="accent1"/>
-          </a:effectRef>
-          <a:fontRef idx="minor">
-            <a:schemeClr val="lt1"/>
-          </a:fontRef>
-        </p:style>
-        <p:txBody>
-          <a:bodyPr rtlCol="0" anchor="ctr"/>
-          <a:lstStyle/>
-          <a:p>
-            <a:pPr algn="ctr"/>
-          </a:p>
-        </p:txBody>
-      </p:sp>
-      <p:sp>
-        <p:nvSpPr>
-          <p:cNvPr id="31" name="Rectangle 30"/>
-          <p:cNvSpPr/>
-          <p:nvPr/>
-        </p:nvSpPr>
-        <p:spPr>
-          <a:xfrm>
-            <a:off x="521207" y="5833872"/>
-            <a:ext cx="73152" cy="438912"/>
-          </a:xfrm>
-          <a:prstGeom prst="rect">
-            <a:avLst/>
-          </a:prstGeom>
-          <a:solidFill>
-            <a:srgbClr val="E86F56"/>
-          </a:solidFill>
-          <a:ln>
-            <a:noFill/>
-          </a:ln>
-        </p:spPr>
-        <p:style>
-          <a:lnRef idx="1">
-            <a:schemeClr val="accent1"/>
-          </a:lnRef>
-          <a:fillRef idx="3">
-            <a:schemeClr val="accent1"/>
-          </a:fillRef>
-          <a:effectRef idx="2">
-            <a:schemeClr val="accent1"/>
-          </a:effectRef>
-          <a:fontRef idx="minor">
-            <a:schemeClr val="lt1"/>
-          </a:fontRef>
-        </p:style>
-        <p:txBody>
-          <a:bodyPr rtlCol="0" anchor="ctr"/>
-          <a:lstStyle/>
-          <a:p>
-            <a:pPr algn="ctr"/>
-          </a:p>
-        </p:txBody>
-      </p:sp>
-      <p:sp>
-        <p:nvSpPr>
-          <p:cNvPr id="32" name="TextBox 31"/>
-          <p:cNvSpPr txBox="1"/>
-          <p:nvPr/>
-        </p:nvSpPr>
-        <p:spPr>
-          <a:xfrm>
-            <a:off x="713232" y="5925312"/>
-            <a:ext cx="10698480" cy="265176"/>
-          </a:xfrm>
-          <a:prstGeom prst="rect">
-            <a:avLst/>
-          </a:prstGeom>
-          <a:noFill/>
-        </p:spPr>
-        <p:txBody>
-          <a:bodyPr wrap="square" lIns="18288" rIns="18288" tIns="18288" bIns="18288" anchor="t">
-            <a:spAutoFit/>
-          </a:bodyPr>
-          <a:lstStyle/>
-          <a:p>
-            <a:pPr algn="l">
-              <a:defRPr sz="1400" b="0">
-                <a:solidFill>
-                  <a:srgbClr val="21232B"/>
-                </a:solidFill>
-                <a:latin typeface="Avenir Next"/>
-              </a:defRPr>
-            </a:pPr>
-            <a:r>
-              <a:t>A meal photo and a receipt are different inputs; do not assume they describe the same purchase.</a:t>
-            </a:r>
-          </a:p>
-        </p:txBody>
-      </p:sp>
-    </p:spTree>
-  </p:cSld>
-  <p:clrMapOvr>
-    <a:masterClrMapping/>
-  </p:clrMapOvr>
-</p:sld>
-</file>
-
-<file path=ppt/slides/slide11.xml><?xml version="1.0" encoding="utf-8"?>
-<p:sld xmlns:a="http://schemas.openxmlformats.org/drawingml/2006/main" xmlns:p="http://schemas.openxmlformats.org/presentationml/2006/main" xmlns:r="http://schemas.openxmlformats.org/officeDocument/2006/relationships">
-  <p:cSld>
-    <p:spTree>
-      <p:nvGrpSpPr>
-        <p:cNvPr id="1" name=""/>
-        <p:cNvGrpSpPr/>
-        <p:nvPr/>
-      </p:nvGrpSpPr>
-      <p:grpSpPr/>
-      <p:sp>
-        <p:nvSpPr>
-          <p:cNvPr id="2" name="Rectangle 1"/>
-          <p:cNvSpPr/>
-          <p:nvPr/>
-        </p:nvSpPr>
-        <p:spPr>
-          <a:xfrm>
-            <a:off x="0" y="0"/>
-            <a:ext cx="12191695" cy="6858000"/>
-          </a:xfrm>
-          <a:prstGeom prst="rect">
-            <a:avLst/>
-          </a:prstGeom>
-          <a:solidFill>
-            <a:srgbClr val="F8F5EC"/>
-          </a:solidFill>
-          <a:ln>
-            <a:noFill/>
-          </a:ln>
-        </p:spPr>
-        <p:style>
-          <a:lnRef idx="1">
-            <a:schemeClr val="accent1"/>
-          </a:lnRef>
-          <a:fillRef idx="3">
-            <a:schemeClr val="accent1"/>
-          </a:fillRef>
-          <a:effectRef idx="2">
-            <a:schemeClr val="accent1"/>
-          </a:effectRef>
-          <a:fontRef idx="minor">
-            <a:schemeClr val="lt1"/>
-          </a:fontRef>
-        </p:style>
-        <p:txBody>
-          <a:bodyPr rtlCol="0" anchor="ctr"/>
-          <a:lstStyle/>
-          <a:p>
-            <a:pPr algn="ctr"/>
-          </a:p>
-        </p:txBody>
-      </p:sp>
-      <p:sp>
-        <p:nvSpPr>
-          <p:cNvPr id="3" name="Rectangle 2"/>
-          <p:cNvSpPr/>
-          <p:nvPr/>
-        </p:nvSpPr>
-        <p:spPr>
-          <a:xfrm>
-            <a:off x="0" y="0"/>
-            <a:ext cx="12191695" cy="585216"/>
-          </a:xfrm>
-          <a:prstGeom prst="rect">
-            <a:avLst/>
-          </a:prstGeom>
-          <a:solidFill>
-            <a:srgbClr val="08090C"/>
-          </a:solidFill>
-          <a:ln>
-            <a:noFill/>
-          </a:ln>
-        </p:spPr>
-        <p:style>
-          <a:lnRef idx="1">
-            <a:schemeClr val="accent1"/>
-          </a:lnRef>
-          <a:fillRef idx="3">
-            <a:schemeClr val="accent1"/>
-          </a:fillRef>
-          <a:effectRef idx="2">
-            <a:schemeClr val="accent1"/>
-          </a:effectRef>
-          <a:fontRef idx="minor">
-            <a:schemeClr val="lt1"/>
-          </a:fontRef>
-        </p:style>
-        <p:txBody>
-          <a:bodyPr rtlCol="0" anchor="ctr"/>
-          <a:lstStyle/>
-          <a:p>
-            <a:pPr algn="ctr"/>
-          </a:p>
-        </p:txBody>
-      </p:sp>
-      <p:sp>
-        <p:nvSpPr>
-          <p:cNvPr id="4" name="TextBox 3"/>
-          <p:cNvSpPr txBox="1"/>
-          <p:nvPr/>
-        </p:nvSpPr>
-        <p:spPr>
-          <a:xfrm>
-            <a:off x="512064" y="128016"/>
-            <a:ext cx="2011680" cy="283464"/>
-          </a:xfrm>
-          <a:prstGeom prst="rect">
-            <a:avLst/>
-          </a:prstGeom>
-          <a:noFill/>
-        </p:spPr>
-        <p:txBody>
-          <a:bodyPr wrap="square" lIns="18288" rIns="18288" tIns="18288" bIns="18288" anchor="t">
-            <a:spAutoFit/>
-          </a:bodyPr>
-          <a:lstStyle/>
-          <a:p>
-            <a:pPr algn="l">
-              <a:defRPr sz="1700" b="1">
-                <a:solidFill>
-                  <a:srgbClr val="FFFFFF"/>
-                </a:solidFill>
-                <a:latin typeface="Avenir Next"/>
-              </a:defRPr>
-            </a:pPr>
-            <a:r>
-              <a:t>PETAK</a:t>
-            </a:r>
-          </a:p>
-        </p:txBody>
-      </p:sp>
-      <p:sp>
-        <p:nvSpPr>
-          <p:cNvPr id="5" name="TextBox 4"/>
-          <p:cNvSpPr txBox="1"/>
-          <p:nvPr/>
-        </p:nvSpPr>
-        <p:spPr>
-          <a:xfrm>
-            <a:off x="3794760" y="155448"/>
-            <a:ext cx="4617720" cy="237744"/>
-          </a:xfrm>
-          <a:prstGeom prst="rect">
-            <a:avLst/>
-          </a:prstGeom>
-          <a:noFill/>
-        </p:spPr>
-        <p:txBody>
-          <a:bodyPr wrap="square" lIns="18288" rIns="18288" tIns="18288" bIns="18288" anchor="t">
-            <a:spAutoFit/>
-          </a:bodyPr>
-          <a:lstStyle/>
-          <a:p>
-            <a:pPr algn="ctr">
-              <a:defRPr sz="1300" b="1">
-                <a:solidFill>
-                  <a:srgbClr val="FFFFFF"/>
-                </a:solidFill>
-                <a:latin typeface="Avenir Next"/>
-              </a:defRPr>
-            </a:pPr>
-            <a:r>
-              <a:t>FEATURE REFERENCE</a:t>
-            </a:r>
-          </a:p>
-        </p:txBody>
-      </p:sp>
-      <p:sp>
-        <p:nvSpPr>
-          <p:cNvPr id="6" name="TextBox 5"/>
-          <p:cNvSpPr txBox="1"/>
-          <p:nvPr/>
-        </p:nvSpPr>
-        <p:spPr>
-          <a:xfrm>
-            <a:off x="9418320" y="164592"/>
-            <a:ext cx="2221992" cy="228600"/>
-          </a:xfrm>
-          <a:prstGeom prst="rect">
-            <a:avLst/>
-          </a:prstGeom>
-          <a:noFill/>
-        </p:spPr>
-        <p:txBody>
-          <a:bodyPr wrap="square" lIns="18288" rIns="18288" tIns="18288" bIns="18288" anchor="t">
-            <a:spAutoFit/>
-          </a:bodyPr>
-          <a:lstStyle/>
-          <a:p>
-            <a:pPr algn="r">
-              <a:defRPr sz="1100" b="1">
-                <a:solidFill>
-                  <a:srgbClr val="FFFFFF"/>
-                </a:solidFill>
-                <a:latin typeface="Avenir Next"/>
-              </a:defRPr>
-            </a:pPr>
-            <a:r>
-              <a:t>AI BUILDER CUP 2026</a:t>
-            </a:r>
-          </a:p>
-        </p:txBody>
-      </p:sp>
-      <p:sp>
-        <p:nvSpPr>
-          <p:cNvPr id="7" name="TextBox 6"/>
-          <p:cNvSpPr txBox="1"/>
-          <p:nvPr/>
-        </p:nvSpPr>
-        <p:spPr>
-          <a:xfrm>
-            <a:off x="512064" y="859536"/>
-            <a:ext cx="11064240" cy="594360"/>
-          </a:xfrm>
-          <a:prstGeom prst="rect">
-            <a:avLst/>
-          </a:prstGeom>
-          <a:noFill/>
-        </p:spPr>
-        <p:txBody>
-          <a:bodyPr wrap="square" lIns="18288" rIns="18288" tIns="18288" bIns="18288" anchor="t">
-            <a:spAutoFit/>
-          </a:bodyPr>
-          <a:lstStyle/>
-          <a:p>
-            <a:pPr algn="l">
-              <a:defRPr sz="3100" b="1">
-                <a:solidFill>
-                  <a:srgbClr val="21232B"/>
-                </a:solidFill>
-                <a:latin typeface="Avenir Next"/>
-              </a:defRPr>
-            </a:pPr>
-            <a:r>
-              <a:t>Mira: journal and memories</a:t>
-            </a:r>
-          </a:p>
-        </p:txBody>
-      </p:sp>
-      <p:sp>
-        <p:nvSpPr>
-          <p:cNvPr id="8" name="TextBox 7"/>
-          <p:cNvSpPr txBox="1"/>
-          <p:nvPr/>
-        </p:nvSpPr>
-        <p:spPr>
-          <a:xfrm>
-            <a:off x="530352" y="1517904"/>
-            <a:ext cx="10881360" cy="512064"/>
-          </a:xfrm>
-          <a:prstGeom prst="rect">
-            <a:avLst/>
-          </a:prstGeom>
-          <a:noFill/>
-        </p:spPr>
-        <p:txBody>
-          <a:bodyPr wrap="square" lIns="18288" rIns="18288" tIns="18288" bIns="18288" anchor="t">
-            <a:spAutoFit/>
-          </a:bodyPr>
-          <a:lstStyle/>
-          <a:p>
-            <a:pPr algn="l">
-              <a:defRPr sz="1600" b="0">
-                <a:solidFill>
-                  <a:srgbClr val="5B5E67"/>
-                </a:solidFill>
-                <a:latin typeface="Avenir Next"/>
-              </a:defRPr>
-            </a:pPr>
-            <a:r>
-              <a:t>Mira keeps personal moments that can be revisited by date and feeling.</a:t>
-            </a:r>
-          </a:p>
-        </p:txBody>
-      </p:sp>
-      <p:sp>
-        <p:nvSpPr>
-          <p:cNvPr id="9" name="Rectangle 8"/>
-          <p:cNvSpPr/>
-          <p:nvPr/>
-        </p:nvSpPr>
-        <p:spPr>
-          <a:xfrm>
-            <a:off x="502920" y="6519672"/>
-            <a:ext cx="11155680" cy="13716"/>
-          </a:xfrm>
-          <a:prstGeom prst="rect">
-            <a:avLst/>
-          </a:prstGeom>
-          <a:solidFill>
-            <a:srgbClr val="DCD7CD"/>
-          </a:solidFill>
-          <a:ln>
-            <a:noFill/>
-          </a:ln>
-        </p:spPr>
-        <p:style>
-          <a:lnRef idx="1">
-            <a:schemeClr val="accent1"/>
-          </a:lnRef>
-          <a:fillRef idx="3">
-            <a:schemeClr val="accent1"/>
-          </a:fillRef>
-          <a:effectRef idx="2">
-            <a:schemeClr val="accent1"/>
-          </a:effectRef>
-          <a:fontRef idx="minor">
-            <a:schemeClr val="lt1"/>
-          </a:fontRef>
-        </p:style>
-        <p:txBody>
-          <a:bodyPr rtlCol="0" anchor="ctr"/>
-          <a:lstStyle/>
-          <a:p>
-            <a:pPr algn="ctr"/>
-          </a:p>
-        </p:txBody>
-      </p:sp>
-      <p:sp>
-        <p:nvSpPr>
-          <p:cNvPr id="10" name="TextBox 9"/>
-          <p:cNvSpPr txBox="1"/>
-          <p:nvPr/>
-        </p:nvSpPr>
-        <p:spPr>
-          <a:xfrm>
-            <a:off x="530352" y="6574536"/>
-            <a:ext cx="8412480" cy="182880"/>
-          </a:xfrm>
-          <a:prstGeom prst="rect">
-            <a:avLst/>
-          </a:prstGeom>
-          <a:noFill/>
-        </p:spPr>
-        <p:txBody>
-          <a:bodyPr wrap="square" lIns="18288" rIns="18288" tIns="18288" bIns="18288" anchor="t">
-            <a:spAutoFit/>
-          </a:bodyPr>
-          <a:lstStyle/>
-          <a:p>
-            <a:pPr algn="l">
-              <a:defRPr sz="1000" b="0">
-                <a:solidFill>
-                  <a:srgbClr val="5B5E67"/>
-                </a:solidFill>
-                <a:latin typeface="Avenir Next"/>
-              </a:defRPr>
-            </a:pPr>
-            <a:r>
-              <a:t>Petak QA · use the reviewer access supplied separately</a:t>
-            </a:r>
-          </a:p>
-        </p:txBody>
-      </p:sp>
-      <p:sp>
-        <p:nvSpPr>
-          <p:cNvPr id="11" name="TextBox 10"/>
-          <p:cNvSpPr txBox="1"/>
-          <p:nvPr/>
-        </p:nvSpPr>
-        <p:spPr>
-          <a:xfrm>
-            <a:off x="11128248" y="6556248"/>
-            <a:ext cx="502920" cy="219456"/>
-          </a:xfrm>
-          <a:prstGeom prst="rect">
-            <a:avLst/>
-          </a:prstGeom>
-          <a:noFill/>
-        </p:spPr>
-        <p:txBody>
-          <a:bodyPr wrap="square" lIns="18288" rIns="18288" tIns="18288" bIns="18288" anchor="t">
-            <a:spAutoFit/>
-          </a:bodyPr>
-          <a:lstStyle/>
-          <a:p>
-            <a:pPr algn="r">
-              <a:defRPr sz="1100" b="1">
-                <a:solidFill>
-                  <a:srgbClr val="5B5E67"/>
-                </a:solidFill>
-                <a:latin typeface="Avenir Next"/>
-              </a:defRPr>
-            </a:pPr>
-            <a:r>
-              <a:t>11</a:t>
-            </a:r>
-          </a:p>
-        </p:txBody>
-      </p:sp>
-      <p:sp>
-        <p:nvSpPr>
-          <p:cNvPr id="12" name="Rounded Rectangle 11"/>
-          <p:cNvSpPr/>
-          <p:nvPr/>
-        </p:nvSpPr>
-        <p:spPr>
-          <a:xfrm>
-            <a:off x="530352" y="2148840"/>
-            <a:ext cx="3547872" cy="3264408"/>
-          </a:xfrm>
-          <a:prstGeom prst="roundRect">
-            <a:avLst>
-              <a:gd name="adj" fmla="val 8000"/>
-            </a:avLst>
-          </a:prstGeom>
-          <a:solidFill>
-            <a:srgbClr val="FFFFFF"/>
-          </a:solidFill>
-          <a:ln>
-            <a:solidFill>
-              <a:srgbClr val="DCD7CD"/>
-            </a:solidFill>
-          </a:ln>
-        </p:spPr>
-        <p:style>
-          <a:lnRef idx="1">
-            <a:schemeClr val="accent1"/>
-          </a:lnRef>
-          <a:fillRef idx="3">
-            <a:schemeClr val="accent1"/>
-          </a:fillRef>
-          <a:effectRef idx="2">
-            <a:schemeClr val="accent1"/>
-          </a:effectRef>
-          <a:fontRef idx="minor">
-            <a:schemeClr val="lt1"/>
-          </a:fontRef>
-        </p:style>
-        <p:txBody>
-          <a:bodyPr rtlCol="0" anchor="ctr"/>
-          <a:lstStyle/>
-          <a:p>
-            <a:pPr algn="ctr"/>
-          </a:p>
-        </p:txBody>
-      </p:sp>
-      <p:sp>
-        <p:nvSpPr>
-          <p:cNvPr id="13" name="Rectangle 12"/>
-          <p:cNvSpPr/>
-          <p:nvPr/>
-        </p:nvSpPr>
-        <p:spPr>
-          <a:xfrm>
-            <a:off x="530352" y="2148840"/>
-            <a:ext cx="3547872" cy="68580"/>
-          </a:xfrm>
-          <a:prstGeom prst="rect">
-            <a:avLst/>
-          </a:prstGeom>
-          <a:solidFill>
-            <a:srgbClr val="8E64B9"/>
-          </a:solidFill>
-          <a:ln>
-            <a:noFill/>
-          </a:ln>
-        </p:spPr>
-        <p:style>
-          <a:lnRef idx="1">
-            <a:schemeClr val="accent1"/>
-          </a:lnRef>
-          <a:fillRef idx="3">
-            <a:schemeClr val="accent1"/>
-          </a:fillRef>
-          <a:effectRef idx="2">
-            <a:schemeClr val="accent1"/>
-          </a:effectRef>
-          <a:fontRef idx="minor">
-            <a:schemeClr val="lt1"/>
-          </a:fontRef>
-        </p:style>
-        <p:txBody>
-          <a:bodyPr rtlCol="0" anchor="ctr"/>
-          <a:lstStyle/>
-          <a:p>
-            <a:pPr algn="ctr"/>
-          </a:p>
-        </p:txBody>
-      </p:sp>
-      <p:sp>
-        <p:nvSpPr>
-          <p:cNvPr id="14" name="Rounded Rectangle 13"/>
-          <p:cNvSpPr/>
-          <p:nvPr/>
-        </p:nvSpPr>
-        <p:spPr>
-          <a:xfrm>
-            <a:off x="758952" y="2395728"/>
-            <a:ext cx="457200" cy="457200"/>
-          </a:xfrm>
-          <a:prstGeom prst="roundRect">
-            <a:avLst>
-              <a:gd name="adj" fmla="val 8000"/>
-            </a:avLst>
-          </a:prstGeom>
-          <a:solidFill>
-            <a:srgbClr val="8E64B9"/>
-          </a:solidFill>
-          <a:ln>
-            <a:noFill/>
-          </a:ln>
-        </p:spPr>
-        <p:style>
-          <a:lnRef idx="1">
-            <a:schemeClr val="accent1"/>
-          </a:lnRef>
-          <a:fillRef idx="3">
-            <a:schemeClr val="accent1"/>
-          </a:fillRef>
-          <a:effectRef idx="2">
-            <a:schemeClr val="accent1"/>
-          </a:effectRef>
-          <a:fontRef idx="minor">
-            <a:schemeClr val="lt1"/>
-          </a:fontRef>
-        </p:style>
-        <p:txBody>
-          <a:bodyPr rtlCol="0" anchor="ctr"/>
-          <a:lstStyle/>
-          <a:p>
-            <a:pPr algn="ctr"/>
-          </a:p>
-        </p:txBody>
-      </p:sp>
-      <p:sp>
-        <p:nvSpPr>
-          <p:cNvPr id="15" name="TextBox 14"/>
-          <p:cNvSpPr txBox="1"/>
-          <p:nvPr/>
-        </p:nvSpPr>
-        <p:spPr>
-          <a:xfrm>
-            <a:off x="758952" y="2459736"/>
-            <a:ext cx="457200" cy="201168"/>
-          </a:xfrm>
-          <a:prstGeom prst="rect">
-            <a:avLst/>
-          </a:prstGeom>
-          <a:noFill/>
-        </p:spPr>
-        <p:txBody>
-          <a:bodyPr wrap="square" lIns="18288" rIns="18288" tIns="18288" bIns="18288" anchor="t">
-            <a:spAutoFit/>
-          </a:bodyPr>
-          <a:lstStyle/>
-          <a:p>
-            <a:pPr algn="ctr">
-              <a:defRPr sz="1600" b="1">
-                <a:solidFill>
-                  <a:srgbClr val="FFFFFF"/>
-                </a:solidFill>
-                <a:latin typeface="Avenir Next"/>
-              </a:defRPr>
-            </a:pPr>
-            <a:r>
-              <a:t>1</a:t>
-            </a:r>
-          </a:p>
-        </p:txBody>
-      </p:sp>
-      <p:sp>
-        <p:nvSpPr>
-          <p:cNvPr id="16" name="TextBox 15"/>
-          <p:cNvSpPr txBox="1"/>
-          <p:nvPr/>
-        </p:nvSpPr>
-        <p:spPr>
-          <a:xfrm>
-            <a:off x="1353312" y="2395728"/>
-            <a:ext cx="2487168" cy="512064"/>
-          </a:xfrm>
-          <a:prstGeom prst="rect">
-            <a:avLst/>
-          </a:prstGeom>
-          <a:noFill/>
-        </p:spPr>
-        <p:txBody>
-          <a:bodyPr wrap="square" lIns="18288" rIns="18288" tIns="18288" bIns="18288" anchor="t">
-            <a:spAutoFit/>
-          </a:bodyPr>
-          <a:lstStyle/>
-          <a:p>
-            <a:pPr algn="l">
-              <a:defRPr sz="2100" b="1">
-                <a:solidFill>
-                  <a:srgbClr val="21232B"/>
-                </a:solidFill>
-                <a:latin typeface="Avenir Next"/>
-              </a:defRPr>
-            </a:pPr>
-            <a:r>
-              <a:t>Open the journal</a:t>
-            </a:r>
-          </a:p>
-        </p:txBody>
-      </p:sp>
-      <p:sp>
-        <p:nvSpPr>
-          <p:cNvPr id="17" name="TextBox 16"/>
-          <p:cNvSpPr txBox="1"/>
-          <p:nvPr/>
-        </p:nvSpPr>
-        <p:spPr>
-          <a:xfrm>
-            <a:off x="786384" y="3081528"/>
-            <a:ext cx="3035808" cy="2148839"/>
-          </a:xfrm>
-          <a:prstGeom prst="rect">
-            <a:avLst/>
-          </a:prstGeom>
-          <a:noFill/>
-        </p:spPr>
-        <p:txBody>
-          <a:bodyPr wrap="square" lIns="18288" rIns="18288" tIns="18288" bIns="18288" anchor="t">
-            <a:spAutoFit/>
-          </a:bodyPr>
-          <a:lstStyle/>
-          <a:p>
-            <a:pPr algn="l">
-              <a:defRPr sz="1700" b="0">
-                <a:solidFill>
-                  <a:srgbClr val="21232B"/>
-                </a:solidFill>
-                <a:latin typeface="Avenir Next"/>
-              </a:defRPr>
-            </a:pPr>
-            <a:r>
-              <a:t>Open Mira from the menu. The prepared account already contains journal entries.</a:t>
-            </a:r>
-          </a:p>
-        </p:txBody>
-      </p:sp>
-      <p:sp>
-        <p:nvSpPr>
-          <p:cNvPr id="18" name="Rounded Rectangle 17"/>
-          <p:cNvSpPr/>
-          <p:nvPr/>
-        </p:nvSpPr>
-        <p:spPr>
-          <a:xfrm>
-            <a:off x="4315968" y="2148840"/>
-            <a:ext cx="3547872" cy="3264408"/>
-          </a:xfrm>
-          <a:prstGeom prst="roundRect">
-            <a:avLst>
-              <a:gd name="adj" fmla="val 8000"/>
-            </a:avLst>
-          </a:prstGeom>
-          <a:solidFill>
-            <a:srgbClr val="FFFFFF"/>
-          </a:solidFill>
-          <a:ln>
-            <a:solidFill>
-              <a:srgbClr val="DCD7CD"/>
-            </a:solidFill>
-          </a:ln>
-        </p:spPr>
-        <p:style>
-          <a:lnRef idx="1">
-            <a:schemeClr val="accent1"/>
-          </a:lnRef>
-          <a:fillRef idx="3">
-            <a:schemeClr val="accent1"/>
-          </a:fillRef>
-          <a:effectRef idx="2">
-            <a:schemeClr val="accent1"/>
-          </a:effectRef>
-          <a:fontRef idx="minor">
-            <a:schemeClr val="lt1"/>
-          </a:fontRef>
-        </p:style>
-        <p:txBody>
-          <a:bodyPr rtlCol="0" anchor="ctr"/>
-          <a:lstStyle/>
-          <a:p>
-            <a:pPr algn="ctr"/>
-          </a:p>
-        </p:txBody>
-      </p:sp>
-      <p:sp>
-        <p:nvSpPr>
-          <p:cNvPr id="19" name="Rectangle 18"/>
-          <p:cNvSpPr/>
-          <p:nvPr/>
-        </p:nvSpPr>
-        <p:spPr>
-          <a:xfrm>
-            <a:off x="4315968" y="2148840"/>
-            <a:ext cx="3547872" cy="68580"/>
-          </a:xfrm>
-          <a:prstGeom prst="rect">
-            <a:avLst/>
-          </a:prstGeom>
-          <a:solidFill>
-            <a:srgbClr val="21A391"/>
-          </a:solidFill>
-          <a:ln>
-            <a:noFill/>
-          </a:ln>
-        </p:spPr>
-        <p:style>
-          <a:lnRef idx="1">
-            <a:schemeClr val="accent1"/>
-          </a:lnRef>
-          <a:fillRef idx="3">
-            <a:schemeClr val="accent1"/>
-          </a:fillRef>
-          <a:effectRef idx="2">
-            <a:schemeClr val="accent1"/>
-          </a:effectRef>
-          <a:fontRef idx="minor">
-            <a:schemeClr val="lt1"/>
-          </a:fontRef>
-        </p:style>
-        <p:txBody>
-          <a:bodyPr rtlCol="0" anchor="ctr"/>
-          <a:lstStyle/>
-          <a:p>
-            <a:pPr algn="ctr"/>
-          </a:p>
-        </p:txBody>
-      </p:sp>
-      <p:sp>
-        <p:nvSpPr>
-          <p:cNvPr id="20" name="Rounded Rectangle 19"/>
-          <p:cNvSpPr/>
-          <p:nvPr/>
-        </p:nvSpPr>
-        <p:spPr>
-          <a:xfrm>
-            <a:off x="4544568" y="2395728"/>
-            <a:ext cx="457200" cy="457200"/>
-          </a:xfrm>
-          <a:prstGeom prst="roundRect">
-            <a:avLst>
-              <a:gd name="adj" fmla="val 8000"/>
-            </a:avLst>
-          </a:prstGeom>
-          <a:solidFill>
-            <a:srgbClr val="21A391"/>
-          </a:solidFill>
-          <a:ln>
-            <a:noFill/>
-          </a:ln>
-        </p:spPr>
-        <p:style>
-          <a:lnRef idx="1">
-            <a:schemeClr val="accent1"/>
-          </a:lnRef>
-          <a:fillRef idx="3">
-            <a:schemeClr val="accent1"/>
-          </a:fillRef>
-          <a:effectRef idx="2">
-            <a:schemeClr val="accent1"/>
-          </a:effectRef>
-          <a:fontRef idx="minor">
-            <a:schemeClr val="lt1"/>
-          </a:fontRef>
-        </p:style>
-        <p:txBody>
-          <a:bodyPr rtlCol="0" anchor="ctr"/>
-          <a:lstStyle/>
-          <a:p>
-            <a:pPr algn="ctr"/>
-          </a:p>
-        </p:txBody>
-      </p:sp>
-      <p:sp>
-        <p:nvSpPr>
-          <p:cNvPr id="21" name="TextBox 20"/>
-          <p:cNvSpPr txBox="1"/>
-          <p:nvPr/>
-        </p:nvSpPr>
-        <p:spPr>
-          <a:xfrm>
-            <a:off x="4544568" y="2459736"/>
-            <a:ext cx="457200" cy="201168"/>
-          </a:xfrm>
-          <a:prstGeom prst="rect">
-            <a:avLst/>
-          </a:prstGeom>
-          <a:noFill/>
-        </p:spPr>
-        <p:txBody>
-          <a:bodyPr wrap="square" lIns="18288" rIns="18288" tIns="18288" bIns="18288" anchor="t">
-            <a:spAutoFit/>
-          </a:bodyPr>
-          <a:lstStyle/>
-          <a:p>
-            <a:pPr algn="ctr">
-              <a:defRPr sz="1600" b="1">
-                <a:solidFill>
-                  <a:srgbClr val="FFFFFF"/>
-                </a:solidFill>
-                <a:latin typeface="Avenir Next"/>
-              </a:defRPr>
-            </a:pPr>
-            <a:r>
-              <a:t>2</a:t>
-            </a:r>
-          </a:p>
-        </p:txBody>
-      </p:sp>
-      <p:sp>
-        <p:nvSpPr>
-          <p:cNvPr id="22" name="TextBox 21"/>
-          <p:cNvSpPr txBox="1"/>
-          <p:nvPr/>
-        </p:nvSpPr>
-        <p:spPr>
-          <a:xfrm>
-            <a:off x="5138928" y="2395728"/>
-            <a:ext cx="2487168" cy="512064"/>
-          </a:xfrm>
-          <a:prstGeom prst="rect">
-            <a:avLst/>
-          </a:prstGeom>
-          <a:noFill/>
-        </p:spPr>
-        <p:txBody>
-          <a:bodyPr wrap="square" lIns="18288" rIns="18288" tIns="18288" bIns="18288" anchor="t">
-            <a:spAutoFit/>
-          </a:bodyPr>
-          <a:lstStyle/>
-          <a:p>
-            <a:pPr algn="l">
-              <a:defRPr sz="2100" b="1">
-                <a:solidFill>
-                  <a:srgbClr val="21232B"/>
-                </a:solidFill>
-                <a:latin typeface="Avenir Next"/>
-              </a:defRPr>
-            </a:pPr>
-            <a:r>
-              <a:t>Find an entry</a:t>
-            </a:r>
-          </a:p>
-        </p:txBody>
-      </p:sp>
-      <p:sp>
-        <p:nvSpPr>
-          <p:cNvPr id="23" name="TextBox 22"/>
-          <p:cNvSpPr txBox="1"/>
-          <p:nvPr/>
-        </p:nvSpPr>
-        <p:spPr>
-          <a:xfrm>
-            <a:off x="4572000" y="3081528"/>
-            <a:ext cx="3035808" cy="2148839"/>
-          </a:xfrm>
-          <a:prstGeom prst="rect">
-            <a:avLst/>
-          </a:prstGeom>
-          <a:noFill/>
-        </p:spPr>
-        <p:txBody>
-          <a:bodyPr wrap="square" lIns="18288" rIns="18288" tIns="18288" bIns="18288" anchor="t">
-            <a:spAutoFit/>
-          </a:bodyPr>
-          <a:lstStyle/>
-          <a:p>
-            <a:pPr algn="l">
-              <a:defRPr sz="1700" b="0">
-                <a:solidFill>
-                  <a:srgbClr val="21232B"/>
-                </a:solidFill>
-                <a:latin typeface="Avenir Next"/>
-              </a:defRPr>
-            </a:pPr>
-            <a:r>
-              <a:t>Use the date range, feeling chips or “Search your thoughts” field to narrow the journal.</a:t>
-            </a:r>
-          </a:p>
-        </p:txBody>
-      </p:sp>
-      <p:sp>
-        <p:nvSpPr>
-          <p:cNvPr id="24" name="Rounded Rectangle 23"/>
-          <p:cNvSpPr/>
-          <p:nvPr/>
-        </p:nvSpPr>
-        <p:spPr>
-          <a:xfrm>
-            <a:off x="8101583" y="2148840"/>
-            <a:ext cx="3547872" cy="3264408"/>
-          </a:xfrm>
-          <a:prstGeom prst="roundRect">
-            <a:avLst>
-              <a:gd name="adj" fmla="val 8000"/>
-            </a:avLst>
-          </a:prstGeom>
-          <a:solidFill>
-            <a:srgbClr val="FFFFFF"/>
-          </a:solidFill>
-          <a:ln>
-            <a:solidFill>
-              <a:srgbClr val="DCD7CD"/>
-            </a:solidFill>
-          </a:ln>
-        </p:spPr>
-        <p:style>
-          <a:lnRef idx="1">
-            <a:schemeClr val="accent1"/>
-          </a:lnRef>
-          <a:fillRef idx="3">
-            <a:schemeClr val="accent1"/>
-          </a:fillRef>
-          <a:effectRef idx="2">
-            <a:schemeClr val="accent1"/>
-          </a:effectRef>
-          <a:fontRef idx="minor">
-            <a:schemeClr val="lt1"/>
-          </a:fontRef>
-        </p:style>
-        <p:txBody>
-          <a:bodyPr rtlCol="0" anchor="ctr"/>
-          <a:lstStyle/>
-          <a:p>
-            <a:pPr algn="ctr"/>
-          </a:p>
-        </p:txBody>
-      </p:sp>
-      <p:sp>
-        <p:nvSpPr>
-          <p:cNvPr id="25" name="Rectangle 24"/>
-          <p:cNvSpPr/>
-          <p:nvPr/>
-        </p:nvSpPr>
-        <p:spPr>
-          <a:xfrm>
-            <a:off x="8101583" y="2148840"/>
-            <a:ext cx="3547872" cy="68580"/>
-          </a:xfrm>
-          <a:prstGeom prst="rect">
-            <a:avLst/>
-          </a:prstGeom>
-          <a:solidFill>
-            <a:srgbClr val="DFA538"/>
-          </a:solidFill>
-          <a:ln>
-            <a:noFill/>
-          </a:ln>
-        </p:spPr>
-        <p:style>
-          <a:lnRef idx="1">
-            <a:schemeClr val="accent1"/>
-          </a:lnRef>
-          <a:fillRef idx="3">
-            <a:schemeClr val="accent1"/>
-          </a:fillRef>
-          <a:effectRef idx="2">
-            <a:schemeClr val="accent1"/>
-          </a:effectRef>
-          <a:fontRef idx="minor">
-            <a:schemeClr val="lt1"/>
-          </a:fontRef>
-        </p:style>
-        <p:txBody>
-          <a:bodyPr rtlCol="0" anchor="ctr"/>
-          <a:lstStyle/>
-          <a:p>
-            <a:pPr algn="ctr"/>
-          </a:p>
-        </p:txBody>
-      </p:sp>
-      <p:sp>
-        <p:nvSpPr>
-          <p:cNvPr id="26" name="Rounded Rectangle 25"/>
-          <p:cNvSpPr/>
-          <p:nvPr/>
-        </p:nvSpPr>
-        <p:spPr>
-          <a:xfrm>
-            <a:off x="8330183" y="2395728"/>
-            <a:ext cx="457200" cy="457200"/>
-          </a:xfrm>
-          <a:prstGeom prst="roundRect">
-            <a:avLst>
-              <a:gd name="adj" fmla="val 8000"/>
-            </a:avLst>
-          </a:prstGeom>
-          <a:solidFill>
-            <a:srgbClr val="DFA538"/>
-          </a:solidFill>
-          <a:ln>
-            <a:noFill/>
-          </a:ln>
-        </p:spPr>
-        <p:style>
-          <a:lnRef idx="1">
-            <a:schemeClr val="accent1"/>
-          </a:lnRef>
-          <a:fillRef idx="3">
-            <a:schemeClr val="accent1"/>
-          </a:fillRef>
-          <a:effectRef idx="2">
-            <a:schemeClr val="accent1"/>
-          </a:effectRef>
-          <a:fontRef idx="minor">
-            <a:schemeClr val="lt1"/>
-          </a:fontRef>
-        </p:style>
-        <p:txBody>
-          <a:bodyPr rtlCol="0" anchor="ctr"/>
-          <a:lstStyle/>
-          <a:p>
-            <a:pPr algn="ctr"/>
-          </a:p>
-        </p:txBody>
-      </p:sp>
-      <p:sp>
-        <p:nvSpPr>
-          <p:cNvPr id="27" name="TextBox 26"/>
-          <p:cNvSpPr txBox="1"/>
-          <p:nvPr/>
-        </p:nvSpPr>
-        <p:spPr>
-          <a:xfrm>
-            <a:off x="8330183" y="2459736"/>
-            <a:ext cx="457200" cy="201168"/>
-          </a:xfrm>
-          <a:prstGeom prst="rect">
-            <a:avLst/>
-          </a:prstGeom>
-          <a:noFill/>
-        </p:spPr>
-        <p:txBody>
-          <a:bodyPr wrap="square" lIns="18288" rIns="18288" tIns="18288" bIns="18288" anchor="t">
-            <a:spAutoFit/>
-          </a:bodyPr>
-          <a:lstStyle/>
-          <a:p>
-            <a:pPr algn="ctr">
-              <a:defRPr sz="1600" b="1">
-                <a:solidFill>
-                  <a:srgbClr val="FFFFFF"/>
-                </a:solidFill>
-                <a:latin typeface="Avenir Next"/>
-              </a:defRPr>
-            </a:pPr>
-            <a:r>
-              <a:t>3</a:t>
-            </a:r>
-          </a:p>
-        </p:txBody>
-      </p:sp>
-      <p:sp>
-        <p:nvSpPr>
-          <p:cNvPr id="28" name="TextBox 27"/>
-          <p:cNvSpPr txBox="1"/>
-          <p:nvPr/>
-        </p:nvSpPr>
-        <p:spPr>
-          <a:xfrm>
-            <a:off x="8924544" y="2395728"/>
-            <a:ext cx="2487168" cy="512064"/>
-          </a:xfrm>
-          <a:prstGeom prst="rect">
-            <a:avLst/>
-          </a:prstGeom>
-          <a:noFill/>
-        </p:spPr>
-        <p:txBody>
-          <a:bodyPr wrap="square" lIns="18288" rIns="18288" tIns="18288" bIns="18288" anchor="t">
-            <a:spAutoFit/>
-          </a:bodyPr>
-          <a:lstStyle/>
-          <a:p>
-            <a:pPr algn="l">
-              <a:defRPr sz="2100" b="1">
-                <a:solidFill>
-                  <a:srgbClr val="21232B"/>
-                </a:solidFill>
-                <a:latin typeface="Avenir Next"/>
-              </a:defRPr>
-            </a:pPr>
-            <a:r>
-              <a:t>Add a reflection</a:t>
-            </a:r>
-          </a:p>
-        </p:txBody>
-      </p:sp>
-      <p:sp>
-        <p:nvSpPr>
-          <p:cNvPr id="29" name="TextBox 28"/>
-          <p:cNvSpPr txBox="1"/>
-          <p:nvPr/>
-        </p:nvSpPr>
-        <p:spPr>
-          <a:xfrm>
-            <a:off x="8357615" y="3081528"/>
-            <a:ext cx="3035808" cy="2148839"/>
-          </a:xfrm>
-          <a:prstGeom prst="rect">
-            <a:avLst/>
-          </a:prstGeom>
-          <a:noFill/>
-        </p:spPr>
-        <p:txBody>
-          <a:bodyPr wrap="square" lIns="18288" rIns="18288" tIns="18288" bIns="18288" anchor="t">
-            <a:spAutoFit/>
-          </a:bodyPr>
-          <a:lstStyle/>
-          <a:p>
-            <a:pPr algn="l">
-              <a:defRPr sz="1700" b="0">
-                <a:solidFill>
-                  <a:srgbClr val="21232B"/>
-                </a:solidFill>
-                <a:latin typeface="Avenir Next"/>
-              </a:defRPr>
-            </a:pPr>
-            <a:r>
-              <a:t>Tell Mira about a day in chat or share a relevant photo. Return to the journal to check what was kept.</a:t>
-            </a:r>
-          </a:p>
-        </p:txBody>
-      </p:sp>
-      <p:sp>
-        <p:nvSpPr>
-          <p:cNvPr id="30" name="Rounded Rectangle 29"/>
-          <p:cNvSpPr/>
-          <p:nvPr/>
-        </p:nvSpPr>
-        <p:spPr>
-          <a:xfrm>
-            <a:off x="521207" y="5833872"/>
-            <a:ext cx="11128248" cy="438912"/>
-          </a:xfrm>
-          <a:prstGeom prst="roundRect">
-            <a:avLst>
-              <a:gd name="adj" fmla="val 8000"/>
-            </a:avLst>
-          </a:prstGeom>
-          <a:solidFill>
-            <a:srgbClr val="EEEADF"/>
-          </a:solidFill>
-          <a:ln>
-            <a:noFill/>
-          </a:ln>
-        </p:spPr>
-        <p:style>
-          <a:lnRef idx="1">
-            <a:schemeClr val="accent1"/>
-          </a:lnRef>
-          <a:fillRef idx="3">
-            <a:schemeClr val="accent1"/>
-          </a:fillRef>
-          <a:effectRef idx="2">
-            <a:schemeClr val="accent1"/>
-          </a:effectRef>
-          <a:fontRef idx="minor">
-            <a:schemeClr val="lt1"/>
-          </a:fontRef>
-        </p:style>
-        <p:txBody>
-          <a:bodyPr rtlCol="0" anchor="ctr"/>
-          <a:lstStyle/>
-          <a:p>
-            <a:pPr algn="ctr"/>
-          </a:p>
-        </p:txBody>
-      </p:sp>
-      <p:sp>
-        <p:nvSpPr>
-          <p:cNvPr id="31" name="Rectangle 30"/>
-          <p:cNvSpPr/>
-          <p:nvPr/>
-        </p:nvSpPr>
-        <p:spPr>
-          <a:xfrm>
-            <a:off x="521207" y="5833872"/>
-            <a:ext cx="73152" cy="438912"/>
-          </a:xfrm>
-          <a:prstGeom prst="rect">
-            <a:avLst/>
-          </a:prstGeom>
-          <a:solidFill>
-            <a:srgbClr val="8E64B9"/>
-          </a:solidFill>
-          <a:ln>
-            <a:noFill/>
-          </a:ln>
-        </p:spPr>
-        <p:style>
-          <a:lnRef idx="1">
-            <a:schemeClr val="accent1"/>
-          </a:lnRef>
-          <a:fillRef idx="3">
-            <a:schemeClr val="accent1"/>
-          </a:fillRef>
-          <a:effectRef idx="2">
-            <a:schemeClr val="accent1"/>
-          </a:effectRef>
-          <a:fontRef idx="minor">
-            <a:schemeClr val="lt1"/>
-          </a:fontRef>
-        </p:style>
-        <p:txBody>
-          <a:bodyPr rtlCol="0" anchor="ctr"/>
-          <a:lstStyle/>
-          <a:p>
-            <a:pPr algn="ctr"/>
-          </a:p>
-        </p:txBody>
-      </p:sp>
-      <p:sp>
-        <p:nvSpPr>
-          <p:cNvPr id="32" name="TextBox 31"/>
-          <p:cNvSpPr txBox="1"/>
-          <p:nvPr/>
-        </p:nvSpPr>
-        <p:spPr>
-          <a:xfrm>
-            <a:off x="713232" y="5925312"/>
-            <a:ext cx="10698480" cy="265176"/>
-          </a:xfrm>
-          <a:prstGeom prst="rect">
-            <a:avLst/>
-          </a:prstGeom>
-          <a:noFill/>
-        </p:spPr>
-        <p:txBody>
-          <a:bodyPr wrap="square" lIns="18288" rIns="18288" tIns="18288" bIns="18288" anchor="t">
-            <a:spAutoFit/>
-          </a:bodyPr>
-          <a:lstStyle/>
-          <a:p>
-            <a:pPr algn="l">
-              <a:defRPr sz="1400" b="0">
-                <a:solidFill>
-                  <a:srgbClr val="21232B"/>
-                </a:solidFill>
-                <a:latin typeface="Avenir Next"/>
-              </a:defRPr>
-            </a:pPr>
-            <a:r>
-              <a:t>Use fictional or non-personal content when trying a new reflection in the shared QA account.</a:t>
-            </a:r>
-          </a:p>
-        </p:txBody>
-      </p:sp>
-    </p:spTree>
-  </p:cSld>
-  <p:clrMapOvr>
-    <a:masterClrMapping/>
-  </p:clrMapOvr>
-</p:sld>
-</file>
-
-<file path=ppt/slides/slide12.xml><?xml version="1.0" encoding="utf-8"?>
-<p:sld xmlns:a="http://schemas.openxmlformats.org/drawingml/2006/main" xmlns:p="http://schemas.openxmlformats.org/presentationml/2006/main" xmlns:r="http://schemas.openxmlformats.org/officeDocument/2006/relationships">
-  <p:cSld>
-    <p:spTree>
-      <p:nvGrpSpPr>
-        <p:cNvPr id="1" name=""/>
-        <p:cNvGrpSpPr/>
-        <p:nvPr/>
-      </p:nvGrpSpPr>
-      <p:grpSpPr/>
-      <p:sp>
-        <p:nvSpPr>
-          <p:cNvPr id="2" name="Rectangle 1"/>
-          <p:cNvSpPr/>
-          <p:nvPr/>
-        </p:nvSpPr>
-        <p:spPr>
-          <a:xfrm>
-            <a:off x="0" y="0"/>
-            <a:ext cx="12191695" cy="6858000"/>
-          </a:xfrm>
-          <a:prstGeom prst="rect">
-            <a:avLst/>
-          </a:prstGeom>
-          <a:solidFill>
-            <a:srgbClr val="F8F5EC"/>
-          </a:solidFill>
-          <a:ln>
-            <a:noFill/>
-          </a:ln>
-        </p:spPr>
-        <p:style>
-          <a:lnRef idx="1">
-            <a:schemeClr val="accent1"/>
-          </a:lnRef>
-          <a:fillRef idx="3">
-            <a:schemeClr val="accent1"/>
-          </a:fillRef>
-          <a:effectRef idx="2">
-            <a:schemeClr val="accent1"/>
-          </a:effectRef>
-          <a:fontRef idx="minor">
-            <a:schemeClr val="lt1"/>
-          </a:fontRef>
-        </p:style>
-        <p:txBody>
-          <a:bodyPr rtlCol="0" anchor="ctr"/>
-          <a:lstStyle/>
-          <a:p>
-            <a:pPr algn="ctr"/>
-          </a:p>
-        </p:txBody>
-      </p:sp>
-      <p:sp>
-        <p:nvSpPr>
-          <p:cNvPr id="3" name="Rectangle 2"/>
-          <p:cNvSpPr/>
-          <p:nvPr/>
-        </p:nvSpPr>
-        <p:spPr>
-          <a:xfrm>
-            <a:off x="0" y="0"/>
-            <a:ext cx="12191695" cy="585216"/>
-          </a:xfrm>
-          <a:prstGeom prst="rect">
-            <a:avLst/>
-          </a:prstGeom>
-          <a:solidFill>
-            <a:srgbClr val="08090C"/>
-          </a:solidFill>
-          <a:ln>
-            <a:noFill/>
-          </a:ln>
-        </p:spPr>
-        <p:style>
-          <a:lnRef idx="1">
-            <a:schemeClr val="accent1"/>
-          </a:lnRef>
-          <a:fillRef idx="3">
-            <a:schemeClr val="accent1"/>
-          </a:fillRef>
-          <a:effectRef idx="2">
-            <a:schemeClr val="accent1"/>
-          </a:effectRef>
-          <a:fontRef idx="minor">
-            <a:schemeClr val="lt1"/>
-          </a:fontRef>
-        </p:style>
-        <p:txBody>
-          <a:bodyPr rtlCol="0" anchor="ctr"/>
-          <a:lstStyle/>
-          <a:p>
-            <a:pPr algn="ctr"/>
-          </a:p>
-        </p:txBody>
-      </p:sp>
-      <p:sp>
-        <p:nvSpPr>
-          <p:cNvPr id="4" name="TextBox 3"/>
-          <p:cNvSpPr txBox="1"/>
-          <p:nvPr/>
-        </p:nvSpPr>
-        <p:spPr>
-          <a:xfrm>
-            <a:off x="512064" y="128016"/>
-            <a:ext cx="2011680" cy="283464"/>
-          </a:xfrm>
-          <a:prstGeom prst="rect">
-            <a:avLst/>
-          </a:prstGeom>
-          <a:noFill/>
-        </p:spPr>
-        <p:txBody>
-          <a:bodyPr wrap="square" lIns="18288" rIns="18288" tIns="18288" bIns="18288" anchor="t">
-            <a:spAutoFit/>
-          </a:bodyPr>
-          <a:lstStyle/>
-          <a:p>
-            <a:pPr algn="l">
-              <a:defRPr sz="1700" b="1">
-                <a:solidFill>
-                  <a:srgbClr val="FFFFFF"/>
-                </a:solidFill>
-                <a:latin typeface="Avenir Next"/>
-              </a:defRPr>
-            </a:pPr>
-            <a:r>
-              <a:t>PETAK</a:t>
-            </a:r>
-          </a:p>
-        </p:txBody>
-      </p:sp>
-      <p:sp>
-        <p:nvSpPr>
-          <p:cNvPr id="5" name="TextBox 4"/>
-          <p:cNvSpPr txBox="1"/>
-          <p:nvPr/>
-        </p:nvSpPr>
-        <p:spPr>
-          <a:xfrm>
-            <a:off x="3794760" y="155448"/>
-            <a:ext cx="4617720" cy="237744"/>
-          </a:xfrm>
-          <a:prstGeom prst="rect">
-            <a:avLst/>
-          </a:prstGeom>
-          <a:noFill/>
-        </p:spPr>
-        <p:txBody>
-          <a:bodyPr wrap="square" lIns="18288" rIns="18288" tIns="18288" bIns="18288" anchor="t">
-            <a:spAutoFit/>
-          </a:bodyPr>
-          <a:lstStyle/>
-          <a:p>
-            <a:pPr algn="ctr">
-              <a:defRPr sz="1300" b="1">
-                <a:solidFill>
-                  <a:srgbClr val="FFFFFF"/>
-                </a:solidFill>
-                <a:latin typeface="Avenir Next"/>
-              </a:defRPr>
-            </a:pPr>
-            <a:r>
-              <a:t>FEATURE REFERENCE</a:t>
-            </a:r>
-          </a:p>
-        </p:txBody>
-      </p:sp>
-      <p:sp>
-        <p:nvSpPr>
-          <p:cNvPr id="6" name="TextBox 5"/>
-          <p:cNvSpPr txBox="1"/>
-          <p:nvPr/>
-        </p:nvSpPr>
-        <p:spPr>
-          <a:xfrm>
-            <a:off x="9418320" y="164592"/>
-            <a:ext cx="2221992" cy="228600"/>
-          </a:xfrm>
-          <a:prstGeom prst="rect">
-            <a:avLst/>
-          </a:prstGeom>
-          <a:noFill/>
-        </p:spPr>
-        <p:txBody>
-          <a:bodyPr wrap="square" lIns="18288" rIns="18288" tIns="18288" bIns="18288" anchor="t">
-            <a:spAutoFit/>
-          </a:bodyPr>
-          <a:lstStyle/>
-          <a:p>
-            <a:pPr algn="r">
-              <a:defRPr sz="1100" b="1">
-                <a:solidFill>
-                  <a:srgbClr val="FFFFFF"/>
-                </a:solidFill>
-                <a:latin typeface="Avenir Next"/>
-              </a:defRPr>
-            </a:pPr>
-            <a:r>
-              <a:t>AI BUILDER CUP 2026</a:t>
-            </a:r>
-          </a:p>
-        </p:txBody>
-      </p:sp>
-      <p:sp>
-        <p:nvSpPr>
-          <p:cNvPr id="7" name="TextBox 6"/>
-          <p:cNvSpPr txBox="1"/>
-          <p:nvPr/>
-        </p:nvSpPr>
-        <p:spPr>
-          <a:xfrm>
-            <a:off x="512064" y="859536"/>
-            <a:ext cx="11064240" cy="594360"/>
-          </a:xfrm>
-          <a:prstGeom prst="rect">
-            <a:avLst/>
-          </a:prstGeom>
-          <a:noFill/>
-        </p:spPr>
-        <p:txBody>
-          <a:bodyPr wrap="square" lIns="18288" rIns="18288" tIns="18288" bIns="18288" anchor="t">
-            <a:spAutoFit/>
-          </a:bodyPr>
-          <a:lstStyle/>
-          <a:p>
-            <a:pPr algn="l">
-              <a:defRPr sz="3100" b="1">
-                <a:solidFill>
-                  <a:srgbClr val="21232B"/>
-                </a:solidFill>
-                <a:latin typeface="Avenir Next"/>
-              </a:defRPr>
-            </a:pPr>
-            <a:r>
-              <a:t>Other places in the app</a:t>
-            </a:r>
-          </a:p>
-        </p:txBody>
-      </p:sp>
-      <p:sp>
-        <p:nvSpPr>
-          <p:cNvPr id="8" name="TextBox 7"/>
-          <p:cNvSpPr txBox="1"/>
-          <p:nvPr/>
-        </p:nvSpPr>
-        <p:spPr>
-          <a:xfrm>
-            <a:off x="530352" y="1517904"/>
-            <a:ext cx="10881360" cy="512064"/>
-          </a:xfrm>
-          <a:prstGeom prst="rect">
-            <a:avLst/>
-          </a:prstGeom>
-          <a:noFill/>
-        </p:spPr>
-        <p:txBody>
-          <a:bodyPr wrap="square" lIns="18288" rIns="18288" tIns="18288" bIns="18288" anchor="t">
-            <a:spAutoFit/>
-          </a:bodyPr>
-          <a:lstStyle/>
-          <a:p>
-            <a:pPr algn="l">
-              <a:defRPr sz="1600" b="0">
-                <a:solidFill>
-                  <a:srgbClr val="5B5E67"/>
-                </a:solidFill>
-                <a:latin typeface="Avenir Next"/>
-              </a:defRPr>
-            </a:pPr>
-            <a:r>
-              <a:t>The menu also exposes account and household controls.</a:t>
-            </a:r>
-          </a:p>
-        </p:txBody>
-      </p:sp>
-      <p:sp>
-        <p:nvSpPr>
-          <p:cNvPr id="9" name="Rectangle 8"/>
-          <p:cNvSpPr/>
-          <p:nvPr/>
-        </p:nvSpPr>
-        <p:spPr>
-          <a:xfrm>
-            <a:off x="502920" y="6519672"/>
-            <a:ext cx="11155680" cy="13716"/>
-          </a:xfrm>
-          <a:prstGeom prst="rect">
-            <a:avLst/>
-          </a:prstGeom>
-          <a:solidFill>
-            <a:srgbClr val="DCD7CD"/>
-          </a:solidFill>
-          <a:ln>
-            <a:noFill/>
-          </a:ln>
-        </p:spPr>
-        <p:style>
-          <a:lnRef idx="1">
-            <a:schemeClr val="accent1"/>
-          </a:lnRef>
-          <a:fillRef idx="3">
-            <a:schemeClr val="accent1"/>
-          </a:fillRef>
-          <a:effectRef idx="2">
-            <a:schemeClr val="accent1"/>
-          </a:effectRef>
-          <a:fontRef idx="minor">
-            <a:schemeClr val="lt1"/>
-          </a:fontRef>
-        </p:style>
-        <p:txBody>
-          <a:bodyPr rtlCol="0" anchor="ctr"/>
-          <a:lstStyle/>
-          <a:p>
-            <a:pPr algn="ctr"/>
-          </a:p>
-        </p:txBody>
-      </p:sp>
-      <p:sp>
-        <p:nvSpPr>
-          <p:cNvPr id="10" name="TextBox 9"/>
-          <p:cNvSpPr txBox="1"/>
-          <p:nvPr/>
-        </p:nvSpPr>
-        <p:spPr>
-          <a:xfrm>
-            <a:off x="530352" y="6574536"/>
-            <a:ext cx="8412480" cy="182880"/>
-          </a:xfrm>
-          <a:prstGeom prst="rect">
-            <a:avLst/>
-          </a:prstGeom>
-          <a:noFill/>
-        </p:spPr>
-        <p:txBody>
-          <a:bodyPr wrap="square" lIns="18288" rIns="18288" tIns="18288" bIns="18288" anchor="t">
-            <a:spAutoFit/>
-          </a:bodyPr>
-          <a:lstStyle/>
-          <a:p>
-            <a:pPr algn="l">
-              <a:defRPr sz="1000" b="0">
-                <a:solidFill>
-                  <a:srgbClr val="5B5E67"/>
-                </a:solidFill>
-                <a:latin typeface="Avenir Next"/>
-              </a:defRPr>
-            </a:pPr>
-            <a:r>
-              <a:t>Petak QA · use the reviewer access supplied separately</a:t>
-            </a:r>
-          </a:p>
-        </p:txBody>
-      </p:sp>
-      <p:sp>
-        <p:nvSpPr>
-          <p:cNvPr id="11" name="TextBox 10"/>
-          <p:cNvSpPr txBox="1"/>
-          <p:nvPr/>
-        </p:nvSpPr>
-        <p:spPr>
-          <a:xfrm>
-            <a:off x="11128248" y="6556248"/>
-            <a:ext cx="502920" cy="219456"/>
-          </a:xfrm>
-          <a:prstGeom prst="rect">
-            <a:avLst/>
-          </a:prstGeom>
-          <a:noFill/>
-        </p:spPr>
-        <p:txBody>
-          <a:bodyPr wrap="square" lIns="18288" rIns="18288" tIns="18288" bIns="18288" anchor="t">
-            <a:spAutoFit/>
-          </a:bodyPr>
-          <a:lstStyle/>
-          <a:p>
-            <a:pPr algn="r">
-              <a:defRPr sz="1100" b="1">
-                <a:solidFill>
-                  <a:srgbClr val="5B5E67"/>
-                </a:solidFill>
-                <a:latin typeface="Avenir Next"/>
-              </a:defRPr>
-            </a:pPr>
-            <a:r>
-              <a:t>12</a:t>
-            </a:r>
-          </a:p>
-        </p:txBody>
-      </p:sp>
-      <p:sp>
-        <p:nvSpPr>
-          <p:cNvPr id="12" name="Rounded Rectangle 11"/>
-          <p:cNvSpPr/>
-          <p:nvPr/>
-        </p:nvSpPr>
-        <p:spPr>
-          <a:xfrm>
-            <a:off x="530352" y="2148840"/>
-            <a:ext cx="3547872" cy="3264408"/>
-          </a:xfrm>
-          <a:prstGeom prst="roundRect">
-            <a:avLst>
-              <a:gd name="adj" fmla="val 8000"/>
-            </a:avLst>
-          </a:prstGeom>
-          <a:solidFill>
-            <a:srgbClr val="FFFFFF"/>
-          </a:solidFill>
-          <a:ln>
-            <a:solidFill>
-              <a:srgbClr val="DCD7CD"/>
-            </a:solidFill>
-          </a:ln>
-        </p:spPr>
-        <p:style>
-          <a:lnRef idx="1">
-            <a:schemeClr val="accent1"/>
-          </a:lnRef>
-          <a:fillRef idx="3">
-            <a:schemeClr val="accent1"/>
-          </a:fillRef>
-          <a:effectRef idx="2">
-            <a:schemeClr val="accent1"/>
-          </a:effectRef>
-          <a:fontRef idx="minor">
-            <a:schemeClr val="lt1"/>
-          </a:fontRef>
-        </p:style>
-        <p:txBody>
-          <a:bodyPr rtlCol="0" anchor="ctr"/>
-          <a:lstStyle/>
-          <a:p>
-            <a:pPr algn="ctr"/>
-          </a:p>
-        </p:txBody>
-      </p:sp>
-      <p:sp>
-        <p:nvSpPr>
-          <p:cNvPr id="13" name="Rectangle 12"/>
-          <p:cNvSpPr/>
-          <p:nvPr/>
-        </p:nvSpPr>
-        <p:spPr>
-          <a:xfrm>
-            <a:off x="530352" y="2148840"/>
-            <a:ext cx="3547872" cy="68580"/>
-          </a:xfrm>
-          <a:prstGeom prst="rect">
-            <a:avLst/>
-          </a:prstGeom>
-          <a:solidFill>
-            <a:srgbClr val="21A391"/>
-          </a:solidFill>
-          <a:ln>
-            <a:noFill/>
-          </a:ln>
-        </p:spPr>
-        <p:style>
-          <a:lnRef idx="1">
-            <a:schemeClr val="accent1"/>
-          </a:lnRef>
-          <a:fillRef idx="3">
-            <a:schemeClr val="accent1"/>
-          </a:fillRef>
-          <a:effectRef idx="2">
-            <a:schemeClr val="accent1"/>
-          </a:effectRef>
-          <a:fontRef idx="minor">
-            <a:schemeClr val="lt1"/>
-          </a:fontRef>
-        </p:style>
-        <p:txBody>
-          <a:bodyPr rtlCol="0" anchor="ctr"/>
-          <a:lstStyle/>
-          <a:p>
-            <a:pPr algn="ctr"/>
-          </a:p>
-        </p:txBody>
-      </p:sp>
-      <p:sp>
-        <p:nvSpPr>
-          <p:cNvPr id="14" name="Rounded Rectangle 13"/>
-          <p:cNvSpPr/>
-          <p:nvPr/>
-        </p:nvSpPr>
-        <p:spPr>
-          <a:xfrm>
-            <a:off x="758952" y="2395728"/>
-            <a:ext cx="457200" cy="457200"/>
-          </a:xfrm>
-          <a:prstGeom prst="roundRect">
-            <a:avLst>
-              <a:gd name="adj" fmla="val 8000"/>
-            </a:avLst>
-          </a:prstGeom>
-          <a:solidFill>
-            <a:srgbClr val="21A391"/>
-          </a:solidFill>
-          <a:ln>
-            <a:noFill/>
-          </a:ln>
-        </p:spPr>
-        <p:style>
-          <a:lnRef idx="1">
-            <a:schemeClr val="accent1"/>
-          </a:lnRef>
-          <a:fillRef idx="3">
-            <a:schemeClr val="accent1"/>
-          </a:fillRef>
-          <a:effectRef idx="2">
-            <a:schemeClr val="accent1"/>
-          </a:effectRef>
-          <a:fontRef idx="minor">
-            <a:schemeClr val="lt1"/>
-          </a:fontRef>
-        </p:style>
-        <p:txBody>
-          <a:bodyPr rtlCol="0" anchor="ctr"/>
-          <a:lstStyle/>
-          <a:p>
-            <a:pPr algn="ctr"/>
-          </a:p>
-        </p:txBody>
-      </p:sp>
-      <p:sp>
-        <p:nvSpPr>
-          <p:cNvPr id="15" name="TextBox 14"/>
-          <p:cNvSpPr txBox="1"/>
-          <p:nvPr/>
-        </p:nvSpPr>
-        <p:spPr>
-          <a:xfrm>
-            <a:off x="758952" y="2459736"/>
-            <a:ext cx="457200" cy="201168"/>
-          </a:xfrm>
-          <a:prstGeom prst="rect">
-            <a:avLst/>
-          </a:prstGeom>
-          <a:noFill/>
-        </p:spPr>
-        <p:txBody>
-          <a:bodyPr wrap="square" lIns="18288" rIns="18288" tIns="18288" bIns="18288" anchor="t">
-            <a:spAutoFit/>
-          </a:bodyPr>
-          <a:lstStyle/>
-          <a:p>
-            <a:pPr algn="ctr">
-              <a:defRPr sz="1600" b="1">
-                <a:solidFill>
-                  <a:srgbClr val="FFFFFF"/>
-                </a:solidFill>
-                <a:latin typeface="Avenir Next"/>
-              </a:defRPr>
-            </a:pPr>
-            <a:r>
-              <a:t>1</a:t>
-            </a:r>
-          </a:p>
-        </p:txBody>
-      </p:sp>
-      <p:sp>
-        <p:nvSpPr>
-          <p:cNvPr id="16" name="TextBox 15"/>
-          <p:cNvSpPr txBox="1"/>
-          <p:nvPr/>
-        </p:nvSpPr>
-        <p:spPr>
-          <a:xfrm>
-            <a:off x="1353312" y="2395728"/>
-            <a:ext cx="2487168" cy="512064"/>
-          </a:xfrm>
-          <a:prstGeom prst="rect">
-            <a:avLst/>
-          </a:prstGeom>
-          <a:noFill/>
-        </p:spPr>
-        <p:txBody>
-          <a:bodyPr wrap="square" lIns="18288" rIns="18288" tIns="18288" bIns="18288" anchor="t">
-            <a:spAutoFit/>
-          </a:bodyPr>
-          <a:lstStyle/>
-          <a:p>
-            <a:pPr algn="l">
-              <a:defRPr sz="2100" b="1">
-                <a:solidFill>
-                  <a:srgbClr val="21232B"/>
-                </a:solidFill>
-                <a:latin typeface="Avenir Next"/>
-              </a:defRPr>
-            </a:pPr>
-            <a:r>
-              <a:t>Your neighbours</a:t>
-            </a:r>
-          </a:p>
-        </p:txBody>
-      </p:sp>
-      <p:sp>
-        <p:nvSpPr>
-          <p:cNvPr id="17" name="TextBox 16"/>
-          <p:cNvSpPr txBox="1"/>
-          <p:nvPr/>
-        </p:nvSpPr>
-        <p:spPr>
-          <a:xfrm>
-            <a:off x="786384" y="3081528"/>
-            <a:ext cx="3035808" cy="2148839"/>
-          </a:xfrm>
-          <a:prstGeom prst="rect">
-            <a:avLst/>
-          </a:prstGeom>
-          <a:noFill/>
-        </p:spPr>
-        <p:txBody>
-          <a:bodyPr wrap="square" lIns="18288" rIns="18288" tIns="18288" bIns="18288" anchor="t">
-            <a:spAutoFit/>
-          </a:bodyPr>
-          <a:lstStyle/>
-          <a:p>
-            <a:pPr algn="l">
-              <a:defRPr sz="1700" b="0">
-                <a:solidFill>
-                  <a:srgbClr val="21232B"/>
-                </a:solidFill>
-                <a:latin typeface="Avenir Next"/>
-              </a:defRPr>
-            </a:pPr>
-            <a:r>
-              <a:t>See who lives in the household. Ollie, Penny, Milo and Mira are already active for this reviewer account.</a:t>
-            </a:r>
-          </a:p>
-        </p:txBody>
-      </p:sp>
-      <p:sp>
-        <p:nvSpPr>
-          <p:cNvPr id="18" name="Rounded Rectangle 17"/>
-          <p:cNvSpPr/>
-          <p:nvPr/>
-        </p:nvSpPr>
-        <p:spPr>
-          <a:xfrm>
-            <a:off x="4315968" y="2148840"/>
-            <a:ext cx="3547872" cy="3264408"/>
-          </a:xfrm>
-          <a:prstGeom prst="roundRect">
-            <a:avLst>
-              <a:gd name="adj" fmla="val 8000"/>
-            </a:avLst>
-          </a:prstGeom>
-          <a:solidFill>
-            <a:srgbClr val="FFFFFF"/>
-          </a:solidFill>
-          <a:ln>
-            <a:solidFill>
-              <a:srgbClr val="DCD7CD"/>
-            </a:solidFill>
-          </a:ln>
-        </p:spPr>
-        <p:style>
-          <a:lnRef idx="1">
-            <a:schemeClr val="accent1"/>
-          </a:lnRef>
-          <a:fillRef idx="3">
-            <a:schemeClr val="accent1"/>
-          </a:fillRef>
-          <a:effectRef idx="2">
-            <a:schemeClr val="accent1"/>
-          </a:effectRef>
-          <a:fontRef idx="minor">
-            <a:schemeClr val="lt1"/>
-          </a:fontRef>
-        </p:style>
-        <p:txBody>
-          <a:bodyPr rtlCol="0" anchor="ctr"/>
-          <a:lstStyle/>
-          <a:p>
-            <a:pPr algn="ctr"/>
-          </a:p>
-        </p:txBody>
-      </p:sp>
-      <p:sp>
-        <p:nvSpPr>
-          <p:cNvPr id="19" name="Rectangle 18"/>
-          <p:cNvSpPr/>
-          <p:nvPr/>
-        </p:nvSpPr>
-        <p:spPr>
-          <a:xfrm>
-            <a:off x="4315968" y="2148840"/>
-            <a:ext cx="3547872" cy="68580"/>
-          </a:xfrm>
-          <a:prstGeom prst="rect">
-            <a:avLst/>
-          </a:prstGeom>
-          <a:solidFill>
-            <a:srgbClr val="DFA538"/>
-          </a:solidFill>
-          <a:ln>
-            <a:noFill/>
-          </a:ln>
-        </p:spPr>
-        <p:style>
-          <a:lnRef idx="1">
-            <a:schemeClr val="accent1"/>
-          </a:lnRef>
-          <a:fillRef idx="3">
-            <a:schemeClr val="accent1"/>
-          </a:fillRef>
-          <a:effectRef idx="2">
-            <a:schemeClr val="accent1"/>
-          </a:effectRef>
-          <a:fontRef idx="minor">
-            <a:schemeClr val="lt1"/>
-          </a:fontRef>
-        </p:style>
-        <p:txBody>
-          <a:bodyPr rtlCol="0" anchor="ctr"/>
-          <a:lstStyle/>
-          <a:p>
-            <a:pPr algn="ctr"/>
-          </a:p>
-        </p:txBody>
-      </p:sp>
-      <p:sp>
-        <p:nvSpPr>
-          <p:cNvPr id="20" name="Rounded Rectangle 19"/>
-          <p:cNvSpPr/>
-          <p:nvPr/>
-        </p:nvSpPr>
-        <p:spPr>
-          <a:xfrm>
-            <a:off x="4544568" y="2395728"/>
-            <a:ext cx="457200" cy="457200"/>
-          </a:xfrm>
-          <a:prstGeom prst="roundRect">
-            <a:avLst>
-              <a:gd name="adj" fmla="val 8000"/>
-            </a:avLst>
-          </a:prstGeom>
-          <a:solidFill>
-            <a:srgbClr val="DFA538"/>
-          </a:solidFill>
-          <a:ln>
-            <a:noFill/>
-          </a:ln>
-        </p:spPr>
-        <p:style>
-          <a:lnRef idx="1">
-            <a:schemeClr val="accent1"/>
-          </a:lnRef>
-          <a:fillRef idx="3">
-            <a:schemeClr val="accent1"/>
-          </a:fillRef>
-          <a:effectRef idx="2">
-            <a:schemeClr val="accent1"/>
-          </a:effectRef>
-          <a:fontRef idx="minor">
-            <a:schemeClr val="lt1"/>
-          </a:fontRef>
-        </p:style>
-        <p:txBody>
-          <a:bodyPr rtlCol="0" anchor="ctr"/>
-          <a:lstStyle/>
-          <a:p>
-            <a:pPr algn="ctr"/>
-          </a:p>
-        </p:txBody>
-      </p:sp>
-      <p:sp>
-        <p:nvSpPr>
-          <p:cNvPr id="21" name="TextBox 20"/>
-          <p:cNvSpPr txBox="1"/>
-          <p:nvPr/>
-        </p:nvSpPr>
-        <p:spPr>
-          <a:xfrm>
-            <a:off x="4544568" y="2459736"/>
-            <a:ext cx="457200" cy="201168"/>
-          </a:xfrm>
-          <a:prstGeom prst="rect">
-            <a:avLst/>
-          </a:prstGeom>
-          <a:noFill/>
-        </p:spPr>
-        <p:txBody>
-          <a:bodyPr wrap="square" lIns="18288" rIns="18288" tIns="18288" bIns="18288" anchor="t">
-            <a:spAutoFit/>
-          </a:bodyPr>
-          <a:lstStyle/>
-          <a:p>
-            <a:pPr algn="ctr">
-              <a:defRPr sz="1600" b="1">
-                <a:solidFill>
-                  <a:srgbClr val="FFFFFF"/>
-                </a:solidFill>
-                <a:latin typeface="Avenir Next"/>
-              </a:defRPr>
-            </a:pPr>
-            <a:r>
-              <a:t>2</a:t>
-            </a:r>
-          </a:p>
-        </p:txBody>
-      </p:sp>
-      <p:sp>
-        <p:nvSpPr>
-          <p:cNvPr id="22" name="TextBox 21"/>
-          <p:cNvSpPr txBox="1"/>
-          <p:nvPr/>
-        </p:nvSpPr>
-        <p:spPr>
-          <a:xfrm>
-            <a:off x="5138928" y="2395728"/>
-            <a:ext cx="2487168" cy="512064"/>
-          </a:xfrm>
-          <a:prstGeom prst="rect">
-            <a:avLst/>
-          </a:prstGeom>
-          <a:noFill/>
-        </p:spPr>
-        <p:txBody>
-          <a:bodyPr wrap="square" lIns="18288" rIns="18288" tIns="18288" bIns="18288" anchor="t">
-            <a:spAutoFit/>
-          </a:bodyPr>
-          <a:lstStyle/>
-          <a:p>
-            <a:pPr algn="l">
-              <a:defRPr sz="2100" b="1">
-                <a:solidFill>
-                  <a:srgbClr val="21232B"/>
-                </a:solidFill>
-                <a:latin typeface="Avenir Next"/>
-              </a:defRPr>
-            </a:pPr>
-            <a:r>
-              <a:t>Photos &amp; credits</a:t>
-            </a:r>
-          </a:p>
-        </p:txBody>
-      </p:sp>
-      <p:sp>
-        <p:nvSpPr>
-          <p:cNvPr id="23" name="TextBox 22"/>
-          <p:cNvSpPr txBox="1"/>
-          <p:nvPr/>
-        </p:nvSpPr>
-        <p:spPr>
-          <a:xfrm>
-            <a:off x="4572000" y="3081528"/>
-            <a:ext cx="3035808" cy="2148839"/>
-          </a:xfrm>
-          <a:prstGeom prst="rect">
-            <a:avLst/>
-          </a:prstGeom>
-          <a:noFill/>
-        </p:spPr>
-        <p:txBody>
-          <a:bodyPr wrap="square" lIns="18288" rIns="18288" tIns="18288" bIns="18288" anchor="t">
-            <a:spAutoFit/>
-          </a:bodyPr>
-          <a:lstStyle/>
-          <a:p>
-            <a:pPr algn="l">
-              <a:defRPr sz="1700" b="0">
-                <a:solidFill>
-                  <a:srgbClr val="21232B"/>
-                </a:solidFill>
-                <a:latin typeface="Avenir Next"/>
-              </a:defRPr>
-            </a:pPr>
-            <a:r>
-              <a:t>The menu shows coins and photo credits. The attachment sheet also shows the remaining photo allowance.</a:t>
-            </a:r>
-          </a:p>
-        </p:txBody>
-      </p:sp>
-      <p:sp>
-        <p:nvSpPr>
-          <p:cNvPr id="24" name="Rounded Rectangle 23"/>
-          <p:cNvSpPr/>
-          <p:nvPr/>
-        </p:nvSpPr>
-        <p:spPr>
-          <a:xfrm>
-            <a:off x="8101583" y="2148840"/>
-            <a:ext cx="3547872" cy="3264408"/>
-          </a:xfrm>
-          <a:prstGeom prst="roundRect">
-            <a:avLst>
-              <a:gd name="adj" fmla="val 8000"/>
-            </a:avLst>
-          </a:prstGeom>
-          <a:solidFill>
-            <a:srgbClr val="FFFFFF"/>
-          </a:solidFill>
-          <a:ln>
-            <a:solidFill>
-              <a:srgbClr val="DCD7CD"/>
-            </a:solidFill>
-          </a:ln>
-        </p:spPr>
-        <p:style>
-          <a:lnRef idx="1">
-            <a:schemeClr val="accent1"/>
-          </a:lnRef>
-          <a:fillRef idx="3">
-            <a:schemeClr val="accent1"/>
-          </a:fillRef>
-          <a:effectRef idx="2">
-            <a:schemeClr val="accent1"/>
-          </a:effectRef>
-          <a:fontRef idx="minor">
-            <a:schemeClr val="lt1"/>
-          </a:fontRef>
-        </p:style>
-        <p:txBody>
-          <a:bodyPr rtlCol="0" anchor="ctr"/>
-          <a:lstStyle/>
-          <a:p>
-            <a:pPr algn="ctr"/>
-          </a:p>
-        </p:txBody>
-      </p:sp>
-      <p:sp>
-        <p:nvSpPr>
-          <p:cNvPr id="25" name="Rectangle 24"/>
-          <p:cNvSpPr/>
-          <p:nvPr/>
-        </p:nvSpPr>
-        <p:spPr>
-          <a:xfrm>
-            <a:off x="8101583" y="2148840"/>
-            <a:ext cx="3547872" cy="68580"/>
-          </a:xfrm>
-          <a:prstGeom prst="rect">
-            <a:avLst/>
-          </a:prstGeom>
-          <a:solidFill>
-            <a:srgbClr val="8E64B9"/>
-          </a:solidFill>
-          <a:ln>
-            <a:noFill/>
-          </a:ln>
-        </p:spPr>
-        <p:style>
-          <a:lnRef idx="1">
-            <a:schemeClr val="accent1"/>
-          </a:lnRef>
-          <a:fillRef idx="3">
-            <a:schemeClr val="accent1"/>
-          </a:fillRef>
-          <a:effectRef idx="2">
-            <a:schemeClr val="accent1"/>
-          </a:effectRef>
-          <a:fontRef idx="minor">
-            <a:schemeClr val="lt1"/>
-          </a:fontRef>
-        </p:style>
-        <p:txBody>
-          <a:bodyPr rtlCol="0" anchor="ctr"/>
-          <a:lstStyle/>
-          <a:p>
-            <a:pPr algn="ctr"/>
-          </a:p>
-        </p:txBody>
-      </p:sp>
-      <p:sp>
-        <p:nvSpPr>
-          <p:cNvPr id="26" name="Rounded Rectangle 25"/>
-          <p:cNvSpPr/>
-          <p:nvPr/>
-        </p:nvSpPr>
-        <p:spPr>
-          <a:xfrm>
-            <a:off x="8330183" y="2395728"/>
-            <a:ext cx="457200" cy="457200"/>
-          </a:xfrm>
-          <a:prstGeom prst="roundRect">
-            <a:avLst>
-              <a:gd name="adj" fmla="val 8000"/>
-            </a:avLst>
-          </a:prstGeom>
-          <a:solidFill>
-            <a:srgbClr val="8E64B9"/>
-          </a:solidFill>
-          <a:ln>
-            <a:noFill/>
-          </a:ln>
-        </p:spPr>
-        <p:style>
-          <a:lnRef idx="1">
-            <a:schemeClr val="accent1"/>
-          </a:lnRef>
-          <a:fillRef idx="3">
-            <a:schemeClr val="accent1"/>
-          </a:fillRef>
-          <a:effectRef idx="2">
-            <a:schemeClr val="accent1"/>
-          </a:effectRef>
-          <a:fontRef idx="minor">
-            <a:schemeClr val="lt1"/>
-          </a:fontRef>
-        </p:style>
-        <p:txBody>
-          <a:bodyPr rtlCol="0" anchor="ctr"/>
-          <a:lstStyle/>
-          <a:p>
-            <a:pPr algn="ctr"/>
-          </a:p>
-        </p:txBody>
-      </p:sp>
-      <p:sp>
-        <p:nvSpPr>
-          <p:cNvPr id="27" name="TextBox 26"/>
-          <p:cNvSpPr txBox="1"/>
-          <p:nvPr/>
-        </p:nvSpPr>
-        <p:spPr>
-          <a:xfrm>
-            <a:off x="8330183" y="2459736"/>
-            <a:ext cx="457200" cy="201168"/>
-          </a:xfrm>
-          <a:prstGeom prst="rect">
-            <a:avLst/>
-          </a:prstGeom>
-          <a:noFill/>
-        </p:spPr>
-        <p:txBody>
-          <a:bodyPr wrap="square" lIns="18288" rIns="18288" tIns="18288" bIns="18288" anchor="t">
-            <a:spAutoFit/>
-          </a:bodyPr>
-          <a:lstStyle/>
-          <a:p>
-            <a:pPr algn="ctr">
-              <a:defRPr sz="1600" b="1">
-                <a:solidFill>
-                  <a:srgbClr val="FFFFFF"/>
-                </a:solidFill>
-                <a:latin typeface="Avenir Next"/>
-              </a:defRPr>
-            </a:pPr>
-            <a:r>
-              <a:t>3</a:t>
-            </a:r>
-          </a:p>
-        </p:txBody>
-      </p:sp>
-      <p:sp>
-        <p:nvSpPr>
-          <p:cNvPr id="28" name="TextBox 27"/>
-          <p:cNvSpPr txBox="1"/>
-          <p:nvPr/>
-        </p:nvSpPr>
-        <p:spPr>
-          <a:xfrm>
-            <a:off x="8924544" y="2395728"/>
-            <a:ext cx="2487168" cy="512064"/>
-          </a:xfrm>
-          <a:prstGeom prst="rect">
-            <a:avLst/>
-          </a:prstGeom>
-          <a:noFill/>
-        </p:spPr>
-        <p:txBody>
-          <a:bodyPr wrap="square" lIns="18288" rIns="18288" tIns="18288" bIns="18288" anchor="t">
-            <a:spAutoFit/>
-          </a:bodyPr>
-          <a:lstStyle/>
-          <a:p>
-            <a:pPr algn="l">
-              <a:defRPr sz="2100" b="1">
-                <a:solidFill>
-                  <a:srgbClr val="21232B"/>
-                </a:solidFill>
-                <a:latin typeface="Avenir Next"/>
-              </a:defRPr>
-            </a:pPr>
-            <a:r>
-              <a:t>Settings</a:t>
-            </a:r>
-          </a:p>
-        </p:txBody>
-      </p:sp>
-      <p:sp>
-        <p:nvSpPr>
-          <p:cNvPr id="29" name="TextBox 28"/>
-          <p:cNvSpPr txBox="1"/>
-          <p:nvPr/>
-        </p:nvSpPr>
-        <p:spPr>
-          <a:xfrm>
-            <a:off x="8357615" y="3081528"/>
-            <a:ext cx="3035808" cy="2148839"/>
-          </a:xfrm>
-          <a:prstGeom prst="rect">
-            <a:avLst/>
-          </a:prstGeom>
-          <a:noFill/>
-        </p:spPr>
-        <p:txBody>
-          <a:bodyPr wrap="square" lIns="18288" rIns="18288" tIns="18288" bIns="18288" anchor="t">
-            <a:spAutoFit/>
-          </a:bodyPr>
-          <a:lstStyle/>
-          <a:p>
-            <a:pPr algn="l">
-              <a:defRPr sz="1700" b="0">
-                <a:solidFill>
-                  <a:srgbClr val="21232B"/>
-                </a:solidFill>
-                <a:latin typeface="Avenir Next"/>
-              </a:defRPr>
-            </a:pPr>
-            <a:r>
-              <a:t>Review personal details, notification preferences and Penny’s saved rules. Use Log out when finished.</a:t>
-            </a:r>
-          </a:p>
-        </p:txBody>
-      </p:sp>
-      <p:sp>
-        <p:nvSpPr>
-          <p:cNvPr id="30" name="Rounded Rectangle 29"/>
-          <p:cNvSpPr/>
-          <p:nvPr/>
-        </p:nvSpPr>
-        <p:spPr>
-          <a:xfrm>
-            <a:off x="521207" y="5833872"/>
-            <a:ext cx="11128248" cy="438912"/>
-          </a:xfrm>
-          <a:prstGeom prst="roundRect">
-            <a:avLst>
-              <a:gd name="adj" fmla="val 8000"/>
-            </a:avLst>
-          </a:prstGeom>
-          <a:solidFill>
-            <a:srgbClr val="EEEADF"/>
-          </a:solidFill>
-          <a:ln>
-            <a:noFill/>
-          </a:ln>
-        </p:spPr>
-        <p:style>
-          <a:lnRef idx="1">
-            <a:schemeClr val="accent1"/>
-          </a:lnRef>
-          <a:fillRef idx="3">
-            <a:schemeClr val="accent1"/>
-          </a:fillRef>
-          <a:effectRef idx="2">
-            <a:schemeClr val="accent1"/>
-          </a:effectRef>
-          <a:fontRef idx="minor">
-            <a:schemeClr val="lt1"/>
-          </a:fontRef>
-        </p:style>
-        <p:txBody>
-          <a:bodyPr rtlCol="0" anchor="ctr"/>
-          <a:lstStyle/>
-          <a:p>
-            <a:pPr algn="ctr"/>
-          </a:p>
-        </p:txBody>
-      </p:sp>
-      <p:sp>
-        <p:nvSpPr>
-          <p:cNvPr id="31" name="Rectangle 30"/>
-          <p:cNvSpPr/>
-          <p:nvPr/>
-        </p:nvSpPr>
-        <p:spPr>
-          <a:xfrm>
-            <a:off x="521207" y="5833872"/>
-            <a:ext cx="73152" cy="438912"/>
-          </a:xfrm>
-          <a:prstGeom prst="rect">
-            <a:avLst/>
-          </a:prstGeom>
-          <a:solidFill>
-            <a:srgbClr val="21A391"/>
-          </a:solidFill>
-          <a:ln>
-            <a:noFill/>
-          </a:ln>
-        </p:spPr>
-        <p:style>
-          <a:lnRef idx="1">
-            <a:schemeClr val="accent1"/>
-          </a:lnRef>
-          <a:fillRef idx="3">
-            <a:schemeClr val="accent1"/>
-          </a:fillRef>
-          <a:effectRef idx="2">
-            <a:schemeClr val="accent1"/>
-          </a:effectRef>
-          <a:fontRef idx="minor">
-            <a:schemeClr val="lt1"/>
-          </a:fontRef>
-        </p:style>
-        <p:txBody>
-          <a:bodyPr rtlCol="0" anchor="ctr"/>
-          <a:lstStyle/>
-          <a:p>
-            <a:pPr algn="ctr"/>
-          </a:p>
-        </p:txBody>
-      </p:sp>
-      <p:sp>
-        <p:nvSpPr>
-          <p:cNvPr id="32" name="TextBox 31"/>
-          <p:cNvSpPr txBox="1"/>
-          <p:nvPr/>
-        </p:nvSpPr>
-        <p:spPr>
-          <a:xfrm>
-            <a:off x="713232" y="5925312"/>
-            <a:ext cx="10698480" cy="265176"/>
-          </a:xfrm>
-          <a:prstGeom prst="rect">
-            <a:avLst/>
-          </a:prstGeom>
-          <a:noFill/>
-        </p:spPr>
-        <p:txBody>
-          <a:bodyPr wrap="square" lIns="18288" rIns="18288" tIns="18288" bIns="18288" anchor="t">
-            <a:spAutoFit/>
-          </a:bodyPr>
-          <a:lstStyle/>
-          <a:p>
-            <a:pPr algn="l">
-              <a:defRPr sz="1400" b="0">
-                <a:solidFill>
-                  <a:srgbClr val="21232B"/>
-                </a:solidFill>
-                <a:latin typeface="Avenir Next"/>
-              </a:defRPr>
-            </a:pPr>
-            <a:r>
-              <a:t>The supplied demo video shows the full story; this manual is a reference while trying the app.</a:t>
             </a:r>
           </a:p>
         </p:txBody>
@@ -7898,7 +4138,7 @@
               </a:defRPr>
             </a:pPr>
             <a:r>
-              <a:t>JUDGE WALKTHROUGH</a:t>
+              <a:t>JUDGE USER MANUAL</a:t>
             </a:r>
           </a:p>
         </p:txBody>
@@ -9150,7 +5390,7 @@
               </a:defRPr>
             </a:pPr>
             <a:r>
-              <a:t>JUDGE WALKTHROUGH</a:t>
+              <a:t>JUDGE USER MANUAL</a:t>
             </a:r>
           </a:p>
         </p:txBody>
@@ -9559,7 +5799,7 @@
               </a:defRPr>
             </a:pPr>
             <a:r>
-              <a:t>Chat and routing. Ask a question or share a photo.</a:t>
+              <a:t>Chat routes your input through Ollie. The Ollie menu item opens the task board.</a:t>
             </a:r>
           </a:p>
         </p:txBody>
@@ -10241,7 +6481,7 @@
               </a:defRPr>
             </a:pPr>
             <a:r>
-              <a:t>Open Ollie's board to inspect tasks. Use the menu to switch between specialist dashboards.</a:t>
+              <a:t>Use the menu to open Ollie's board or the Penny, Milo and Mira dashboards.</a:t>
             </a:r>
           </a:p>
         </p:txBody>
@@ -10417,7 +6657,7 @@
               </a:defRPr>
             </a:pPr>
             <a:r>
-              <a:t>JUDGE WALKTHROUGH</a:t>
+              <a:t>JUDGE USER MANUAL</a:t>
             </a:r>
           </a:p>
         </p:txBody>
@@ -10516,8 +6756,8 @@
           </a:bodyPr>
           <a:lstStyle/>
           <a:p>
-            <a:pPr algn="l">
-              <a:defRPr sz="1600" b="0">
+            <a:pPr>
+              <a:defRPr sz="1600">
                 <a:solidFill>
                   <a:srgbClr val="5B5E67"/>
                 </a:solidFill>
@@ -10525,7 +6765,7 @@
               </a:defRPr>
             </a:pPr>
             <a:r>
-              <a:t>Use these records to see how conversation becomes a usable log.</a:t>
+              <a:t>Open Milo and Penny from the menu. Set Custom to include 4 October 2026.</a:t>
             </a:r>
           </a:p>
         </p:txBody>
@@ -11344,7 +7584,7 @@
               </a:defRPr>
             </a:pPr>
             <a:r>
-              <a:t>JUDGE WALKTHROUGH</a:t>
+              <a:t>JUDGE USER MANUAL</a:t>
             </a:r>
           </a:p>
         </p:txBody>
@@ -12296,7 +8536,7 @@
               </a:defRPr>
             </a:pPr>
             <a:r>
-              <a:t>Send once. Read the replies, answer any clarification, then open Penny and Milo to check saved entries.</a:t>
+              <a:t>Send once. Read the replies, then check Penny's saved expense. If Milo saves a meal too, inspect his food log.</a:t>
             </a:r>
           </a:p>
         </p:txBody>
@@ -12596,7 +8836,7 @@
               </a:defRPr>
             </a:pPr>
             <a:r>
-              <a:t>JUDGE WALKTHROUGH</a:t>
+              <a:t>JUDGE USER MANUAL</a:t>
             </a:r>
           </a:p>
         </p:txBody>
@@ -13548,7 +9788,7 @@
               </a:defRPr>
             </a:pPr>
             <a:r>
-              <a:t>Read Milo’s reply and inspect the new food log entry. Correct a detail in chat if needed.</a:t>
+              <a:t>Read Milo’s reply and check whether a food entry was saved. Correct a detail in Chat if needed.</a:t>
             </a:r>
           </a:p>
         </p:txBody>
@@ -13848,7 +10088,7 @@
               </a:defRPr>
             </a:pPr>
             <a:r>
-              <a:t>JUDGE WALKTHROUGH</a:t>
+              <a:t>JUDGE USER MANUAL</a:t>
             </a:r>
           </a:p>
         </p:txBody>
@@ -13920,7 +10160,7 @@
               </a:defRPr>
             </a:pPr>
             <a:r>
-              <a:t>6  Verify the result</a:t>
+              <a:t>6  Verify actual results</a:t>
             </a:r>
           </a:p>
         </p:txBody>
@@ -14314,7 +10554,7 @@
               </a:defRPr>
             </a:pPr>
             <a:r>
-              <a:t>Open the spending dashboard. Confirm the merchant, amount and date for your new receipt.</a:t>
+              <a:t>Open Penny’s dashboard. Check whether a new expense appears, then inspect merchant, amount and date.</a:t>
             </a:r>
           </a:p>
         </p:txBody>
@@ -14557,7 +10797,7 @@
               </a:defRPr>
             </a:pPr>
             <a:r>
-              <a:t>Open the food log. Confirm the meal description and photo-backed entry.</a:t>
+              <a:t>Open Milo’s food log. Check whether the meal appears and whether photo evidence is available.</a:t>
             </a:r>
           </a:p>
         </p:txBody>
@@ -14764,7 +11004,7 @@
               </a:defRPr>
             </a:pPr>
             <a:r>
-              <a:t>Ask Ollie</a:t>
+              <a:t>Ask in Chat</a:t>
             </a:r>
           </a:p>
         </p:txBody>
@@ -14800,7 +11040,7 @@
               </a:defRPr>
             </a:pPr>
             <a:r>
-              <a:t>Try a follow-up such as “How much did I spend today?” Compare the reply with saved records.</a:t>
+              <a:t>Return to Chat and ask “How much did I spend today?” Compare the reply with saved records.</a:t>
             </a:r>
           </a:p>
         </p:txBody>
@@ -15172,7 +11412,7 @@
               </a:defRPr>
             </a:pPr>
             <a:r>
-              <a:t>Ollie's board: manage tasks</a:t>
+              <a:t>Ollie and Mira: tasks and journal</a:t>
             </a:r>
           </a:p>
         </p:txBody>
@@ -15208,7 +11448,7 @@
               </a:defRPr>
             </a:pPr>
             <a:r>
-              <a:t>The board gathers work from the active neighbours in one place.</a:t>
+              <a:t>Explore two more ways to revisit work created from conversations.</a:t>
             </a:r>
           </a:p>
         </p:txBody>
@@ -15530,7 +11770,7 @@
               </a:defRPr>
             </a:pPr>
             <a:r>
-              <a:t>Open the board</a:t>
+              <a:t>Ollie's board</a:t>
             </a:r>
           </a:p>
         </p:txBody>
@@ -15566,7 +11806,7 @@
               </a:defRPr>
             </a:pPr>
             <a:r>
-              <a:t>Open the menu and tap Ollie. The board shows tasks from Penny, Milo and Mira.</a:t>
+              <a:t>Open the menu and tap Ollie. Filter tasks by date or status, then tap a task to return to its conversation.</a:t>
             </a:r>
           </a:p>
         </p:txBody>
@@ -15773,7 +12013,7 @@
               </a:defRPr>
             </a:pPr>
             <a:r>
-              <a:t>Filter tasks</a:t>
+              <a:t>Mira's journal</a:t>
             </a:r>
           </a:p>
         </p:txBody>
@@ -15809,7 +12049,7 @@
               </a:defRPr>
             </a:pPr>
             <a:r>
-              <a:t>Change the date range and status chips to inspect planned, in-progress, done or declined work.</a:t>
+              <a:t>Open Mira from the menu. Use the date range, feeling chips or search to find a prepared entry.</a:t>
             </a:r>
           </a:p>
         </p:txBody>
@@ -16016,7 +12256,7 @@
               </a:defRPr>
             </a:pPr>
             <a:r>
-              <a:t>Open a task</a:t>
+              <a:t>If time remains</a:t>
             </a:r>
           </a:p>
         </p:txBody>
@@ -16052,7 +12292,7 @@
               </a:defRPr>
             </a:pPr>
             <a:r>
-              <a:t>Tap a task to return to its conversation and answer the question there. Task status can also be changed on the board.</a:t>
+              <a:t>The menu also shows Coins, Your neighbours and Settings. The attachment sheet shows the photo allowance.</a:t>
             </a:r>
           </a:p>
         </p:txBody>
@@ -16176,1259 +12416,7 @@
               </a:defRPr>
             </a:pPr>
             <a:r>
-              <a:t>The board organizes tasks; the conversation holds the answer and supporting context.</a:t>
-            </a:r>
-          </a:p>
-        </p:txBody>
-      </p:sp>
-    </p:spTree>
-  </p:cSld>
-  <p:clrMapOvr>
-    <a:masterClrMapping/>
-  </p:clrMapOvr>
-</p:sld>
-</file>
-
-<file path=ppt/slides/slide9.xml><?xml version="1.0" encoding="utf-8"?>
-<p:sld xmlns:a="http://schemas.openxmlformats.org/drawingml/2006/main" xmlns:p="http://schemas.openxmlformats.org/presentationml/2006/main" xmlns:r="http://schemas.openxmlformats.org/officeDocument/2006/relationships">
-  <p:cSld>
-    <p:spTree>
-      <p:nvGrpSpPr>
-        <p:cNvPr id="1" name=""/>
-        <p:cNvGrpSpPr/>
-        <p:nvPr/>
-      </p:nvGrpSpPr>
-      <p:grpSpPr/>
-      <p:sp>
-        <p:nvSpPr>
-          <p:cNvPr id="2" name="Rectangle 1"/>
-          <p:cNvSpPr/>
-          <p:nvPr/>
-        </p:nvSpPr>
-        <p:spPr>
-          <a:xfrm>
-            <a:off x="0" y="0"/>
-            <a:ext cx="12191695" cy="6858000"/>
-          </a:xfrm>
-          <a:prstGeom prst="rect">
-            <a:avLst/>
-          </a:prstGeom>
-          <a:solidFill>
-            <a:srgbClr val="F8F5EC"/>
-          </a:solidFill>
-          <a:ln>
-            <a:noFill/>
-          </a:ln>
-        </p:spPr>
-        <p:style>
-          <a:lnRef idx="1">
-            <a:schemeClr val="accent1"/>
-          </a:lnRef>
-          <a:fillRef idx="3">
-            <a:schemeClr val="accent1"/>
-          </a:fillRef>
-          <a:effectRef idx="2">
-            <a:schemeClr val="accent1"/>
-          </a:effectRef>
-          <a:fontRef idx="minor">
-            <a:schemeClr val="lt1"/>
-          </a:fontRef>
-        </p:style>
-        <p:txBody>
-          <a:bodyPr rtlCol="0" anchor="ctr"/>
-          <a:lstStyle/>
-          <a:p>
-            <a:pPr algn="ctr"/>
-          </a:p>
-        </p:txBody>
-      </p:sp>
-      <p:sp>
-        <p:nvSpPr>
-          <p:cNvPr id="3" name="Rectangle 2"/>
-          <p:cNvSpPr/>
-          <p:nvPr/>
-        </p:nvSpPr>
-        <p:spPr>
-          <a:xfrm>
-            <a:off x="0" y="0"/>
-            <a:ext cx="12191695" cy="585216"/>
-          </a:xfrm>
-          <a:prstGeom prst="rect">
-            <a:avLst/>
-          </a:prstGeom>
-          <a:solidFill>
-            <a:srgbClr val="08090C"/>
-          </a:solidFill>
-          <a:ln>
-            <a:noFill/>
-          </a:ln>
-        </p:spPr>
-        <p:style>
-          <a:lnRef idx="1">
-            <a:schemeClr val="accent1"/>
-          </a:lnRef>
-          <a:fillRef idx="3">
-            <a:schemeClr val="accent1"/>
-          </a:fillRef>
-          <a:effectRef idx="2">
-            <a:schemeClr val="accent1"/>
-          </a:effectRef>
-          <a:fontRef idx="minor">
-            <a:schemeClr val="lt1"/>
-          </a:fontRef>
-        </p:style>
-        <p:txBody>
-          <a:bodyPr rtlCol="0" anchor="ctr"/>
-          <a:lstStyle/>
-          <a:p>
-            <a:pPr algn="ctr"/>
-          </a:p>
-        </p:txBody>
-      </p:sp>
-      <p:sp>
-        <p:nvSpPr>
-          <p:cNvPr id="4" name="TextBox 3"/>
-          <p:cNvSpPr txBox="1"/>
-          <p:nvPr/>
-        </p:nvSpPr>
-        <p:spPr>
-          <a:xfrm>
-            <a:off x="512064" y="128016"/>
-            <a:ext cx="2011680" cy="283464"/>
-          </a:xfrm>
-          <a:prstGeom prst="rect">
-            <a:avLst/>
-          </a:prstGeom>
-          <a:noFill/>
-        </p:spPr>
-        <p:txBody>
-          <a:bodyPr wrap="square" lIns="18288" rIns="18288" tIns="18288" bIns="18288" anchor="t">
-            <a:spAutoFit/>
-          </a:bodyPr>
-          <a:lstStyle/>
-          <a:p>
-            <a:pPr algn="l">
-              <a:defRPr sz="1700" b="1">
-                <a:solidFill>
-                  <a:srgbClr val="FFFFFF"/>
-                </a:solidFill>
-                <a:latin typeface="Avenir Next"/>
-              </a:defRPr>
-            </a:pPr>
-            <a:r>
-              <a:t>PETAK</a:t>
-            </a:r>
-          </a:p>
-        </p:txBody>
-      </p:sp>
-      <p:sp>
-        <p:nvSpPr>
-          <p:cNvPr id="5" name="TextBox 4"/>
-          <p:cNvSpPr txBox="1"/>
-          <p:nvPr/>
-        </p:nvSpPr>
-        <p:spPr>
-          <a:xfrm>
-            <a:off x="3794760" y="155448"/>
-            <a:ext cx="4617720" cy="237744"/>
-          </a:xfrm>
-          <a:prstGeom prst="rect">
-            <a:avLst/>
-          </a:prstGeom>
-          <a:noFill/>
-        </p:spPr>
-        <p:txBody>
-          <a:bodyPr wrap="square" lIns="18288" rIns="18288" tIns="18288" bIns="18288" anchor="t">
-            <a:spAutoFit/>
-          </a:bodyPr>
-          <a:lstStyle/>
-          <a:p>
-            <a:pPr algn="ctr">
-              <a:defRPr sz="1300" b="1">
-                <a:solidFill>
-                  <a:srgbClr val="FFFFFF"/>
-                </a:solidFill>
-                <a:latin typeface="Avenir Next"/>
-              </a:defRPr>
-            </a:pPr>
-            <a:r>
-              <a:t>FEATURE REFERENCE</a:t>
-            </a:r>
-          </a:p>
-        </p:txBody>
-      </p:sp>
-      <p:sp>
-        <p:nvSpPr>
-          <p:cNvPr id="6" name="TextBox 5"/>
-          <p:cNvSpPr txBox="1"/>
-          <p:nvPr/>
-        </p:nvSpPr>
-        <p:spPr>
-          <a:xfrm>
-            <a:off x="9418320" y="164592"/>
-            <a:ext cx="2221992" cy="228600"/>
-          </a:xfrm>
-          <a:prstGeom prst="rect">
-            <a:avLst/>
-          </a:prstGeom>
-          <a:noFill/>
-        </p:spPr>
-        <p:txBody>
-          <a:bodyPr wrap="square" lIns="18288" rIns="18288" tIns="18288" bIns="18288" anchor="t">
-            <a:spAutoFit/>
-          </a:bodyPr>
-          <a:lstStyle/>
-          <a:p>
-            <a:pPr algn="r">
-              <a:defRPr sz="1100" b="1">
-                <a:solidFill>
-                  <a:srgbClr val="FFFFFF"/>
-                </a:solidFill>
-                <a:latin typeface="Avenir Next"/>
-              </a:defRPr>
-            </a:pPr>
-            <a:r>
-              <a:t>AI BUILDER CUP 2026</a:t>
-            </a:r>
-          </a:p>
-        </p:txBody>
-      </p:sp>
-      <p:sp>
-        <p:nvSpPr>
-          <p:cNvPr id="7" name="TextBox 6"/>
-          <p:cNvSpPr txBox="1"/>
-          <p:nvPr/>
-        </p:nvSpPr>
-        <p:spPr>
-          <a:xfrm>
-            <a:off x="512064" y="859536"/>
-            <a:ext cx="11064240" cy="594360"/>
-          </a:xfrm>
-          <a:prstGeom prst="rect">
-            <a:avLst/>
-          </a:prstGeom>
-          <a:noFill/>
-        </p:spPr>
-        <p:txBody>
-          <a:bodyPr wrap="square" lIns="18288" rIns="18288" tIns="18288" bIns="18288" anchor="t">
-            <a:spAutoFit/>
-          </a:bodyPr>
-          <a:lstStyle/>
-          <a:p>
-            <a:pPr algn="l">
-              <a:defRPr sz="3100" b="1">
-                <a:solidFill>
-                  <a:srgbClr val="21232B"/>
-                </a:solidFill>
-                <a:latin typeface="Avenir Next"/>
-              </a:defRPr>
-            </a:pPr>
-            <a:r>
-              <a:t>Penny: spending and receipts</a:t>
-            </a:r>
-          </a:p>
-        </p:txBody>
-      </p:sp>
-      <p:sp>
-        <p:nvSpPr>
-          <p:cNvPr id="8" name="TextBox 7"/>
-          <p:cNvSpPr txBox="1"/>
-          <p:nvPr/>
-        </p:nvSpPr>
-        <p:spPr>
-          <a:xfrm>
-            <a:off x="530352" y="1517904"/>
-            <a:ext cx="10881360" cy="512064"/>
-          </a:xfrm>
-          <a:prstGeom prst="rect">
-            <a:avLst/>
-          </a:prstGeom>
-          <a:noFill/>
-        </p:spPr>
-        <p:txBody>
-          <a:bodyPr wrap="square" lIns="18288" rIns="18288" tIns="18288" bIns="18288" anchor="t">
-            <a:spAutoFit/>
-          </a:bodyPr>
-          <a:lstStyle/>
-          <a:p>
-            <a:pPr algn="l">
-              <a:defRPr sz="1600" b="0">
-                <a:solidFill>
-                  <a:srgbClr val="5B5E67"/>
-                </a:solidFill>
-                <a:latin typeface="Avenir Next"/>
-              </a:defRPr>
-            </a:pPr>
-            <a:r>
-              <a:t>Use the dashboard to inspect the saved expense, not only the chat reply.</a:t>
-            </a:r>
-          </a:p>
-        </p:txBody>
-      </p:sp>
-      <p:sp>
-        <p:nvSpPr>
-          <p:cNvPr id="9" name="Rectangle 8"/>
-          <p:cNvSpPr/>
-          <p:nvPr/>
-        </p:nvSpPr>
-        <p:spPr>
-          <a:xfrm>
-            <a:off x="502920" y="6519672"/>
-            <a:ext cx="11155680" cy="13716"/>
-          </a:xfrm>
-          <a:prstGeom prst="rect">
-            <a:avLst/>
-          </a:prstGeom>
-          <a:solidFill>
-            <a:srgbClr val="DCD7CD"/>
-          </a:solidFill>
-          <a:ln>
-            <a:noFill/>
-          </a:ln>
-        </p:spPr>
-        <p:style>
-          <a:lnRef idx="1">
-            <a:schemeClr val="accent1"/>
-          </a:lnRef>
-          <a:fillRef idx="3">
-            <a:schemeClr val="accent1"/>
-          </a:fillRef>
-          <a:effectRef idx="2">
-            <a:schemeClr val="accent1"/>
-          </a:effectRef>
-          <a:fontRef idx="minor">
-            <a:schemeClr val="lt1"/>
-          </a:fontRef>
-        </p:style>
-        <p:txBody>
-          <a:bodyPr rtlCol="0" anchor="ctr"/>
-          <a:lstStyle/>
-          <a:p>
-            <a:pPr algn="ctr"/>
-          </a:p>
-        </p:txBody>
-      </p:sp>
-      <p:sp>
-        <p:nvSpPr>
-          <p:cNvPr id="10" name="TextBox 9"/>
-          <p:cNvSpPr txBox="1"/>
-          <p:nvPr/>
-        </p:nvSpPr>
-        <p:spPr>
-          <a:xfrm>
-            <a:off x="530352" y="6574536"/>
-            <a:ext cx="8412480" cy="182880"/>
-          </a:xfrm>
-          <a:prstGeom prst="rect">
-            <a:avLst/>
-          </a:prstGeom>
-          <a:noFill/>
-        </p:spPr>
-        <p:txBody>
-          <a:bodyPr wrap="square" lIns="18288" rIns="18288" tIns="18288" bIns="18288" anchor="t">
-            <a:spAutoFit/>
-          </a:bodyPr>
-          <a:lstStyle/>
-          <a:p>
-            <a:pPr algn="l">
-              <a:defRPr sz="1000" b="0">
-                <a:solidFill>
-                  <a:srgbClr val="5B5E67"/>
-                </a:solidFill>
-                <a:latin typeface="Avenir Next"/>
-              </a:defRPr>
-            </a:pPr>
-            <a:r>
-              <a:t>Petak QA · use the reviewer access supplied separately</a:t>
-            </a:r>
-          </a:p>
-        </p:txBody>
-      </p:sp>
-      <p:sp>
-        <p:nvSpPr>
-          <p:cNvPr id="11" name="TextBox 10"/>
-          <p:cNvSpPr txBox="1"/>
-          <p:nvPr/>
-        </p:nvSpPr>
-        <p:spPr>
-          <a:xfrm>
-            <a:off x="11128248" y="6556248"/>
-            <a:ext cx="502920" cy="219456"/>
-          </a:xfrm>
-          <a:prstGeom prst="rect">
-            <a:avLst/>
-          </a:prstGeom>
-          <a:noFill/>
-        </p:spPr>
-        <p:txBody>
-          <a:bodyPr wrap="square" lIns="18288" rIns="18288" tIns="18288" bIns="18288" anchor="t">
-            <a:spAutoFit/>
-          </a:bodyPr>
-          <a:lstStyle/>
-          <a:p>
-            <a:pPr algn="r">
-              <a:defRPr sz="1100" b="1">
-                <a:solidFill>
-                  <a:srgbClr val="5B5E67"/>
-                </a:solidFill>
-                <a:latin typeface="Avenir Next"/>
-              </a:defRPr>
-            </a:pPr>
-            <a:r>
-              <a:t>9</a:t>
-            </a:r>
-          </a:p>
-        </p:txBody>
-      </p:sp>
-      <p:sp>
-        <p:nvSpPr>
-          <p:cNvPr id="12" name="Rounded Rectangle 11"/>
-          <p:cNvSpPr/>
-          <p:nvPr/>
-        </p:nvSpPr>
-        <p:spPr>
-          <a:xfrm>
-            <a:off x="530352" y="2148840"/>
-            <a:ext cx="3547872" cy="3264408"/>
-          </a:xfrm>
-          <a:prstGeom prst="roundRect">
-            <a:avLst>
-              <a:gd name="adj" fmla="val 8000"/>
-            </a:avLst>
-          </a:prstGeom>
-          <a:solidFill>
-            <a:srgbClr val="FFFFFF"/>
-          </a:solidFill>
-          <a:ln>
-            <a:solidFill>
-              <a:srgbClr val="DCD7CD"/>
-            </a:solidFill>
-          </a:ln>
-        </p:spPr>
-        <p:style>
-          <a:lnRef idx="1">
-            <a:schemeClr val="accent1"/>
-          </a:lnRef>
-          <a:fillRef idx="3">
-            <a:schemeClr val="accent1"/>
-          </a:fillRef>
-          <a:effectRef idx="2">
-            <a:schemeClr val="accent1"/>
-          </a:effectRef>
-          <a:fontRef idx="minor">
-            <a:schemeClr val="lt1"/>
-          </a:fontRef>
-        </p:style>
-        <p:txBody>
-          <a:bodyPr rtlCol="0" anchor="ctr"/>
-          <a:lstStyle/>
-          <a:p>
-            <a:pPr algn="ctr"/>
-          </a:p>
-        </p:txBody>
-      </p:sp>
-      <p:sp>
-        <p:nvSpPr>
-          <p:cNvPr id="13" name="Rectangle 12"/>
-          <p:cNvSpPr/>
-          <p:nvPr/>
-        </p:nvSpPr>
-        <p:spPr>
-          <a:xfrm>
-            <a:off x="530352" y="2148840"/>
-            <a:ext cx="3547872" cy="68580"/>
-          </a:xfrm>
-          <a:prstGeom prst="rect">
-            <a:avLst/>
-          </a:prstGeom>
-          <a:solidFill>
-            <a:srgbClr val="DFA538"/>
-          </a:solidFill>
-          <a:ln>
-            <a:noFill/>
-          </a:ln>
-        </p:spPr>
-        <p:style>
-          <a:lnRef idx="1">
-            <a:schemeClr val="accent1"/>
-          </a:lnRef>
-          <a:fillRef idx="3">
-            <a:schemeClr val="accent1"/>
-          </a:fillRef>
-          <a:effectRef idx="2">
-            <a:schemeClr val="accent1"/>
-          </a:effectRef>
-          <a:fontRef idx="minor">
-            <a:schemeClr val="lt1"/>
-          </a:fontRef>
-        </p:style>
-        <p:txBody>
-          <a:bodyPr rtlCol="0" anchor="ctr"/>
-          <a:lstStyle/>
-          <a:p>
-            <a:pPr algn="ctr"/>
-          </a:p>
-        </p:txBody>
-      </p:sp>
-      <p:sp>
-        <p:nvSpPr>
-          <p:cNvPr id="14" name="Rounded Rectangle 13"/>
-          <p:cNvSpPr/>
-          <p:nvPr/>
-        </p:nvSpPr>
-        <p:spPr>
-          <a:xfrm>
-            <a:off x="758952" y="2395728"/>
-            <a:ext cx="457200" cy="457200"/>
-          </a:xfrm>
-          <a:prstGeom prst="roundRect">
-            <a:avLst>
-              <a:gd name="adj" fmla="val 8000"/>
-            </a:avLst>
-          </a:prstGeom>
-          <a:solidFill>
-            <a:srgbClr val="DFA538"/>
-          </a:solidFill>
-          <a:ln>
-            <a:noFill/>
-          </a:ln>
-        </p:spPr>
-        <p:style>
-          <a:lnRef idx="1">
-            <a:schemeClr val="accent1"/>
-          </a:lnRef>
-          <a:fillRef idx="3">
-            <a:schemeClr val="accent1"/>
-          </a:fillRef>
-          <a:effectRef idx="2">
-            <a:schemeClr val="accent1"/>
-          </a:effectRef>
-          <a:fontRef idx="minor">
-            <a:schemeClr val="lt1"/>
-          </a:fontRef>
-        </p:style>
-        <p:txBody>
-          <a:bodyPr rtlCol="0" anchor="ctr"/>
-          <a:lstStyle/>
-          <a:p>
-            <a:pPr algn="ctr"/>
-          </a:p>
-        </p:txBody>
-      </p:sp>
-      <p:sp>
-        <p:nvSpPr>
-          <p:cNvPr id="15" name="TextBox 14"/>
-          <p:cNvSpPr txBox="1"/>
-          <p:nvPr/>
-        </p:nvSpPr>
-        <p:spPr>
-          <a:xfrm>
-            <a:off x="758952" y="2459736"/>
-            <a:ext cx="457200" cy="201168"/>
-          </a:xfrm>
-          <a:prstGeom prst="rect">
-            <a:avLst/>
-          </a:prstGeom>
-          <a:noFill/>
-        </p:spPr>
-        <p:txBody>
-          <a:bodyPr wrap="square" lIns="18288" rIns="18288" tIns="18288" bIns="18288" anchor="t">
-            <a:spAutoFit/>
-          </a:bodyPr>
-          <a:lstStyle/>
-          <a:p>
-            <a:pPr algn="ctr">
-              <a:defRPr sz="1600" b="1">
-                <a:solidFill>
-                  <a:srgbClr val="FFFFFF"/>
-                </a:solidFill>
-                <a:latin typeface="Avenir Next"/>
-              </a:defRPr>
-            </a:pPr>
-            <a:r>
-              <a:t>1</a:t>
-            </a:r>
-          </a:p>
-        </p:txBody>
-      </p:sp>
-      <p:sp>
-        <p:nvSpPr>
-          <p:cNvPr id="16" name="TextBox 15"/>
-          <p:cNvSpPr txBox="1"/>
-          <p:nvPr/>
-        </p:nvSpPr>
-        <p:spPr>
-          <a:xfrm>
-            <a:off x="1353312" y="2395728"/>
-            <a:ext cx="2487168" cy="512064"/>
-          </a:xfrm>
-          <a:prstGeom prst="rect">
-            <a:avLst/>
-          </a:prstGeom>
-          <a:noFill/>
-        </p:spPr>
-        <p:txBody>
-          <a:bodyPr wrap="square" lIns="18288" rIns="18288" tIns="18288" bIns="18288" anchor="t">
-            <a:spAutoFit/>
-          </a:bodyPr>
-          <a:lstStyle/>
-          <a:p>
-            <a:pPr algn="l">
-              <a:defRPr sz="2100" b="1">
-                <a:solidFill>
-                  <a:srgbClr val="21232B"/>
-                </a:solidFill>
-                <a:latin typeface="Avenir Next"/>
-              </a:defRPr>
-            </a:pPr>
-            <a:r>
-              <a:t>Choose a range</a:t>
-            </a:r>
-          </a:p>
-        </p:txBody>
-      </p:sp>
-      <p:sp>
-        <p:nvSpPr>
-          <p:cNvPr id="17" name="TextBox 16"/>
-          <p:cNvSpPr txBox="1"/>
-          <p:nvPr/>
-        </p:nvSpPr>
-        <p:spPr>
-          <a:xfrm>
-            <a:off x="786384" y="3081528"/>
-            <a:ext cx="3035808" cy="2148839"/>
-          </a:xfrm>
-          <a:prstGeom prst="rect">
-            <a:avLst/>
-          </a:prstGeom>
-          <a:noFill/>
-        </p:spPr>
-        <p:txBody>
-          <a:bodyPr wrap="square" lIns="18288" rIns="18288" tIns="18288" bIns="18288" anchor="t">
-            <a:spAutoFit/>
-          </a:bodyPr>
-          <a:lstStyle/>
-          <a:p>
-            <a:pPr algn="l">
-              <a:defRPr sz="1700" b="0">
-                <a:solidFill>
-                  <a:srgbClr val="21232B"/>
-                </a:solidFill>
-                <a:latin typeface="Avenir Next"/>
-              </a:defRPr>
-            </a:pPr>
-            <a:r>
-              <a:t>Open Penny from the menu. Switch between Today, Week, Month, Year or a custom date range.</a:t>
-            </a:r>
-          </a:p>
-        </p:txBody>
-      </p:sp>
-      <p:sp>
-        <p:nvSpPr>
-          <p:cNvPr id="18" name="Rounded Rectangle 17"/>
-          <p:cNvSpPr/>
-          <p:nvPr/>
-        </p:nvSpPr>
-        <p:spPr>
-          <a:xfrm>
-            <a:off x="4315968" y="2148840"/>
-            <a:ext cx="3547872" cy="3264408"/>
-          </a:xfrm>
-          <a:prstGeom prst="roundRect">
-            <a:avLst>
-              <a:gd name="adj" fmla="val 8000"/>
-            </a:avLst>
-          </a:prstGeom>
-          <a:solidFill>
-            <a:srgbClr val="FFFFFF"/>
-          </a:solidFill>
-          <a:ln>
-            <a:solidFill>
-              <a:srgbClr val="DCD7CD"/>
-            </a:solidFill>
-          </a:ln>
-        </p:spPr>
-        <p:style>
-          <a:lnRef idx="1">
-            <a:schemeClr val="accent1"/>
-          </a:lnRef>
-          <a:fillRef idx="3">
-            <a:schemeClr val="accent1"/>
-          </a:fillRef>
-          <a:effectRef idx="2">
-            <a:schemeClr val="accent1"/>
-          </a:effectRef>
-          <a:fontRef idx="minor">
-            <a:schemeClr val="lt1"/>
-          </a:fontRef>
-        </p:style>
-        <p:txBody>
-          <a:bodyPr rtlCol="0" anchor="ctr"/>
-          <a:lstStyle/>
-          <a:p>
-            <a:pPr algn="ctr"/>
-          </a:p>
-        </p:txBody>
-      </p:sp>
-      <p:sp>
-        <p:nvSpPr>
-          <p:cNvPr id="19" name="Rectangle 18"/>
-          <p:cNvSpPr/>
-          <p:nvPr/>
-        </p:nvSpPr>
-        <p:spPr>
-          <a:xfrm>
-            <a:off x="4315968" y="2148840"/>
-            <a:ext cx="3547872" cy="68580"/>
-          </a:xfrm>
-          <a:prstGeom prst="rect">
-            <a:avLst/>
-          </a:prstGeom>
-          <a:solidFill>
-            <a:srgbClr val="21A391"/>
-          </a:solidFill>
-          <a:ln>
-            <a:noFill/>
-          </a:ln>
-        </p:spPr>
-        <p:style>
-          <a:lnRef idx="1">
-            <a:schemeClr val="accent1"/>
-          </a:lnRef>
-          <a:fillRef idx="3">
-            <a:schemeClr val="accent1"/>
-          </a:fillRef>
-          <a:effectRef idx="2">
-            <a:schemeClr val="accent1"/>
-          </a:effectRef>
-          <a:fontRef idx="minor">
-            <a:schemeClr val="lt1"/>
-          </a:fontRef>
-        </p:style>
-        <p:txBody>
-          <a:bodyPr rtlCol="0" anchor="ctr"/>
-          <a:lstStyle/>
-          <a:p>
-            <a:pPr algn="ctr"/>
-          </a:p>
-        </p:txBody>
-      </p:sp>
-      <p:sp>
-        <p:nvSpPr>
-          <p:cNvPr id="20" name="Rounded Rectangle 19"/>
-          <p:cNvSpPr/>
-          <p:nvPr/>
-        </p:nvSpPr>
-        <p:spPr>
-          <a:xfrm>
-            <a:off x="4544568" y="2395728"/>
-            <a:ext cx="457200" cy="457200"/>
-          </a:xfrm>
-          <a:prstGeom prst="roundRect">
-            <a:avLst>
-              <a:gd name="adj" fmla="val 8000"/>
-            </a:avLst>
-          </a:prstGeom>
-          <a:solidFill>
-            <a:srgbClr val="21A391"/>
-          </a:solidFill>
-          <a:ln>
-            <a:noFill/>
-          </a:ln>
-        </p:spPr>
-        <p:style>
-          <a:lnRef idx="1">
-            <a:schemeClr val="accent1"/>
-          </a:lnRef>
-          <a:fillRef idx="3">
-            <a:schemeClr val="accent1"/>
-          </a:fillRef>
-          <a:effectRef idx="2">
-            <a:schemeClr val="accent1"/>
-          </a:effectRef>
-          <a:fontRef idx="minor">
-            <a:schemeClr val="lt1"/>
-          </a:fontRef>
-        </p:style>
-        <p:txBody>
-          <a:bodyPr rtlCol="0" anchor="ctr"/>
-          <a:lstStyle/>
-          <a:p>
-            <a:pPr algn="ctr"/>
-          </a:p>
-        </p:txBody>
-      </p:sp>
-      <p:sp>
-        <p:nvSpPr>
-          <p:cNvPr id="21" name="TextBox 20"/>
-          <p:cNvSpPr txBox="1"/>
-          <p:nvPr/>
-        </p:nvSpPr>
-        <p:spPr>
-          <a:xfrm>
-            <a:off x="4544568" y="2459736"/>
-            <a:ext cx="457200" cy="201168"/>
-          </a:xfrm>
-          <a:prstGeom prst="rect">
-            <a:avLst/>
-          </a:prstGeom>
-          <a:noFill/>
-        </p:spPr>
-        <p:txBody>
-          <a:bodyPr wrap="square" lIns="18288" rIns="18288" tIns="18288" bIns="18288" anchor="t">
-            <a:spAutoFit/>
-          </a:bodyPr>
-          <a:lstStyle/>
-          <a:p>
-            <a:pPr algn="ctr">
-              <a:defRPr sz="1600" b="1">
-                <a:solidFill>
-                  <a:srgbClr val="FFFFFF"/>
-                </a:solidFill>
-                <a:latin typeface="Avenir Next"/>
-              </a:defRPr>
-            </a:pPr>
-            <a:r>
-              <a:t>2</a:t>
-            </a:r>
-          </a:p>
-        </p:txBody>
-      </p:sp>
-      <p:sp>
-        <p:nvSpPr>
-          <p:cNvPr id="22" name="TextBox 21"/>
-          <p:cNvSpPr txBox="1"/>
-          <p:nvPr/>
-        </p:nvSpPr>
-        <p:spPr>
-          <a:xfrm>
-            <a:off x="5138928" y="2395728"/>
-            <a:ext cx="2487168" cy="512064"/>
-          </a:xfrm>
-          <a:prstGeom prst="rect">
-            <a:avLst/>
-          </a:prstGeom>
-          <a:noFill/>
-        </p:spPr>
-        <p:txBody>
-          <a:bodyPr wrap="square" lIns="18288" rIns="18288" tIns="18288" bIns="18288" anchor="t">
-            <a:spAutoFit/>
-          </a:bodyPr>
-          <a:lstStyle/>
-          <a:p>
-            <a:pPr algn="l">
-              <a:defRPr sz="2100" b="1">
-                <a:solidFill>
-                  <a:srgbClr val="21232B"/>
-                </a:solidFill>
-                <a:latin typeface="Avenir Next"/>
-              </a:defRPr>
-            </a:pPr>
-            <a:r>
-              <a:t>Read the summary</a:t>
-            </a:r>
-          </a:p>
-        </p:txBody>
-      </p:sp>
-      <p:sp>
-        <p:nvSpPr>
-          <p:cNvPr id="23" name="TextBox 22"/>
-          <p:cNvSpPr txBox="1"/>
-          <p:nvPr/>
-        </p:nvSpPr>
-        <p:spPr>
-          <a:xfrm>
-            <a:off x="4572000" y="3081528"/>
-            <a:ext cx="3035808" cy="2148839"/>
-          </a:xfrm>
-          <a:prstGeom prst="rect">
-            <a:avLst/>
-          </a:prstGeom>
-          <a:noFill/>
-        </p:spPr>
-        <p:txBody>
-          <a:bodyPr wrap="square" lIns="18288" rIns="18288" tIns="18288" bIns="18288" anchor="t">
-            <a:spAutoFit/>
-          </a:bodyPr>
-          <a:lstStyle/>
-          <a:p>
-            <a:pPr algn="l">
-              <a:defRPr sz="1700" b="0">
-                <a:solidFill>
-                  <a:srgbClr val="21232B"/>
-                </a:solidFill>
-                <a:latin typeface="Avenir Next"/>
-              </a:defRPr>
-            </a:pPr>
-            <a:r>
-              <a:t>Inspect spending totals, categories and receipt counts. Scroll to the expense log for individual entries.</a:t>
-            </a:r>
-          </a:p>
-        </p:txBody>
-      </p:sp>
-      <p:sp>
-        <p:nvSpPr>
-          <p:cNvPr id="24" name="Rounded Rectangle 23"/>
-          <p:cNvSpPr/>
-          <p:nvPr/>
-        </p:nvSpPr>
-        <p:spPr>
-          <a:xfrm>
-            <a:off x="8101583" y="2148840"/>
-            <a:ext cx="3547872" cy="3264408"/>
-          </a:xfrm>
-          <a:prstGeom prst="roundRect">
-            <a:avLst>
-              <a:gd name="adj" fmla="val 8000"/>
-            </a:avLst>
-          </a:prstGeom>
-          <a:solidFill>
-            <a:srgbClr val="FFFFFF"/>
-          </a:solidFill>
-          <a:ln>
-            <a:solidFill>
-              <a:srgbClr val="DCD7CD"/>
-            </a:solidFill>
-          </a:ln>
-        </p:spPr>
-        <p:style>
-          <a:lnRef idx="1">
-            <a:schemeClr val="accent1"/>
-          </a:lnRef>
-          <a:fillRef idx="3">
-            <a:schemeClr val="accent1"/>
-          </a:fillRef>
-          <a:effectRef idx="2">
-            <a:schemeClr val="accent1"/>
-          </a:effectRef>
-          <a:fontRef idx="minor">
-            <a:schemeClr val="lt1"/>
-          </a:fontRef>
-        </p:style>
-        <p:txBody>
-          <a:bodyPr rtlCol="0" anchor="ctr"/>
-          <a:lstStyle/>
-          <a:p>
-            <a:pPr algn="ctr"/>
-          </a:p>
-        </p:txBody>
-      </p:sp>
-      <p:sp>
-        <p:nvSpPr>
-          <p:cNvPr id="25" name="Rectangle 24"/>
-          <p:cNvSpPr/>
-          <p:nvPr/>
-        </p:nvSpPr>
-        <p:spPr>
-          <a:xfrm>
-            <a:off x="8101583" y="2148840"/>
-            <a:ext cx="3547872" cy="68580"/>
-          </a:xfrm>
-          <a:prstGeom prst="rect">
-            <a:avLst/>
-          </a:prstGeom>
-          <a:solidFill>
-            <a:srgbClr val="E86F56"/>
-          </a:solidFill>
-          <a:ln>
-            <a:noFill/>
-          </a:ln>
-        </p:spPr>
-        <p:style>
-          <a:lnRef idx="1">
-            <a:schemeClr val="accent1"/>
-          </a:lnRef>
-          <a:fillRef idx="3">
-            <a:schemeClr val="accent1"/>
-          </a:fillRef>
-          <a:effectRef idx="2">
-            <a:schemeClr val="accent1"/>
-          </a:effectRef>
-          <a:fontRef idx="minor">
-            <a:schemeClr val="lt1"/>
-          </a:fontRef>
-        </p:style>
-        <p:txBody>
-          <a:bodyPr rtlCol="0" anchor="ctr"/>
-          <a:lstStyle/>
-          <a:p>
-            <a:pPr algn="ctr"/>
-          </a:p>
-        </p:txBody>
-      </p:sp>
-      <p:sp>
-        <p:nvSpPr>
-          <p:cNvPr id="26" name="Rounded Rectangle 25"/>
-          <p:cNvSpPr/>
-          <p:nvPr/>
-        </p:nvSpPr>
-        <p:spPr>
-          <a:xfrm>
-            <a:off x="8330183" y="2395728"/>
-            <a:ext cx="457200" cy="457200"/>
-          </a:xfrm>
-          <a:prstGeom prst="roundRect">
-            <a:avLst>
-              <a:gd name="adj" fmla="val 8000"/>
-            </a:avLst>
-          </a:prstGeom>
-          <a:solidFill>
-            <a:srgbClr val="E86F56"/>
-          </a:solidFill>
-          <a:ln>
-            <a:noFill/>
-          </a:ln>
-        </p:spPr>
-        <p:style>
-          <a:lnRef idx="1">
-            <a:schemeClr val="accent1"/>
-          </a:lnRef>
-          <a:fillRef idx="3">
-            <a:schemeClr val="accent1"/>
-          </a:fillRef>
-          <a:effectRef idx="2">
-            <a:schemeClr val="accent1"/>
-          </a:effectRef>
-          <a:fontRef idx="minor">
-            <a:schemeClr val="lt1"/>
-          </a:fontRef>
-        </p:style>
-        <p:txBody>
-          <a:bodyPr rtlCol="0" anchor="ctr"/>
-          <a:lstStyle/>
-          <a:p>
-            <a:pPr algn="ctr"/>
-          </a:p>
-        </p:txBody>
-      </p:sp>
-      <p:sp>
-        <p:nvSpPr>
-          <p:cNvPr id="27" name="TextBox 26"/>
-          <p:cNvSpPr txBox="1"/>
-          <p:nvPr/>
-        </p:nvSpPr>
-        <p:spPr>
-          <a:xfrm>
-            <a:off x="8330183" y="2459736"/>
-            <a:ext cx="457200" cy="201168"/>
-          </a:xfrm>
-          <a:prstGeom prst="rect">
-            <a:avLst/>
-          </a:prstGeom>
-          <a:noFill/>
-        </p:spPr>
-        <p:txBody>
-          <a:bodyPr wrap="square" lIns="18288" rIns="18288" tIns="18288" bIns="18288" anchor="t">
-            <a:spAutoFit/>
-          </a:bodyPr>
-          <a:lstStyle/>
-          <a:p>
-            <a:pPr algn="ctr">
-              <a:defRPr sz="1600" b="1">
-                <a:solidFill>
-                  <a:srgbClr val="FFFFFF"/>
-                </a:solidFill>
-                <a:latin typeface="Avenir Next"/>
-              </a:defRPr>
-            </a:pPr>
-            <a:r>
-              <a:t>3</a:t>
-            </a:r>
-          </a:p>
-        </p:txBody>
-      </p:sp>
-      <p:sp>
-        <p:nvSpPr>
-          <p:cNvPr id="28" name="TextBox 27"/>
-          <p:cNvSpPr txBox="1"/>
-          <p:nvPr/>
-        </p:nvSpPr>
-        <p:spPr>
-          <a:xfrm>
-            <a:off x="8924544" y="2395728"/>
-            <a:ext cx="2487168" cy="512064"/>
-          </a:xfrm>
-          <a:prstGeom prst="rect">
-            <a:avLst/>
-          </a:prstGeom>
-          <a:noFill/>
-        </p:spPr>
-        <p:txBody>
-          <a:bodyPr wrap="square" lIns="18288" rIns="18288" tIns="18288" bIns="18288" anchor="t">
-            <a:spAutoFit/>
-          </a:bodyPr>
-          <a:lstStyle/>
-          <a:p>
-            <a:pPr algn="l">
-              <a:defRPr sz="2100" b="1">
-                <a:solidFill>
-                  <a:srgbClr val="21232B"/>
-                </a:solidFill>
-                <a:latin typeface="Avenir Next"/>
-              </a:defRPr>
-            </a:pPr>
-            <a:r>
-              <a:t>Inspect evidence</a:t>
-            </a:r>
-          </a:p>
-        </p:txBody>
-      </p:sp>
-      <p:sp>
-        <p:nvSpPr>
-          <p:cNvPr id="29" name="TextBox 28"/>
-          <p:cNvSpPr txBox="1"/>
-          <p:nvPr/>
-        </p:nvSpPr>
-        <p:spPr>
-          <a:xfrm>
-            <a:off x="8357615" y="3081528"/>
-            <a:ext cx="3035808" cy="2148839"/>
-          </a:xfrm>
-          <a:prstGeom prst="rect">
-            <a:avLst/>
-          </a:prstGeom>
-          <a:noFill/>
-        </p:spPr>
-        <p:txBody>
-          <a:bodyPr wrap="square" lIns="18288" rIns="18288" tIns="18288" bIns="18288" anchor="t">
-            <a:spAutoFit/>
-          </a:bodyPr>
-          <a:lstStyle/>
-          <a:p>
-            <a:pPr algn="l">
-              <a:defRPr sz="1700" b="0">
-                <a:solidFill>
-                  <a:srgbClr val="21232B"/>
-                </a:solidFill>
-                <a:latin typeface="Avenir Next"/>
-              </a:defRPr>
-            </a:pPr>
-            <a:r>
-              <a:t>Open an entry to check merchant, amount, date and receipt. If a detail is wrong, correct it in chat.</a:t>
-            </a:r>
-          </a:p>
-        </p:txBody>
-      </p:sp>
-      <p:sp>
-        <p:nvSpPr>
-          <p:cNvPr id="30" name="Rounded Rectangle 29"/>
-          <p:cNvSpPr/>
-          <p:nvPr/>
-        </p:nvSpPr>
-        <p:spPr>
-          <a:xfrm>
-            <a:off x="521207" y="5833872"/>
-            <a:ext cx="11128248" cy="438912"/>
-          </a:xfrm>
-          <a:prstGeom prst="roundRect">
-            <a:avLst>
-              <a:gd name="adj" fmla="val 8000"/>
-            </a:avLst>
-          </a:prstGeom>
-          <a:solidFill>
-            <a:srgbClr val="EEEADF"/>
-          </a:solidFill>
-          <a:ln>
-            <a:noFill/>
-          </a:ln>
-        </p:spPr>
-        <p:style>
-          <a:lnRef idx="1">
-            <a:schemeClr val="accent1"/>
-          </a:lnRef>
-          <a:fillRef idx="3">
-            <a:schemeClr val="accent1"/>
-          </a:fillRef>
-          <a:effectRef idx="2">
-            <a:schemeClr val="accent1"/>
-          </a:effectRef>
-          <a:fontRef idx="minor">
-            <a:schemeClr val="lt1"/>
-          </a:fontRef>
-        </p:style>
-        <p:txBody>
-          <a:bodyPr rtlCol="0" anchor="ctr"/>
-          <a:lstStyle/>
-          <a:p>
-            <a:pPr algn="ctr"/>
-          </a:p>
-        </p:txBody>
-      </p:sp>
-      <p:sp>
-        <p:nvSpPr>
-          <p:cNvPr id="31" name="Rectangle 30"/>
-          <p:cNvSpPr/>
-          <p:nvPr/>
-        </p:nvSpPr>
-        <p:spPr>
-          <a:xfrm>
-            <a:off x="521207" y="5833872"/>
-            <a:ext cx="73152" cy="438912"/>
-          </a:xfrm>
-          <a:prstGeom prst="rect">
-            <a:avLst/>
-          </a:prstGeom>
-          <a:solidFill>
-            <a:srgbClr val="DFA538"/>
-          </a:solidFill>
-          <a:ln>
-            <a:noFill/>
-          </a:ln>
-        </p:spPr>
-        <p:style>
-          <a:lnRef idx="1">
-            <a:schemeClr val="accent1"/>
-          </a:lnRef>
-          <a:fillRef idx="3">
-            <a:schemeClr val="accent1"/>
-          </a:fillRef>
-          <a:effectRef idx="2">
-            <a:schemeClr val="accent1"/>
-          </a:effectRef>
-          <a:fontRef idx="minor">
-            <a:schemeClr val="lt1"/>
-          </a:fontRef>
-        </p:style>
-        <p:txBody>
-          <a:bodyPr rtlCol="0" anchor="ctr"/>
-          <a:lstStyle/>
-          <a:p>
-            <a:pPr algn="ctr"/>
-          </a:p>
-        </p:txBody>
-      </p:sp>
-      <p:sp>
-        <p:nvSpPr>
-          <p:cNvPr id="32" name="TextBox 31"/>
-          <p:cNvSpPr txBox="1"/>
-          <p:nvPr/>
-        </p:nvSpPr>
-        <p:spPr>
-          <a:xfrm>
-            <a:off x="713232" y="5925312"/>
-            <a:ext cx="10698480" cy="265176"/>
-          </a:xfrm>
-          <a:prstGeom prst="rect">
-            <a:avLst/>
-          </a:prstGeom>
-          <a:noFill/>
-        </p:spPr>
-        <p:txBody>
-          <a:bodyPr wrap="square" lIns="18288" rIns="18288" tIns="18288" bIns="18288" anchor="t">
-            <a:spAutoFit/>
-          </a:bodyPr>
-          <a:lstStyle/>
-          <a:p>
-            <a:pPr algn="l">
-              <a:defRPr sz="1400" b="0">
-                <a:solidFill>
-                  <a:srgbClr val="21232B"/>
-                </a:solidFill>
-                <a:latin typeface="Avenir Next"/>
-              </a:defRPr>
-            </a:pPr>
-            <a:r>
-              <a:t>Prepared example: Corner Bakery · 4 October 2026 · S$9.60.</a:t>
+              <a:t>The supplied video shows the full product story; use this manual to check saved outcomes in the app.</a:t>
             </a:r>
           </a:p>
         </p:txBody>
